--- a/outputs/recap/MIPS-recapitulatif.pptx
+++ b/outputs/recap/MIPS-recapitulatif.pptx
@@ -15,9 +15,10 @@
     <p:sldId id="263" r:id="rId9"/>
     <p:sldId id="264" r:id="rId10"/>
     <p:sldId id="265" r:id="rId11"/>
+    <p:sldId id="266" r:id="rId12"/>
   </p:sldIdLst>
   <p:notesMasterIdLst>
-    <p:notesMasterId r:id="rId12"/>
+    <p:notesMasterId r:id="rId13"/>
   </p:notesMasterIdLst>
   <p:sldSz cx="12192000" cy="6858000"/>
   <p:notesSz cx="6858000" cy="12192000"/>
@@ -116,30 +117,35 @@
   <p:extLst>
     <p:ext uri="{521415D9-36F7-43E2-AB2F-B90AF26B5E84}">
       <p14:sectionLst xmlns:p14="http://schemas.microsoft.com/office/powerpoint/2010/main">
-        <p14:section name="Introduction" id="{7d0ea9b2-26f5-e90f-73c9-e7954e687925}">
+        <p14:section name="Introduction" id="{ece87b05-b02d-5ae1-b8af-44a67482a9ee}">
           <p14:sldIdLst>
             <p14:sldId id="256"/>
             <p14:sldId id="257"/>
           </p14:sldIdLst>
         </p14:section>
-        <p14:section name="La plateforme" id="{ed9d2a91-206c-1b2c-6a67-2e5db9b96d43}">
+        <p14:section name="La plateforme" id="{985fdb88-eae9-439e-f75a-0816f97f723b}">
           <p14:sldIdLst>
             <p14:sldId id="258"/>
             <p14:sldId id="259"/>
             <p14:sldId id="260"/>
           </p14:sldIdLst>
         </p14:section>
-        <p14:section name="Fonds et BoM" id="{af0a8616-c3a7-4497-6cf2-156c1af0b70e}">
+        <p14:section name="Fonds et BoM" id="{952aecd4-db84-2a36-9935-68b0dd1ffdd8}">
           <p14:sldIdLst>
             <p14:sldId id="261"/>
             <p14:sldId id="262"/>
           </p14:sldIdLst>
         </p14:section>
-        <p14:section name="Suite" id="{a0e55fc4-eb5e-bb11-195f-3e8cd4bcb945}">
+        <p14:section name="Qualité" id="{7e17528f-4448-9893-0aca-bacb74271b9e}">
           <p14:sldIdLst>
             <p14:sldId id="263"/>
+          </p14:sldIdLst>
+        </p14:section>
+        <p14:section name="Suite" id="{94b78ed5-7f83-e59d-1ddc-cfd43b642064}">
+          <p14:sldIdLst>
             <p14:sldId id="264"/>
             <p14:sldId id="265"/>
+            <p14:sldId id="266"/>
           </p14:sldIdLst>
         </p14:section>
       </p14:sectionLst>
@@ -634,7 +640,7 @@
           <a:p>
             <a:r>
               <a:rPr lang="en-US" dirty="0"/>
-              <a:t>Tant que le modèle n'est pas choisi, ne pas développer la réconciliation trust et ne pas la promettre au régulateur.</a:t>
+              <a:t>Aussi côté IT : seuil de blocage par adresse IP (50 échecs, à confronter au trafic du bureau) ; la mise à jour du schéma déconnecte tous les utilisateurs une fois. Détails : checklist KYC (pièces, 25 % bénéficiaire effectif, revues 1/2/3 ans, règle PEP) ; reporting (unité de somme_totale, remboursements, TVA, émetteur) ; wallets MyT Money, Juice et BankXfer ; rapprochement MCB à valider sur un mois déjà réconcilié.</a:t>
             </a:r>
             <a:endParaRPr lang="en-US" dirty="0"/>
           </a:p>
@@ -658,6 +664,94 @@
             <a:fld id="{F7021451-1387-4CA6-816F-3879F97B5CBC}" type="slidenum">
               <a:rPr lang="en-US"/>
               <a:t>10</a:t>
+            </a:fld>
+            <a:endParaRPr lang="en-US"/>
+          </a:p>
+        </p:txBody>
+      </p:sp>
+    </p:spTree>
+    <p:extLst>
+      <p:ext uri="{BB962C8B-B14F-4D97-AF65-F5344CB8AC3E}">
+        <p14:creationId xmlns:p14="http://schemas.microsoft.com/office/powerpoint/2010/main" val="1024086991"/>
+      </p:ext>
+    </p:extLst>
+  </p:cSld>
+  <p:clrMapOvr>
+    <a:masterClrMapping/>
+  </p:clrMapOvr>
+</p:notes>
+</file>
+
+<file path=ppt/notesSlides/notesSlide11.xml><?xml version="1.0" encoding="utf-8"?>
+<p:notes xmlns:a="http://schemas.openxmlformats.org/drawingml/2006/main" xmlns:r="http://schemas.openxmlformats.org/officeDocument/2006/relationships" xmlns:p="http://schemas.openxmlformats.org/presentationml/2006/main">
+  <p:cSld>
+    <p:spTree>
+      <p:nvGrpSpPr>
+        <p:cNvPr id="1" name=""/>
+        <p:cNvGrpSpPr/>
+        <p:nvPr/>
+      </p:nvGrpSpPr>
+      <p:grpSpPr>
+        <a:xfrm>
+          <a:off x="0" y="0"/>
+          <a:ext cx="0" cy="0"/>
+          <a:chOff x="0" y="0"/>
+          <a:chExt cx="0" cy="0"/>
+        </a:xfrm>
+      </p:grpSpPr>
+      <p:sp>
+        <p:nvSpPr>
+          <p:cNvPr id="2" name="Slide Image Placeholder 1"/>
+          <p:cNvSpPr>
+            <a:spLocks noGrp="1" noRot="1" noChangeAspect="1"/>
+          </p:cNvSpPr>
+          <p:nvPr>
+            <p:ph type="sldImg"/>
+          </p:nvPr>
+        </p:nvSpPr>
+        <p:spPr/>
+      </p:sp>
+      <p:sp>
+        <p:nvSpPr>
+          <p:cNvPr id="3" name="Notes Placeholder 2"/>
+          <p:cNvSpPr>
+            <a:spLocks noGrp="1"/>
+          </p:cNvSpPr>
+          <p:nvPr>
+            <p:ph type="body" idx="1"/>
+          </p:nvPr>
+        </p:nvSpPr>
+        <p:spPr/>
+        <p:txBody>
+          <a:bodyPr/>
+          <a:lstStyle/>
+          <a:p>
+            <a:r>
+              <a:rPr lang="en-US" dirty="0"/>
+              <a:t>Tant que le modèle n'est pas choisi, ne pas développer la réconciliation trust et ne pas la promettre au régulateur.</a:t>
+            </a:r>
+            <a:endParaRPr lang="en-US" dirty="0"/>
+          </a:p>
+        </p:txBody>
+      </p:sp>
+      <p:sp>
+        <p:nvSpPr>
+          <p:cNvPr id="4" name="Slide Number Placeholder 3"/>
+          <p:cNvSpPr>
+            <a:spLocks noGrp="1"/>
+          </p:cNvSpPr>
+          <p:nvPr>
+            <p:ph type="sldNum" sz="quarter" idx="10"/>
+          </p:nvPr>
+        </p:nvSpPr>
+        <p:spPr/>
+        <p:txBody>
+          <a:bodyPr/>
+          <a:lstStyle/>
+          <a:p>
+            <a:fld id="{F7021451-1387-4CA6-816F-3879F97B5CBC}" type="slidenum">
+              <a:rPr lang="en-US"/>
+              <a:t>11</a:t>
             </a:fld>
             <a:endParaRPr lang="en-US"/>
           </a:p>
@@ -722,7 +816,7 @@
           <a:p>
             <a:r>
               <a:rPr lang="en-US" dirty="0"/>
-              <a:t>Trois messages : ce qui est construit, ce que ça prouve pour la BoM, et les deux décisions qui bloquent. Les 124 vérifications : 113 tests du portail et 11 tests de non-régression côté personnel.</a:t>
+              <a:t>Trois messages : ce qui est construit, ce que ça prouve pour la BoM, et les deux décisions qui bloquent. Les 478 vérifications couvrent les neuf modules, sur des données fictives uniquement.</a:t>
             </a:r>
             <a:endParaRPr lang="en-US" dirty="0"/>
           </a:p>
@@ -1250,7 +1344,7 @@
           <a:p>
             <a:r>
               <a:rPr lang="en-US" dirty="0"/>
-              <a:t>Chaque spec décrit le comportement attendu indépendamment de la technologie de my.mips.mu, que je ne connais pas.</a:t>
+              <a:t>Les tests tournent avec une seule commande : tests/run_tests.sh. Ils prouvent que le code applique les règles figées, pas que ces règles sont les bonnes pour MIPS. Les deux failles corrigées sont dans la PR #10.</a:t>
             </a:r>
             <a:endParaRPr lang="en-US" dirty="0"/>
           </a:p>
@@ -1338,7 +1432,7 @@
           <a:p>
             <a:r>
               <a:rPr lang="en-US" dirty="0"/>
-              <a:t>Détails : checklist KYC (pièces, 25 % bénéficiaire effectif, revues 1/2/3 ans, règle PEP) ; reporting (unité de somme_totale, remboursements, TVA, émetteur) ; wallets MyT Money, Juice et BankXfer ; rapprochement MCB à valider sur un mois déjà réconcilié.</a:t>
+              <a:t>Chaque spec décrit le comportement attendu indépendamment de la technologie de my.mips.mu, que je ne connais pas.</a:t>
             </a:r>
             <a:endParaRPr lang="en-US" dirty="0"/>
           </a:p>
@@ -2160,6 +2254,1059 @@
         </p:nvSpPr>
         <p:spPr>
           <a:xfrm>
+            <a:off x="457200" y="320040"/>
+            <a:ext cx="11247120" cy="731520"/>
+          </a:xfrm>
+          <a:prstGeom prst="rect">
+            <a:avLst/>
+          </a:prstGeom>
+          <a:noFill/>
+          <a:ln/>
+        </p:spPr>
+        <p:txBody>
+          <a:bodyPr wrap="square" lIns="0" tIns="0" rIns="0" bIns="0" rtlCol="0" anchor="ctr"/>
+          <a:lstStyle/>
+          <a:p>
+            <a:pPr algn="l" indent="0" marL="0">
+              <a:buNone/>
+            </a:pPr>
+            <a:r>
+              <a:rPr lang="en-US" sz="3000" b="1" dirty="0">
+                <a:solidFill>
+                  <a:schemeClr val="tx1"/>
+                </a:solidFill>
+              </a:rPr>
+              <a:t>Neuf décisions et vérifications en attente</a:t>
+            </a:r>
+            <a:endParaRPr lang="en-US" sz="3000" dirty="0"/>
+          </a:p>
+        </p:txBody>
+      </p:sp>
+      <p:sp>
+        <p:nvSpPr>
+          <p:cNvPr id="3" name="dec-0"/>
+          <p:cNvSpPr/>
+          <p:nvPr/>
+        </p:nvSpPr>
+        <p:spPr>
+          <a:xfrm>
+            <a:off x="457200" y="1325880"/>
+            <a:ext cx="3566160" cy="1234440"/>
+          </a:xfrm>
+          <a:prstGeom prst="roundRect">
+            <a:avLst>
+              <a:gd name="adj" fmla="val 5926"/>
+            </a:avLst>
+          </a:prstGeom>
+          <a:solidFill>
+            <a:schemeClr val="accent6">
+              <a:alpha val="12000"/>
+            </a:schemeClr>
+          </a:solidFill>
+          <a:ln w="19050">
+            <a:solidFill>
+              <a:schemeClr val="accent6"/>
+            </a:solidFill>
+            <a:prstDash val="solid"/>
+          </a:ln>
+        </p:spPr>
+      </p:sp>
+      <p:sp>
+        <p:nvSpPr>
+          <p:cNvPr id="4" name="Text 2"/>
+          <p:cNvSpPr txBox="1"/>
+          <p:nvPr/>
+        </p:nvSpPr>
+        <p:spPr>
+          <a:xfrm>
+            <a:off x="594360" y="1435608"/>
+            <a:ext cx="3291840" cy="320040"/>
+          </a:xfrm>
+          <a:prstGeom prst="rect">
+            <a:avLst/>
+          </a:prstGeom>
+          <a:noFill/>
+          <a:ln/>
+        </p:spPr>
+        <p:txBody>
+          <a:bodyPr wrap="square" lIns="0" tIns="0" rIns="0" bIns="0" rtlCol="0" anchor="t"/>
+          <a:lstStyle/>
+          <a:p>
+            <a:pPr algn="l" indent="0" marL="0">
+              <a:buNone/>
+            </a:pPr>
+            <a:r>
+              <a:rPr lang="en-US" sz="1100" b="1" dirty="0">
+                <a:solidFill>
+                  <a:schemeClr val="accent6"/>
+                </a:solidFill>
+              </a:rPr>
+              <a:t>CEO · BLOQUANT</a:t>
+            </a:r>
+            <a:endParaRPr lang="en-US" sz="1100" dirty="0"/>
+          </a:p>
+        </p:txBody>
+      </p:sp>
+      <p:sp>
+        <p:nvSpPr>
+          <p:cNvPr id="5" name="Text 3"/>
+          <p:cNvSpPr txBox="1"/>
+          <p:nvPr/>
+        </p:nvSpPr>
+        <p:spPr>
+          <a:xfrm>
+            <a:off x="594360" y="1783080"/>
+            <a:ext cx="3291840" cy="685800"/>
+          </a:xfrm>
+          <a:prstGeom prst="rect">
+            <a:avLst/>
+          </a:prstGeom>
+          <a:noFill/>
+          <a:ln/>
+        </p:spPr>
+        <p:txBody>
+          <a:bodyPr wrap="square" lIns="0" tIns="0" rIns="0" bIns="0" rtlCol="0" anchor="t"/>
+          <a:lstStyle/>
+          <a:p>
+            <a:pPr algn="l" indent="0" marL="0">
+              <a:buNone/>
+            </a:pPr>
+            <a:r>
+              <a:rPr lang="en-US" sz="1600" b="1" dirty="0">
+                <a:solidFill>
+                  <a:schemeClr val="tx1"/>
+                </a:solidFill>
+              </a:rPr>
+              <a:t>Modèle A ou B pour SPIN</a:t>
+            </a:r>
+            <a:endParaRPr lang="en-US" sz="1600" dirty="0"/>
+          </a:p>
+        </p:txBody>
+      </p:sp>
+      <p:sp>
+        <p:nvSpPr>
+          <p:cNvPr id="6" name="dec-1"/>
+          <p:cNvSpPr/>
+          <p:nvPr/>
+        </p:nvSpPr>
+        <p:spPr>
+          <a:xfrm>
+            <a:off x="4251960" y="1325880"/>
+            <a:ext cx="3566160" cy="1234440"/>
+          </a:xfrm>
+          <a:prstGeom prst="roundRect">
+            <a:avLst>
+              <a:gd name="adj" fmla="val 5926"/>
+            </a:avLst>
+          </a:prstGeom>
+          <a:solidFill>
+            <a:schemeClr val="accent6">
+              <a:alpha val="12000"/>
+            </a:schemeClr>
+          </a:solidFill>
+          <a:ln w="19050">
+            <a:solidFill>
+              <a:schemeClr val="accent6"/>
+            </a:solidFill>
+            <a:prstDash val="solid"/>
+          </a:ln>
+        </p:spPr>
+      </p:sp>
+      <p:sp>
+        <p:nvSpPr>
+          <p:cNvPr id="7" name="Text 5"/>
+          <p:cNvSpPr txBox="1"/>
+          <p:nvPr/>
+        </p:nvSpPr>
+        <p:spPr>
+          <a:xfrm>
+            <a:off x="4389120" y="1435608"/>
+            <a:ext cx="3291840" cy="320040"/>
+          </a:xfrm>
+          <a:prstGeom prst="rect">
+            <a:avLst/>
+          </a:prstGeom>
+          <a:noFill/>
+          <a:ln/>
+        </p:spPr>
+        <p:txBody>
+          <a:bodyPr wrap="square" lIns="0" tIns="0" rIns="0" bIns="0" rtlCol="0" anchor="t"/>
+          <a:lstStyle/>
+          <a:p>
+            <a:pPr algn="l" indent="0" marL="0">
+              <a:buNone/>
+            </a:pPr>
+            <a:r>
+              <a:rPr lang="en-US" sz="1100" b="1" dirty="0">
+                <a:solidFill>
+                  <a:schemeClr val="accent6"/>
+                </a:solidFill>
+              </a:rPr>
+              <a:t>CONFORMITÉ · BLOQUANT</a:t>
+            </a:r>
+            <a:endParaRPr lang="en-US" sz="1100" dirty="0"/>
+          </a:p>
+        </p:txBody>
+      </p:sp>
+      <p:sp>
+        <p:nvSpPr>
+          <p:cNvPr id="8" name="Text 6"/>
+          <p:cNvSpPr txBox="1"/>
+          <p:nvPr/>
+        </p:nvSpPr>
+        <p:spPr>
+          <a:xfrm>
+            <a:off x="4389120" y="1783080"/>
+            <a:ext cx="3291840" cy="685800"/>
+          </a:xfrm>
+          <a:prstGeom prst="rect">
+            <a:avLst/>
+          </a:prstGeom>
+          <a:noFill/>
+          <a:ln/>
+        </p:spPr>
+        <p:txBody>
+          <a:bodyPr wrap="square" lIns="0" tIns="0" rIns="0" bIns="0" rtlCol="0" anchor="t"/>
+          <a:lstStyle/>
+          <a:p>
+            <a:pPr algn="l" indent="0" marL="0">
+              <a:buNone/>
+            </a:pPr>
+            <a:r>
+              <a:rPr lang="en-US" sz="1600" b="1" dirty="0">
+                <a:solidFill>
+                  <a:schemeClr val="tx1"/>
+                </a:solidFill>
+              </a:rPr>
+              <a:t>Textes BoM sur le cantonnement</a:t>
+            </a:r>
+            <a:endParaRPr lang="en-US" sz="1600" dirty="0"/>
+          </a:p>
+        </p:txBody>
+      </p:sp>
+      <p:sp>
+        <p:nvSpPr>
+          <p:cNvPr id="9" name="dec-2"/>
+          <p:cNvSpPr/>
+          <p:nvPr/>
+        </p:nvSpPr>
+        <p:spPr>
+          <a:xfrm>
+            <a:off x="8046720" y="1325880"/>
+            <a:ext cx="3566160" cy="1234440"/>
+          </a:xfrm>
+          <a:prstGeom prst="roundRect">
+            <a:avLst>
+              <a:gd name="adj" fmla="val 5926"/>
+            </a:avLst>
+          </a:prstGeom>
+          <a:solidFill>
+            <a:schemeClr val="accent1">
+              <a:alpha val="8000"/>
+            </a:schemeClr>
+          </a:solidFill>
+          <a:ln w="9525">
+            <a:solidFill>
+              <a:schemeClr val="bg2"/>
+            </a:solidFill>
+            <a:prstDash val="solid"/>
+          </a:ln>
+        </p:spPr>
+      </p:sp>
+      <p:sp>
+        <p:nvSpPr>
+          <p:cNvPr id="10" name="Text 8"/>
+          <p:cNvSpPr txBox="1"/>
+          <p:nvPr/>
+        </p:nvSpPr>
+        <p:spPr>
+          <a:xfrm>
+            <a:off x="8183880" y="1435608"/>
+            <a:ext cx="3291840" cy="320040"/>
+          </a:xfrm>
+          <a:prstGeom prst="rect">
+            <a:avLst/>
+          </a:prstGeom>
+          <a:noFill/>
+          <a:ln/>
+        </p:spPr>
+        <p:txBody>
+          <a:bodyPr wrap="square" lIns="0" tIns="0" rIns="0" bIns="0" rtlCol="0" anchor="t"/>
+          <a:lstStyle/>
+          <a:p>
+            <a:pPr algn="l" indent="0" marL="0">
+              <a:buNone/>
+            </a:pPr>
+            <a:r>
+              <a:rPr lang="en-US" sz="1100" b="1" dirty="0">
+                <a:solidFill>
+                  <a:schemeClr val="accent1"/>
+                </a:solidFill>
+              </a:rPr>
+              <a:t>CONFORMITÉ</a:t>
+            </a:r>
+            <a:endParaRPr lang="en-US" sz="1100" dirty="0"/>
+          </a:p>
+        </p:txBody>
+      </p:sp>
+      <p:sp>
+        <p:nvSpPr>
+          <p:cNvPr id="11" name="Text 9"/>
+          <p:cNvSpPr txBox="1"/>
+          <p:nvPr/>
+        </p:nvSpPr>
+        <p:spPr>
+          <a:xfrm>
+            <a:off x="8183880" y="1783080"/>
+            <a:ext cx="3291840" cy="685800"/>
+          </a:xfrm>
+          <a:prstGeom prst="rect">
+            <a:avLst/>
+          </a:prstGeom>
+          <a:noFill/>
+          <a:ln/>
+        </p:spPr>
+        <p:txBody>
+          <a:bodyPr wrap="square" lIns="0" tIns="0" rIns="0" bIns="0" rtlCol="0" anchor="t"/>
+          <a:lstStyle/>
+          <a:p>
+            <a:pPr algn="l" indent="0" marL="0">
+              <a:buNone/>
+            </a:pPr>
+            <a:r>
+              <a:rPr lang="en-US" sz="1600" b="1" dirty="0">
+                <a:solidFill>
+                  <a:schemeClr val="tx1"/>
+                </a:solidFill>
+              </a:rPr>
+              <a:t>Checklist KYC et seuils</a:t>
+            </a:r>
+            <a:endParaRPr lang="en-US" sz="1600" dirty="0"/>
+          </a:p>
+        </p:txBody>
+      </p:sp>
+      <p:sp>
+        <p:nvSpPr>
+          <p:cNvPr id="12" name="dec-3"/>
+          <p:cNvSpPr/>
+          <p:nvPr/>
+        </p:nvSpPr>
+        <p:spPr>
+          <a:xfrm>
+            <a:off x="457200" y="2788920"/>
+            <a:ext cx="3566160" cy="1234440"/>
+          </a:xfrm>
+          <a:prstGeom prst="roundRect">
+            <a:avLst>
+              <a:gd name="adj" fmla="val 5926"/>
+            </a:avLst>
+          </a:prstGeom>
+          <a:solidFill>
+            <a:schemeClr val="accent1">
+              <a:alpha val="8000"/>
+            </a:schemeClr>
+          </a:solidFill>
+          <a:ln w="9525">
+            <a:solidFill>
+              <a:schemeClr val="bg2"/>
+            </a:solidFill>
+            <a:prstDash val="solid"/>
+          </a:ln>
+        </p:spPr>
+      </p:sp>
+      <p:sp>
+        <p:nvSpPr>
+          <p:cNvPr id="13" name="Text 11"/>
+          <p:cNvSpPr txBox="1"/>
+          <p:nvPr/>
+        </p:nvSpPr>
+        <p:spPr>
+          <a:xfrm>
+            <a:off x="594360" y="2898648"/>
+            <a:ext cx="3291840" cy="320040"/>
+          </a:xfrm>
+          <a:prstGeom prst="rect">
+            <a:avLst/>
+          </a:prstGeom>
+          <a:noFill/>
+          <a:ln/>
+        </p:spPr>
+        <p:txBody>
+          <a:bodyPr wrap="square" lIns="0" tIns="0" rIns="0" bIns="0" rtlCol="0" anchor="t"/>
+          <a:lstStyle/>
+          <a:p>
+            <a:pPr algn="l" indent="0" marL="0">
+              <a:buNone/>
+            </a:pPr>
+            <a:r>
+              <a:rPr lang="en-US" sz="1100" b="1" dirty="0">
+                <a:solidFill>
+                  <a:schemeClr val="accent1"/>
+                </a:solidFill>
+              </a:rPr>
+              <a:t>JURIDIQUE</a:t>
+            </a:r>
+            <a:endParaRPr lang="en-US" sz="1100" dirty="0"/>
+          </a:p>
+        </p:txBody>
+      </p:sp>
+      <p:sp>
+        <p:nvSpPr>
+          <p:cNvPr id="14" name="Text 12"/>
+          <p:cNvSpPr txBox="1"/>
+          <p:nvPr/>
+        </p:nvSpPr>
+        <p:spPr>
+          <a:xfrm>
+            <a:off x="594360" y="3246120"/>
+            <a:ext cx="3291840" cy="685800"/>
+          </a:xfrm>
+          <a:prstGeom prst="rect">
+            <a:avLst/>
+          </a:prstGeom>
+          <a:noFill/>
+          <a:ln/>
+        </p:spPr>
+        <p:txBody>
+          <a:bodyPr wrap="square" lIns="0" tIns="0" rIns="0" bIns="0" rtlCol="0" anchor="t"/>
+          <a:lstStyle/>
+          <a:p>
+            <a:pPr algn="l" indent="0" marL="0">
+              <a:buNone/>
+            </a:pPr>
+            <a:r>
+              <a:rPr lang="en-US" sz="1600" b="1" dirty="0">
+                <a:solidFill>
+                  <a:schemeClr val="tx1"/>
+                </a:solidFill>
+              </a:rPr>
+              <a:t>Texte des conditions du portail</a:t>
+            </a:r>
+            <a:endParaRPr lang="en-US" sz="1600" dirty="0"/>
+          </a:p>
+        </p:txBody>
+      </p:sp>
+      <p:sp>
+        <p:nvSpPr>
+          <p:cNvPr id="15" name="dec-4"/>
+          <p:cNvSpPr/>
+          <p:nvPr/>
+        </p:nvSpPr>
+        <p:spPr>
+          <a:xfrm>
+            <a:off x="4251960" y="2788920"/>
+            <a:ext cx="3566160" cy="1234440"/>
+          </a:xfrm>
+          <a:prstGeom prst="roundRect">
+            <a:avLst>
+              <a:gd name="adj" fmla="val 5926"/>
+            </a:avLst>
+          </a:prstGeom>
+          <a:solidFill>
+            <a:schemeClr val="accent1">
+              <a:alpha val="8000"/>
+            </a:schemeClr>
+          </a:solidFill>
+          <a:ln w="9525">
+            <a:solidFill>
+              <a:schemeClr val="bg2"/>
+            </a:solidFill>
+            <a:prstDash val="solid"/>
+          </a:ln>
+        </p:spPr>
+      </p:sp>
+      <p:sp>
+        <p:nvSpPr>
+          <p:cNvPr id="16" name="Text 14"/>
+          <p:cNvSpPr txBox="1"/>
+          <p:nvPr/>
+        </p:nvSpPr>
+        <p:spPr>
+          <a:xfrm>
+            <a:off x="4389120" y="2898648"/>
+            <a:ext cx="3291840" cy="320040"/>
+          </a:xfrm>
+          <a:prstGeom prst="rect">
+            <a:avLst/>
+          </a:prstGeom>
+          <a:noFill/>
+          <a:ln/>
+        </p:spPr>
+        <p:txBody>
+          <a:bodyPr wrap="square" lIns="0" tIns="0" rIns="0" bIns="0" rtlCol="0" anchor="t"/>
+          <a:lstStyle/>
+          <a:p>
+            <a:pPr algn="l" indent="0" marL="0">
+              <a:buNone/>
+            </a:pPr>
+            <a:r>
+              <a:rPr lang="en-US" sz="1100" b="1" dirty="0">
+                <a:solidFill>
+                  <a:schemeClr val="accent1"/>
+                </a:solidFill>
+              </a:rPr>
+              <a:t>FINANCE</a:t>
+            </a:r>
+            <a:endParaRPr lang="en-US" sz="1100" dirty="0"/>
+          </a:p>
+        </p:txBody>
+      </p:sp>
+      <p:sp>
+        <p:nvSpPr>
+          <p:cNvPr id="17" name="Text 15"/>
+          <p:cNvSpPr txBox="1"/>
+          <p:nvPr/>
+        </p:nvSpPr>
+        <p:spPr>
+          <a:xfrm>
+            <a:off x="4389120" y="3246120"/>
+            <a:ext cx="3291840" cy="685800"/>
+          </a:xfrm>
+          <a:prstGeom prst="rect">
+            <a:avLst/>
+          </a:prstGeom>
+          <a:noFill/>
+          <a:ln/>
+        </p:spPr>
+        <p:txBody>
+          <a:bodyPr wrap="square" lIns="0" tIns="0" rIns="0" bIns="0" rtlCol="0" anchor="t"/>
+          <a:lstStyle/>
+          <a:p>
+            <a:pPr algn="l" indent="0" marL="0">
+              <a:buNone/>
+            </a:pPr>
+            <a:r>
+              <a:rPr lang="en-US" sz="1600" b="1" dirty="0">
+                <a:solidFill>
+                  <a:schemeClr val="tx1"/>
+                </a:solidFill>
+              </a:rPr>
+              <a:t>Points ouverts du reporting</a:t>
+            </a:r>
+            <a:endParaRPr lang="en-US" sz="1600" dirty="0"/>
+          </a:p>
+        </p:txBody>
+      </p:sp>
+      <p:sp>
+        <p:nvSpPr>
+          <p:cNvPr id="18" name="dec-5"/>
+          <p:cNvSpPr/>
+          <p:nvPr/>
+        </p:nvSpPr>
+        <p:spPr>
+          <a:xfrm>
+            <a:off x="8046720" y="2788920"/>
+            <a:ext cx="3566160" cy="1234440"/>
+          </a:xfrm>
+          <a:prstGeom prst="roundRect">
+            <a:avLst>
+              <a:gd name="adj" fmla="val 5926"/>
+            </a:avLst>
+          </a:prstGeom>
+          <a:solidFill>
+            <a:schemeClr val="accent1">
+              <a:alpha val="8000"/>
+            </a:schemeClr>
+          </a:solidFill>
+          <a:ln w="9525">
+            <a:solidFill>
+              <a:schemeClr val="bg2"/>
+            </a:solidFill>
+            <a:prstDash val="solid"/>
+          </a:ln>
+        </p:spPr>
+      </p:sp>
+      <p:sp>
+        <p:nvSpPr>
+          <p:cNvPr id="19" name="Text 17"/>
+          <p:cNvSpPr txBox="1"/>
+          <p:nvPr/>
+        </p:nvSpPr>
+        <p:spPr>
+          <a:xfrm>
+            <a:off x="8183880" y="2898648"/>
+            <a:ext cx="3291840" cy="320040"/>
+          </a:xfrm>
+          <a:prstGeom prst="rect">
+            <a:avLst/>
+          </a:prstGeom>
+          <a:noFill/>
+          <a:ln/>
+        </p:spPr>
+        <p:txBody>
+          <a:bodyPr wrap="square" lIns="0" tIns="0" rIns="0" bIns="0" rtlCol="0" anchor="t"/>
+          <a:lstStyle/>
+          <a:p>
+            <a:pPr algn="l" indent="0" marL="0">
+              <a:buNone/>
+            </a:pPr>
+            <a:r>
+              <a:rPr lang="en-US" sz="1100" b="1" dirty="0">
+                <a:solidFill>
+                  <a:schemeClr val="accent1"/>
+                </a:solidFill>
+              </a:rPr>
+              <a:t>FINANCE</a:t>
+            </a:r>
+            <a:endParaRPr lang="en-US" sz="1100" dirty="0"/>
+          </a:p>
+        </p:txBody>
+      </p:sp>
+      <p:sp>
+        <p:nvSpPr>
+          <p:cNvPr id="20" name="Text 18"/>
+          <p:cNvSpPr txBox="1"/>
+          <p:nvPr/>
+        </p:nvSpPr>
+        <p:spPr>
+          <a:xfrm>
+            <a:off x="8183880" y="3246120"/>
+            <a:ext cx="3291840" cy="685800"/>
+          </a:xfrm>
+          <a:prstGeom prst="rect">
+            <a:avLst/>
+          </a:prstGeom>
+          <a:noFill/>
+          <a:ln/>
+        </p:spPr>
+        <p:txBody>
+          <a:bodyPr wrap="square" lIns="0" tIns="0" rIns="0" bIns="0" rtlCol="0" anchor="t"/>
+          <a:lstStyle/>
+          <a:p>
+            <a:pPr algn="l" indent="0" marL="0">
+              <a:buNone/>
+            </a:pPr>
+            <a:r>
+              <a:rPr lang="en-US" sz="1600" b="1" dirty="0">
+                <a:solidFill>
+                  <a:schemeClr val="tx1"/>
+                </a:solidFill>
+              </a:rPr>
+              <a:t>Flux des wallets et virements</a:t>
+            </a:r>
+            <a:endParaRPr lang="en-US" sz="1600" dirty="0"/>
+          </a:p>
+        </p:txBody>
+      </p:sp>
+      <p:sp>
+        <p:nvSpPr>
+          <p:cNvPr id="21" name="dec-6"/>
+          <p:cNvSpPr/>
+          <p:nvPr/>
+        </p:nvSpPr>
+        <p:spPr>
+          <a:xfrm>
+            <a:off x="457200" y="4251960"/>
+            <a:ext cx="3566160" cy="1234440"/>
+          </a:xfrm>
+          <a:prstGeom prst="roundRect">
+            <a:avLst>
+              <a:gd name="adj" fmla="val 5926"/>
+            </a:avLst>
+          </a:prstGeom>
+          <a:solidFill>
+            <a:schemeClr val="accent1">
+              <a:alpha val="8000"/>
+            </a:schemeClr>
+          </a:solidFill>
+          <a:ln w="9525">
+            <a:solidFill>
+              <a:schemeClr val="bg2"/>
+            </a:solidFill>
+            <a:prstDash val="solid"/>
+          </a:ln>
+        </p:spPr>
+      </p:sp>
+      <p:sp>
+        <p:nvSpPr>
+          <p:cNvPr id="22" name="Text 20"/>
+          <p:cNvSpPr txBox="1"/>
+          <p:nvPr/>
+        </p:nvSpPr>
+        <p:spPr>
+          <a:xfrm>
+            <a:off x="594360" y="4361688"/>
+            <a:ext cx="3291840" cy="320040"/>
+          </a:xfrm>
+          <a:prstGeom prst="rect">
+            <a:avLst/>
+          </a:prstGeom>
+          <a:noFill/>
+          <a:ln/>
+        </p:spPr>
+        <p:txBody>
+          <a:bodyPr wrap="square" lIns="0" tIns="0" rIns="0" bIns="0" rtlCol="0" anchor="t"/>
+          <a:lstStyle/>
+          <a:p>
+            <a:pPr algn="l" indent="0" marL="0">
+              <a:buNone/>
+            </a:pPr>
+            <a:r>
+              <a:rPr lang="en-US" sz="1100" b="1" dirty="0">
+                <a:solidFill>
+                  <a:schemeClr val="accent1"/>
+                </a:solidFill>
+              </a:rPr>
+              <a:t>IT</a:t>
+            </a:r>
+            <a:endParaRPr lang="en-US" sz="1100" dirty="0"/>
+          </a:p>
+        </p:txBody>
+      </p:sp>
+      <p:sp>
+        <p:nvSpPr>
+          <p:cNvPr id="23" name="Text 21"/>
+          <p:cNvSpPr txBox="1"/>
+          <p:nvPr/>
+        </p:nvSpPr>
+        <p:spPr>
+          <a:xfrm>
+            <a:off x="594360" y="4709160"/>
+            <a:ext cx="3291840" cy="685800"/>
+          </a:xfrm>
+          <a:prstGeom prst="rect">
+            <a:avLst/>
+          </a:prstGeom>
+          <a:noFill/>
+          <a:ln/>
+        </p:spPr>
+        <p:txBody>
+          <a:bodyPr wrap="square" lIns="0" tIns="0" rIns="0" bIns="0" rtlCol="0" anchor="t"/>
+          <a:lstStyle/>
+          <a:p>
+            <a:pPr algn="l" indent="0" marL="0">
+              <a:buNone/>
+            </a:pPr>
+            <a:r>
+              <a:rPr lang="en-US" sz="1600" b="1" dirty="0">
+                <a:solidFill>
+                  <a:schemeClr val="tx1"/>
+                </a:solidFill>
+              </a:rPr>
+              <a:t>Antivirus des pièces</a:t>
+            </a:r>
+            <a:endParaRPr lang="en-US" sz="1600" dirty="0"/>
+          </a:p>
+        </p:txBody>
+      </p:sp>
+      <p:sp>
+        <p:nvSpPr>
+          <p:cNvPr id="24" name="dec-7"/>
+          <p:cNvSpPr/>
+          <p:nvPr/>
+        </p:nvSpPr>
+        <p:spPr>
+          <a:xfrm>
+            <a:off x="4251960" y="4251960"/>
+            <a:ext cx="3566160" cy="1234440"/>
+          </a:xfrm>
+          <a:prstGeom prst="roundRect">
+            <a:avLst>
+              <a:gd name="adj" fmla="val 5926"/>
+            </a:avLst>
+          </a:prstGeom>
+          <a:solidFill>
+            <a:schemeClr val="accent1">
+              <a:alpha val="8000"/>
+            </a:schemeClr>
+          </a:solidFill>
+          <a:ln w="9525">
+            <a:solidFill>
+              <a:schemeClr val="bg2"/>
+            </a:solidFill>
+            <a:prstDash val="solid"/>
+          </a:ln>
+        </p:spPr>
+      </p:sp>
+      <p:sp>
+        <p:nvSpPr>
+          <p:cNvPr id="25" name="Text 23"/>
+          <p:cNvSpPr txBox="1"/>
+          <p:nvPr/>
+        </p:nvSpPr>
+        <p:spPr>
+          <a:xfrm>
+            <a:off x="4389120" y="4361688"/>
+            <a:ext cx="3291840" cy="320040"/>
+          </a:xfrm>
+          <a:prstGeom prst="rect">
+            <a:avLst/>
+          </a:prstGeom>
+          <a:noFill/>
+          <a:ln/>
+        </p:spPr>
+        <p:txBody>
+          <a:bodyPr wrap="square" lIns="0" tIns="0" rIns="0" bIns="0" rtlCol="0" anchor="t"/>
+          <a:lstStyle/>
+          <a:p>
+            <a:pPr algn="l" indent="0" marL="0">
+              <a:buNone/>
+            </a:pPr>
+            <a:r>
+              <a:rPr lang="en-US" sz="1100" b="1" dirty="0">
+                <a:solidFill>
+                  <a:schemeClr val="accent1"/>
+                </a:solidFill>
+              </a:rPr>
+              <a:t>CEO</a:t>
+            </a:r>
+            <a:endParaRPr lang="en-US" sz="1100" dirty="0"/>
+          </a:p>
+        </p:txBody>
+      </p:sp>
+      <p:sp>
+        <p:nvSpPr>
+          <p:cNvPr id="26" name="Text 24"/>
+          <p:cNvSpPr txBox="1"/>
+          <p:nvPr/>
+        </p:nvSpPr>
+        <p:spPr>
+          <a:xfrm>
+            <a:off x="4389120" y="4709160"/>
+            <a:ext cx="3291840" cy="685800"/>
+          </a:xfrm>
+          <a:prstGeom prst="rect">
+            <a:avLst/>
+          </a:prstGeom>
+          <a:noFill/>
+          <a:ln/>
+        </p:spPr>
+        <p:txBody>
+          <a:bodyPr wrap="square" lIns="0" tIns="0" rIns="0" bIns="0" rtlCol="0" anchor="t"/>
+          <a:lstStyle/>
+          <a:p>
+            <a:pPr algn="l" indent="0" marL="0">
+              <a:buNone/>
+            </a:pPr>
+            <a:r>
+              <a:rPr lang="en-US" sz="1600" b="1" dirty="0">
+                <a:solidFill>
+                  <a:schemeClr val="tx1"/>
+                </a:solidFill>
+              </a:rPr>
+              <a:t>Références MIPS INTERNATIONAL / FSC</a:t>
+            </a:r>
+            <a:endParaRPr lang="en-US" sz="1600" dirty="0"/>
+          </a:p>
+        </p:txBody>
+      </p:sp>
+      <p:sp>
+        <p:nvSpPr>
+          <p:cNvPr id="27" name="dec-8"/>
+          <p:cNvSpPr/>
+          <p:nvPr/>
+        </p:nvSpPr>
+        <p:spPr>
+          <a:xfrm>
+            <a:off x="8046720" y="4251960"/>
+            <a:ext cx="3566160" cy="1234440"/>
+          </a:xfrm>
+          <a:prstGeom prst="roundRect">
+            <a:avLst>
+              <a:gd name="adj" fmla="val 5926"/>
+            </a:avLst>
+          </a:prstGeom>
+          <a:solidFill>
+            <a:schemeClr val="accent1">
+              <a:alpha val="8000"/>
+            </a:schemeClr>
+          </a:solidFill>
+          <a:ln w="9525">
+            <a:solidFill>
+              <a:schemeClr val="bg2"/>
+            </a:solidFill>
+            <a:prstDash val="solid"/>
+          </a:ln>
+        </p:spPr>
+      </p:sp>
+      <p:sp>
+        <p:nvSpPr>
+          <p:cNvPr id="28" name="Text 26"/>
+          <p:cNvSpPr txBox="1"/>
+          <p:nvPr/>
+        </p:nvSpPr>
+        <p:spPr>
+          <a:xfrm>
+            <a:off x="8183880" y="4361688"/>
+            <a:ext cx="3291840" cy="320040"/>
+          </a:xfrm>
+          <a:prstGeom prst="rect">
+            <a:avLst/>
+          </a:prstGeom>
+          <a:noFill/>
+          <a:ln/>
+        </p:spPr>
+        <p:txBody>
+          <a:bodyPr wrap="square" lIns="0" tIns="0" rIns="0" bIns="0" rtlCol="0" anchor="t"/>
+          <a:lstStyle/>
+          <a:p>
+            <a:pPr algn="l" indent="0" marL="0">
+              <a:buNone/>
+            </a:pPr>
+            <a:r>
+              <a:rPr lang="en-US" sz="1100" b="1" dirty="0">
+                <a:solidFill>
+                  <a:schemeClr val="accent1"/>
+                </a:solidFill>
+              </a:rPr>
+              <a:t>IT</a:t>
+            </a:r>
+            <a:endParaRPr lang="en-US" sz="1100" dirty="0"/>
+          </a:p>
+        </p:txBody>
+      </p:sp>
+      <p:sp>
+        <p:nvSpPr>
+          <p:cNvPr id="29" name="Text 27"/>
+          <p:cNvSpPr txBox="1"/>
+          <p:nvPr/>
+        </p:nvSpPr>
+        <p:spPr>
+          <a:xfrm>
+            <a:off x="8183880" y="4709160"/>
+            <a:ext cx="3291840" cy="685800"/>
+          </a:xfrm>
+          <a:prstGeom prst="rect">
+            <a:avLst/>
+          </a:prstGeom>
+          <a:noFill/>
+          <a:ln/>
+        </p:spPr>
+        <p:txBody>
+          <a:bodyPr wrap="square" lIns="0" tIns="0" rIns="0" bIns="0" rtlCol="0" anchor="t"/>
+          <a:lstStyle/>
+          <a:p>
+            <a:pPr algn="l" indent="0" marL="0">
+              <a:buNone/>
+            </a:pPr>
+            <a:r>
+              <a:rPr lang="en-US" sz="1600" b="1" dirty="0">
+                <a:solidFill>
+                  <a:schemeClr val="tx1"/>
+                </a:solidFill>
+              </a:rPr>
+              <a:t>Validation sur données réelles</a:t>
+            </a:r>
+            <a:endParaRPr lang="en-US" sz="1600" dirty="0"/>
+          </a:p>
+        </p:txBody>
+      </p:sp>
+      <p:sp>
+        <p:nvSpPr>
+          <p:cNvPr id="30" name="Text 28"/>
+          <p:cNvSpPr txBox="1"/>
+          <p:nvPr/>
+        </p:nvSpPr>
+        <p:spPr>
+          <a:xfrm>
+            <a:off x="457200" y="5806440"/>
+            <a:ext cx="11247120" cy="365760"/>
+          </a:xfrm>
+          <a:prstGeom prst="rect">
+            <a:avLst/>
+          </a:prstGeom>
+          <a:noFill/>
+          <a:ln/>
+        </p:spPr>
+        <p:txBody>
+          <a:bodyPr wrap="square" lIns="0" tIns="0" rIns="0" bIns="0" rtlCol="0" anchor="t"/>
+          <a:lstStyle/>
+          <a:p>
+            <a:pPr algn="l" indent="0" marL="0">
+              <a:buNone/>
+            </a:pPr>
+            <a:r>
+              <a:rPr lang="en-US" sz="1300" i="1" dirty="0">
+                <a:solidFill>
+                  <a:schemeClr val="tx2"/>
+                </a:solidFill>
+              </a:rPr>
+              <a:t>Les deux décisions en rouge conditionnent le module trust et ce qui est promis à la Banque de Maurice.</a:t>
+            </a:r>
+            <a:endParaRPr lang="en-US" sz="1300" dirty="0"/>
+          </a:p>
+        </p:txBody>
+      </p:sp>
+      <p:sp>
+        <p:nvSpPr>
+          <p:cNvPr id="25" name="Slide Number Placeholder 0"/>
+          <p:cNvSpPr>
+            <a:spLocks noGrp="1"/>
+          </p:cNvSpPr>
+          <p:nvPr>
+            <p:ph type="sldNum" sz="quarter" idx="4294967295"/>
+          </p:nvPr>
+        </p:nvSpPr>
+        <p:spPr>
+          <a:xfrm>
+            <a:off x="11247120" y="6400800"/>
+            <a:ext cx="457200" cy="274320"/>
+          </a:xfrm>
+          <a:prstGeom prst="rect">
+            <a:avLst/>
+          </a:prstGeom>
+          <a:extLst>
+            <a:ext uri="{C572A759-6A51-4108-AA02-DFA0A04FC94B}">
+              <ma14:wrappingTextBoxFlag xmlns:ma14="http://schemas.microsoft.com/office/mac/drawingml/2011/main" val="0"/>
+            </a:ext>
+          </a:extLst>
+        </p:spPr>
+        <p:txBody>
+          <a:bodyPr/>
+          <a:lstStyle>
+            <a:lvl1pPr>
+              <a:defRPr sz="1000">
+                <a:solidFill>
+                  <a:schemeClr val="tx2"/>
+                </a:solidFill>
+              </a:defRPr>
+            </a:lvl1pPr>
+          </a:lstStyle>
+          <a:p>
+            <a:pPr algn="r"/>
+            <a:fld id="{F7021451-1387-4CA6-816F-3879F97B5CBC}" type="slidenum">
+              <a:rPr b="0" lang="en-US"/>
+              <a:t>10</a:t>
+            </a:fld>
+            <a:endParaRPr lang="en-US"/>
+          </a:p>
+        </p:txBody>
+      </p:sp>
+    </p:spTree>
+  </p:cSld>
+  <p:clrMapOvr>
+    <a:masterClrMapping/>
+  </p:clrMapOvr>
+</p:sld>
+</file>
+
+<file path=ppt/slides/slide11.xml><?xml version="1.0" encoding="utf-8"?>
+<p:sld xmlns:a="http://schemas.openxmlformats.org/drawingml/2006/main" xmlns:r="http://schemas.openxmlformats.org/officeDocument/2006/relationships" xmlns:p="http://schemas.openxmlformats.org/presentationml/2006/main">
+  <p:cSld name="Slide 11">
+    <p:spTree>
+      <p:nvGrpSpPr>
+        <p:cNvPr id="1" name=""/>
+        <p:cNvGrpSpPr/>
+        <p:nvPr/>
+      </p:nvGrpSpPr>
+      <p:grpSpPr>
+        <a:xfrm>
+          <a:off x="0" y="0"/>
+          <a:ext cx="0" cy="0"/>
+          <a:chOff x="0" y="0"/>
+          <a:chExt cx="0" cy="0"/>
+        </a:xfrm>
+      </p:grpSpPr>
+      <p:sp>
+        <p:nvSpPr>
+          <p:cNvPr id="2" name="Text 0"/>
+          <p:cNvSpPr/>
+          <p:nvPr>
+            <p:ph idx="100" type="title" hasCustomPrompt="1"/>
+          </p:nvPr>
+        </p:nvSpPr>
+        <p:spPr>
+          <a:xfrm>
             <a:off x="731520" y="2011680"/>
             <a:ext cx="10698480" cy="1280160"/>
           </a:xfrm>
@@ -2317,7 +3464,7 @@
                   <a:schemeClr val="tx1"/>
                 </a:solidFill>
               </a:rPr>
-              <a:t>L'essentiel : prototype prêt, deux décisions bloquent</a:t>
+              <a:t>L'essentiel : prototype testé, deux décisions bloquent</a:t>
             </a:r>
             <a:endParaRPr lang="en-US" sz="3000" dirty="0"/>
           </a:p>
@@ -2689,7 +3836,7 @@
                 <a:ea typeface="Cambria" pitchFamily="34" charset="-122"/>
                 <a:cs typeface="Cambria" pitchFamily="34" charset="-120"/>
               </a:rPr>
-              <a:t>124</a:t>
+              <a:t>478</a:t>
             </a:r>
             <a:endParaRPr lang="en-US" sz="5400" dirty="0"/>
           </a:p>
@@ -2739,7 +3886,7 @@
                   <a:schemeClr val="tx2"/>
                 </a:solidFill>
               </a:rPr>
-              <a:t>sur le portail</a:t>
+              <a:t>sur 8 suites</a:t>
             </a:r>
             <a:endParaRPr lang="en-US" sz="1400" dirty="0"/>
           </a:p>
@@ -11500,26 +12647,1160 @@
                   <a:schemeClr val="tx1"/>
                 </a:solidFill>
               </a:rPr>
-              <a:t>Six specs prêtes pour le développeur de my.mips.mu</a:t>
+              <a:t>478 vérifications automatiques ont déjà corrigé deux failles</a:t>
             </a:r>
             <a:endParaRPr lang="en-US" sz="3000" dirty="0"/>
           </a:p>
         </p:txBody>
       </p:sp>
-      <p:sp>
-        <p:nvSpPr>
-          <p:cNvPr id="3" name="spec-0"/>
+      <p:graphicFrame>
+        <p:nvGraphicFramePr>
+          <p:cNvPr id="9" name="tests-table"/>
+          <p:cNvGraphicFramePr>
+            <a:graphicFrameLocks noGrp="1"/>
+          </p:cNvGraphicFramePr>
+          <p:nvPr>
+            <p:extLst>
+              <p:ext uri="{D42A27DB-BD31-4B8C-83A1-F6EECF244321}">
+                <p14:modId xmlns:p14="http://schemas.microsoft.com/office/powerpoint/2010/main" val="1579011935"/>
+              </p:ext>
+            </p:extLst>
+          </p:nvPr>
+        </p:nvGraphicFramePr>
+        <p:xfrm>
+          <a:off x="457200" y="1234440"/>
+          <a:ext cx="4206240" cy="914400"/>
+        </p:xfrm>
+        <a:graphic>
+          <a:graphicData uri="http://schemas.openxmlformats.org/drawingml/2006/table">
+            <a:tbl>
+              <a:tblPr/>
+              <a:tblGrid>
+                <a:gridCol w="2834640"/>
+                <a:gridCol w="1371600"/>
+              </a:tblGrid>
+              <a:tr h="411480">
+                <a:tc>
+                  <a:txBody>
+                    <a:bodyPr/>
+                    <a:lstStyle/>
+                    <a:p>
+                      <a:pPr indent="0" marL="0">
+                        <a:buNone/>
+                      </a:pPr>
+                      <a:r>
+                        <a:rPr lang="en-US" sz="1200" b="1" dirty="0">
+                          <a:solidFill>
+                            <a:schemeClr val="tx2"/>
+                          </a:solidFill>
+                        </a:rPr>
+                        <a:t>Suite</a:t>
+                      </a:r>
+                      <a:endParaRPr lang="en-US" sz="1200" dirty="0"/>
+                    </a:p>
+                  </a:txBody>
+                  <a:tcPr marL="54864" marR="54864" marT="54864" marB="54864" anchor="ctr">
+                    <a:lnL w="6350" cap="flat" cmpd="sng" algn="ctr">
+                      <a:solidFill>
+                        <a:srgbClr val="D5DDE7"/>
+                      </a:solidFill>
+                      <a:prstDash val="solid"/>
+                      <a:round/>
+                      <a:headEnd type="none" w="med" len="med"/>
+                      <a:tailEnd type="none" w="med" len="med"/>
+                    </a:lnL>
+                    <a:lnR w="6350" cap="flat" cmpd="sng" algn="ctr">
+                      <a:solidFill>
+                        <a:srgbClr val="D5DDE7"/>
+                      </a:solidFill>
+                      <a:prstDash val="solid"/>
+                      <a:round/>
+                      <a:headEnd type="none" w="med" len="med"/>
+                      <a:tailEnd type="none" w="med" len="med"/>
+                    </a:lnR>
+                    <a:lnT w="6350" cap="flat" cmpd="sng" algn="ctr">
+                      <a:solidFill>
+                        <a:srgbClr val="D5DDE7"/>
+                      </a:solidFill>
+                      <a:prstDash val="solid"/>
+                      <a:round/>
+                      <a:headEnd type="none" w="med" len="med"/>
+                      <a:tailEnd type="none" w="med" len="med"/>
+                    </a:lnT>
+                    <a:lnB w="6350" cap="flat" cmpd="sng" algn="ctr">
+                      <a:solidFill>
+                        <a:srgbClr val="D5DDE7"/>
+                      </a:solidFill>
+                      <a:prstDash val="solid"/>
+                      <a:round/>
+                      <a:headEnd type="none" w="med" len="med"/>
+                      <a:tailEnd type="none" w="med" len="med"/>
+                    </a:lnB>
+                    <a:solidFill>
+                      <a:schemeClr val="bg2"/>
+                    </a:solidFill>
+                  </a:tcPr>
+                </a:tc>
+                <a:tc>
+                  <a:txBody>
+                    <a:bodyPr/>
+                    <a:lstStyle/>
+                    <a:p>
+                      <a:pPr algn="r" indent="0" marL="0">
+                        <a:buNone/>
+                      </a:pPr>
+                      <a:r>
+                        <a:rPr lang="en-US" sz="1200" b="1" dirty="0">
+                          <a:solidFill>
+                            <a:schemeClr val="tx2"/>
+                          </a:solidFill>
+                        </a:rPr>
+                        <a:t>Vérifications</a:t>
+                      </a:r>
+                      <a:endParaRPr lang="en-US" sz="1200" dirty="0"/>
+                    </a:p>
+                  </a:txBody>
+                  <a:tcPr marL="54864" marR="54864" marT="54864" marB="54864" anchor="ctr">
+                    <a:lnL w="6350" cap="flat" cmpd="sng" algn="ctr">
+                      <a:solidFill>
+                        <a:srgbClr val="D5DDE7"/>
+                      </a:solidFill>
+                      <a:prstDash val="solid"/>
+                      <a:round/>
+                      <a:headEnd type="none" w="med" len="med"/>
+                      <a:tailEnd type="none" w="med" len="med"/>
+                    </a:lnL>
+                    <a:lnR w="6350" cap="flat" cmpd="sng" algn="ctr">
+                      <a:solidFill>
+                        <a:srgbClr val="D5DDE7"/>
+                      </a:solidFill>
+                      <a:prstDash val="solid"/>
+                      <a:round/>
+                      <a:headEnd type="none" w="med" len="med"/>
+                      <a:tailEnd type="none" w="med" len="med"/>
+                    </a:lnR>
+                    <a:lnT w="6350" cap="flat" cmpd="sng" algn="ctr">
+                      <a:solidFill>
+                        <a:srgbClr val="D5DDE7"/>
+                      </a:solidFill>
+                      <a:prstDash val="solid"/>
+                      <a:round/>
+                      <a:headEnd type="none" w="med" len="med"/>
+                      <a:tailEnd type="none" w="med" len="med"/>
+                    </a:lnT>
+                    <a:lnB w="6350" cap="flat" cmpd="sng" algn="ctr">
+                      <a:solidFill>
+                        <a:srgbClr val="D5DDE7"/>
+                      </a:solidFill>
+                      <a:prstDash val="solid"/>
+                      <a:round/>
+                      <a:headEnd type="none" w="med" len="med"/>
+                      <a:tailEnd type="none" w="med" len="med"/>
+                    </a:lnB>
+                    <a:solidFill>
+                      <a:schemeClr val="bg2"/>
+                    </a:solidFill>
+                  </a:tcPr>
+                </a:tc>
+              </a:tr>
+              <a:tr h="411480">
+                <a:tc>
+                  <a:txBody>
+                    <a:bodyPr/>
+                    <a:lstStyle/>
+                    <a:p>
+                      <a:pPr indent="0" marL="0">
+                        <a:buNone/>
+                      </a:pPr>
+                      <a:r>
+                        <a:rPr lang="en-US" sz="1300" dirty="0">
+                          <a:solidFill>
+                            <a:schemeClr val="tx1"/>
+                          </a:solidFill>
+                        </a:rPr>
+                        <a:t>Portail marchand</a:t>
+                      </a:r>
+                      <a:endParaRPr lang="en-US" sz="1300" dirty="0"/>
+                    </a:p>
+                  </a:txBody>
+                  <a:tcPr marL="54864" marR="54864" marT="54864" marB="54864" anchor="ctr">
+                    <a:lnL w="6350" cap="flat" cmpd="sng" algn="ctr">
+                      <a:solidFill>
+                        <a:srgbClr val="D5DDE7"/>
+                      </a:solidFill>
+                      <a:prstDash val="solid"/>
+                      <a:round/>
+                      <a:headEnd type="none" w="med" len="med"/>
+                      <a:tailEnd type="none" w="med" len="med"/>
+                    </a:lnL>
+                    <a:lnR w="6350" cap="flat" cmpd="sng" algn="ctr">
+                      <a:solidFill>
+                        <a:srgbClr val="D5DDE7"/>
+                      </a:solidFill>
+                      <a:prstDash val="solid"/>
+                      <a:round/>
+                      <a:headEnd type="none" w="med" len="med"/>
+                      <a:tailEnd type="none" w="med" len="med"/>
+                    </a:lnR>
+                    <a:lnT w="6350" cap="flat" cmpd="sng" algn="ctr">
+                      <a:solidFill>
+                        <a:srgbClr val="D5DDE7"/>
+                      </a:solidFill>
+                      <a:prstDash val="solid"/>
+                      <a:round/>
+                      <a:headEnd type="none" w="med" len="med"/>
+                      <a:tailEnd type="none" w="med" len="med"/>
+                    </a:lnT>
+                    <a:lnB w="6350" cap="flat" cmpd="sng" algn="ctr">
+                      <a:solidFill>
+                        <a:srgbClr val="D5DDE7"/>
+                      </a:solidFill>
+                      <a:prstDash val="solid"/>
+                      <a:round/>
+                      <a:headEnd type="none" w="med" len="med"/>
+                      <a:tailEnd type="none" w="med" len="med"/>
+                    </a:lnB>
+                  </a:tcPr>
+                </a:tc>
+                <a:tc>
+                  <a:txBody>
+                    <a:bodyPr/>
+                    <a:lstStyle/>
+                    <a:p>
+                      <a:pPr algn="r" indent="0" marL="0">
+                        <a:buNone/>
+                      </a:pPr>
+                      <a:r>
+                        <a:rPr lang="en-US" sz="1300" dirty="0">
+                          <a:solidFill>
+                            <a:schemeClr val="tx1"/>
+                          </a:solidFill>
+                        </a:rPr>
+                        <a:t>113</a:t>
+                      </a:r>
+                      <a:endParaRPr lang="en-US" sz="1300" dirty="0"/>
+                    </a:p>
+                  </a:txBody>
+                  <a:tcPr marL="54864" marR="54864" marT="54864" marB="54864" anchor="ctr">
+                    <a:lnL w="6350" cap="flat" cmpd="sng" algn="ctr">
+                      <a:solidFill>
+                        <a:srgbClr val="D5DDE7"/>
+                      </a:solidFill>
+                      <a:prstDash val="solid"/>
+                      <a:round/>
+                      <a:headEnd type="none" w="med" len="med"/>
+                      <a:tailEnd type="none" w="med" len="med"/>
+                    </a:lnL>
+                    <a:lnR w="6350" cap="flat" cmpd="sng" algn="ctr">
+                      <a:solidFill>
+                        <a:srgbClr val="D5DDE7"/>
+                      </a:solidFill>
+                      <a:prstDash val="solid"/>
+                      <a:round/>
+                      <a:headEnd type="none" w="med" len="med"/>
+                      <a:tailEnd type="none" w="med" len="med"/>
+                    </a:lnR>
+                    <a:lnT w="6350" cap="flat" cmpd="sng" algn="ctr">
+                      <a:solidFill>
+                        <a:srgbClr val="D5DDE7"/>
+                      </a:solidFill>
+                      <a:prstDash val="solid"/>
+                      <a:round/>
+                      <a:headEnd type="none" w="med" len="med"/>
+                      <a:tailEnd type="none" w="med" len="med"/>
+                    </a:lnT>
+                    <a:lnB w="6350" cap="flat" cmpd="sng" algn="ctr">
+                      <a:solidFill>
+                        <a:srgbClr val="D5DDE7"/>
+                      </a:solidFill>
+                      <a:prstDash val="solid"/>
+                      <a:round/>
+                      <a:headEnd type="none" w="med" len="med"/>
+                      <a:tailEnd type="none" w="med" len="med"/>
+                    </a:lnB>
+                  </a:tcPr>
+                </a:tc>
+              </a:tr>
+              <a:tr h="411480">
+                <a:tc>
+                  <a:txBody>
+                    <a:bodyPr/>
+                    <a:lstStyle/>
+                    <a:p>
+                      <a:pPr indent="0" marL="0">
+                        <a:buNone/>
+                      </a:pPr>
+                      <a:r>
+                        <a:rPr lang="en-US" sz="1300" dirty="0">
+                          <a:solidFill>
+                            <a:schemeClr val="tx1"/>
+                          </a:solidFill>
+                        </a:rPr>
+                        <a:t>Onboarding</a:t>
+                      </a:r>
+                      <a:endParaRPr lang="en-US" sz="1300" dirty="0"/>
+                    </a:p>
+                  </a:txBody>
+                  <a:tcPr marL="54864" marR="54864" marT="54864" marB="54864" anchor="ctr">
+                    <a:lnL w="6350" cap="flat" cmpd="sng" algn="ctr">
+                      <a:solidFill>
+                        <a:srgbClr val="D5DDE7"/>
+                      </a:solidFill>
+                      <a:prstDash val="solid"/>
+                      <a:round/>
+                      <a:headEnd type="none" w="med" len="med"/>
+                      <a:tailEnd type="none" w="med" len="med"/>
+                    </a:lnL>
+                    <a:lnR w="6350" cap="flat" cmpd="sng" algn="ctr">
+                      <a:solidFill>
+                        <a:srgbClr val="D5DDE7"/>
+                      </a:solidFill>
+                      <a:prstDash val="solid"/>
+                      <a:round/>
+                      <a:headEnd type="none" w="med" len="med"/>
+                      <a:tailEnd type="none" w="med" len="med"/>
+                    </a:lnR>
+                    <a:lnT w="6350" cap="flat" cmpd="sng" algn="ctr">
+                      <a:solidFill>
+                        <a:srgbClr val="D5DDE7"/>
+                      </a:solidFill>
+                      <a:prstDash val="solid"/>
+                      <a:round/>
+                      <a:headEnd type="none" w="med" len="med"/>
+                      <a:tailEnd type="none" w="med" len="med"/>
+                    </a:lnT>
+                    <a:lnB w="6350" cap="flat" cmpd="sng" algn="ctr">
+                      <a:solidFill>
+                        <a:srgbClr val="D5DDE7"/>
+                      </a:solidFill>
+                      <a:prstDash val="solid"/>
+                      <a:round/>
+                      <a:headEnd type="none" w="med" len="med"/>
+                      <a:tailEnd type="none" w="med" len="med"/>
+                    </a:lnB>
+                  </a:tcPr>
+                </a:tc>
+                <a:tc>
+                  <a:txBody>
+                    <a:bodyPr/>
+                    <a:lstStyle/>
+                    <a:p>
+                      <a:pPr algn="r" indent="0" marL="0">
+                        <a:buNone/>
+                      </a:pPr>
+                      <a:r>
+                        <a:rPr lang="en-US" sz="1300" dirty="0">
+                          <a:solidFill>
+                            <a:schemeClr val="tx1"/>
+                          </a:solidFill>
+                        </a:rPr>
+                        <a:t>11</a:t>
+                      </a:r>
+                      <a:endParaRPr lang="en-US" sz="1300" dirty="0"/>
+                    </a:p>
+                  </a:txBody>
+                  <a:tcPr marL="54864" marR="54864" marT="54864" marB="54864" anchor="ctr">
+                    <a:lnL w="6350" cap="flat" cmpd="sng" algn="ctr">
+                      <a:solidFill>
+                        <a:srgbClr val="D5DDE7"/>
+                      </a:solidFill>
+                      <a:prstDash val="solid"/>
+                      <a:round/>
+                      <a:headEnd type="none" w="med" len="med"/>
+                      <a:tailEnd type="none" w="med" len="med"/>
+                    </a:lnL>
+                    <a:lnR w="6350" cap="flat" cmpd="sng" algn="ctr">
+                      <a:solidFill>
+                        <a:srgbClr val="D5DDE7"/>
+                      </a:solidFill>
+                      <a:prstDash val="solid"/>
+                      <a:round/>
+                      <a:headEnd type="none" w="med" len="med"/>
+                      <a:tailEnd type="none" w="med" len="med"/>
+                    </a:lnR>
+                    <a:lnT w="6350" cap="flat" cmpd="sng" algn="ctr">
+                      <a:solidFill>
+                        <a:srgbClr val="D5DDE7"/>
+                      </a:solidFill>
+                      <a:prstDash val="solid"/>
+                      <a:round/>
+                      <a:headEnd type="none" w="med" len="med"/>
+                      <a:tailEnd type="none" w="med" len="med"/>
+                    </a:lnT>
+                    <a:lnB w="6350" cap="flat" cmpd="sng" algn="ctr">
+                      <a:solidFill>
+                        <a:srgbClr val="D5DDE7"/>
+                      </a:solidFill>
+                      <a:prstDash val="solid"/>
+                      <a:round/>
+                      <a:headEnd type="none" w="med" len="med"/>
+                      <a:tailEnd type="none" w="med" len="med"/>
+                    </a:lnB>
+                  </a:tcPr>
+                </a:tc>
+              </a:tr>
+              <a:tr h="411480">
+                <a:tc>
+                  <a:txBody>
+                    <a:bodyPr/>
+                    <a:lstStyle/>
+                    <a:p>
+                      <a:pPr indent="0" marL="0">
+                        <a:buNone/>
+                      </a:pPr>
+                      <a:r>
+                        <a:rPr lang="en-US" sz="1300" dirty="0">
+                          <a:solidFill>
+                            <a:schemeClr val="tx1"/>
+                          </a:solidFill>
+                        </a:rPr>
+                        <a:t>Reporting</a:t>
+                      </a:r>
+                      <a:endParaRPr lang="en-US" sz="1300" dirty="0"/>
+                    </a:p>
+                  </a:txBody>
+                  <a:tcPr marL="54864" marR="54864" marT="54864" marB="54864" anchor="ctr">
+                    <a:lnL w="6350" cap="flat" cmpd="sng" algn="ctr">
+                      <a:solidFill>
+                        <a:srgbClr val="D5DDE7"/>
+                      </a:solidFill>
+                      <a:prstDash val="solid"/>
+                      <a:round/>
+                      <a:headEnd type="none" w="med" len="med"/>
+                      <a:tailEnd type="none" w="med" len="med"/>
+                    </a:lnL>
+                    <a:lnR w="6350" cap="flat" cmpd="sng" algn="ctr">
+                      <a:solidFill>
+                        <a:srgbClr val="D5DDE7"/>
+                      </a:solidFill>
+                      <a:prstDash val="solid"/>
+                      <a:round/>
+                      <a:headEnd type="none" w="med" len="med"/>
+                      <a:tailEnd type="none" w="med" len="med"/>
+                    </a:lnR>
+                    <a:lnT w="6350" cap="flat" cmpd="sng" algn="ctr">
+                      <a:solidFill>
+                        <a:srgbClr val="D5DDE7"/>
+                      </a:solidFill>
+                      <a:prstDash val="solid"/>
+                      <a:round/>
+                      <a:headEnd type="none" w="med" len="med"/>
+                      <a:tailEnd type="none" w="med" len="med"/>
+                    </a:lnT>
+                    <a:lnB w="6350" cap="flat" cmpd="sng" algn="ctr">
+                      <a:solidFill>
+                        <a:srgbClr val="D5DDE7"/>
+                      </a:solidFill>
+                      <a:prstDash val="solid"/>
+                      <a:round/>
+                      <a:headEnd type="none" w="med" len="med"/>
+                      <a:tailEnd type="none" w="med" len="med"/>
+                    </a:lnB>
+                  </a:tcPr>
+                </a:tc>
+                <a:tc>
+                  <a:txBody>
+                    <a:bodyPr/>
+                    <a:lstStyle/>
+                    <a:p>
+                      <a:pPr algn="r" indent="0" marL="0">
+                        <a:buNone/>
+                      </a:pPr>
+                      <a:r>
+                        <a:rPr lang="en-US" sz="1300" dirty="0">
+                          <a:solidFill>
+                            <a:schemeClr val="tx1"/>
+                          </a:solidFill>
+                        </a:rPr>
+                        <a:t>65</a:t>
+                      </a:r>
+                      <a:endParaRPr lang="en-US" sz="1300" dirty="0"/>
+                    </a:p>
+                  </a:txBody>
+                  <a:tcPr marL="54864" marR="54864" marT="54864" marB="54864" anchor="ctr">
+                    <a:lnL w="6350" cap="flat" cmpd="sng" algn="ctr">
+                      <a:solidFill>
+                        <a:srgbClr val="D5DDE7"/>
+                      </a:solidFill>
+                      <a:prstDash val="solid"/>
+                      <a:round/>
+                      <a:headEnd type="none" w="med" len="med"/>
+                      <a:tailEnd type="none" w="med" len="med"/>
+                    </a:lnL>
+                    <a:lnR w="6350" cap="flat" cmpd="sng" algn="ctr">
+                      <a:solidFill>
+                        <a:srgbClr val="D5DDE7"/>
+                      </a:solidFill>
+                      <a:prstDash val="solid"/>
+                      <a:round/>
+                      <a:headEnd type="none" w="med" len="med"/>
+                      <a:tailEnd type="none" w="med" len="med"/>
+                    </a:lnR>
+                    <a:lnT w="6350" cap="flat" cmpd="sng" algn="ctr">
+                      <a:solidFill>
+                        <a:srgbClr val="D5DDE7"/>
+                      </a:solidFill>
+                      <a:prstDash val="solid"/>
+                      <a:round/>
+                      <a:headEnd type="none" w="med" len="med"/>
+                      <a:tailEnd type="none" w="med" len="med"/>
+                    </a:lnT>
+                    <a:lnB w="6350" cap="flat" cmpd="sng" algn="ctr">
+                      <a:solidFill>
+                        <a:srgbClr val="D5DDE7"/>
+                      </a:solidFill>
+                      <a:prstDash val="solid"/>
+                      <a:round/>
+                      <a:headEnd type="none" w="med" len="med"/>
+                      <a:tailEnd type="none" w="med" len="med"/>
+                    </a:lnB>
+                  </a:tcPr>
+                </a:tc>
+              </a:tr>
+              <a:tr h="411480">
+                <a:tc>
+                  <a:txBody>
+                    <a:bodyPr/>
+                    <a:lstStyle/>
+                    <a:p>
+                      <a:pPr indent="0" marL="0">
+                        <a:buNone/>
+                      </a:pPr>
+                      <a:r>
+                        <a:rPr lang="en-US" sz="1300" dirty="0">
+                          <a:solidFill>
+                            <a:schemeClr val="tx1"/>
+                          </a:solidFill>
+                        </a:rPr>
+                        <a:t>Facturation</a:t>
+                      </a:r>
+                      <a:endParaRPr lang="en-US" sz="1300" dirty="0"/>
+                    </a:p>
+                  </a:txBody>
+                  <a:tcPr marL="54864" marR="54864" marT="54864" marB="54864" anchor="ctr">
+                    <a:lnL w="6350" cap="flat" cmpd="sng" algn="ctr">
+                      <a:solidFill>
+                        <a:srgbClr val="D5DDE7"/>
+                      </a:solidFill>
+                      <a:prstDash val="solid"/>
+                      <a:round/>
+                      <a:headEnd type="none" w="med" len="med"/>
+                      <a:tailEnd type="none" w="med" len="med"/>
+                    </a:lnL>
+                    <a:lnR w="6350" cap="flat" cmpd="sng" algn="ctr">
+                      <a:solidFill>
+                        <a:srgbClr val="D5DDE7"/>
+                      </a:solidFill>
+                      <a:prstDash val="solid"/>
+                      <a:round/>
+                      <a:headEnd type="none" w="med" len="med"/>
+                      <a:tailEnd type="none" w="med" len="med"/>
+                    </a:lnR>
+                    <a:lnT w="6350" cap="flat" cmpd="sng" algn="ctr">
+                      <a:solidFill>
+                        <a:srgbClr val="D5DDE7"/>
+                      </a:solidFill>
+                      <a:prstDash val="solid"/>
+                      <a:round/>
+                      <a:headEnd type="none" w="med" len="med"/>
+                      <a:tailEnd type="none" w="med" len="med"/>
+                    </a:lnT>
+                    <a:lnB w="6350" cap="flat" cmpd="sng" algn="ctr">
+                      <a:solidFill>
+                        <a:srgbClr val="D5DDE7"/>
+                      </a:solidFill>
+                      <a:prstDash val="solid"/>
+                      <a:round/>
+                      <a:headEnd type="none" w="med" len="med"/>
+                      <a:tailEnd type="none" w="med" len="med"/>
+                    </a:lnB>
+                  </a:tcPr>
+                </a:tc>
+                <a:tc>
+                  <a:txBody>
+                    <a:bodyPr/>
+                    <a:lstStyle/>
+                    <a:p>
+                      <a:pPr algn="r" indent="0" marL="0">
+                        <a:buNone/>
+                      </a:pPr>
+                      <a:r>
+                        <a:rPr lang="en-US" sz="1300" dirty="0">
+                          <a:solidFill>
+                            <a:schemeClr val="tx1"/>
+                          </a:solidFill>
+                        </a:rPr>
+                        <a:t>47</a:t>
+                      </a:r>
+                      <a:endParaRPr lang="en-US" sz="1300" dirty="0"/>
+                    </a:p>
+                  </a:txBody>
+                  <a:tcPr marL="54864" marR="54864" marT="54864" marB="54864" anchor="ctr">
+                    <a:lnL w="6350" cap="flat" cmpd="sng" algn="ctr">
+                      <a:solidFill>
+                        <a:srgbClr val="D5DDE7"/>
+                      </a:solidFill>
+                      <a:prstDash val="solid"/>
+                      <a:round/>
+                      <a:headEnd type="none" w="med" len="med"/>
+                      <a:tailEnd type="none" w="med" len="med"/>
+                    </a:lnL>
+                    <a:lnR w="6350" cap="flat" cmpd="sng" algn="ctr">
+                      <a:solidFill>
+                        <a:srgbClr val="D5DDE7"/>
+                      </a:solidFill>
+                      <a:prstDash val="solid"/>
+                      <a:round/>
+                      <a:headEnd type="none" w="med" len="med"/>
+                      <a:tailEnd type="none" w="med" len="med"/>
+                    </a:lnR>
+                    <a:lnT w="6350" cap="flat" cmpd="sng" algn="ctr">
+                      <a:solidFill>
+                        <a:srgbClr val="D5DDE7"/>
+                      </a:solidFill>
+                      <a:prstDash val="solid"/>
+                      <a:round/>
+                      <a:headEnd type="none" w="med" len="med"/>
+                      <a:tailEnd type="none" w="med" len="med"/>
+                    </a:lnT>
+                    <a:lnB w="6350" cap="flat" cmpd="sng" algn="ctr">
+                      <a:solidFill>
+                        <a:srgbClr val="D5DDE7"/>
+                      </a:solidFill>
+                      <a:prstDash val="solid"/>
+                      <a:round/>
+                      <a:headEnd type="none" w="med" len="med"/>
+                      <a:tailEnd type="none" w="med" len="med"/>
+                    </a:lnB>
+                  </a:tcPr>
+                </a:tc>
+              </a:tr>
+              <a:tr h="411480">
+                <a:tc>
+                  <a:txBody>
+                    <a:bodyPr/>
+                    <a:lstStyle/>
+                    <a:p>
+                      <a:pPr indent="0" marL="0">
+                        <a:buNone/>
+                      </a:pPr>
+                      <a:r>
+                        <a:rPr lang="en-US" sz="1300" dirty="0">
+                          <a:solidFill>
+                            <a:schemeClr val="tx1"/>
+                          </a:solidFill>
+                        </a:rPr>
+                        <a:t>Rapprochement MCB</a:t>
+                      </a:r>
+                      <a:endParaRPr lang="en-US" sz="1300" dirty="0"/>
+                    </a:p>
+                  </a:txBody>
+                  <a:tcPr marL="54864" marR="54864" marT="54864" marB="54864" anchor="ctr">
+                    <a:lnL w="6350" cap="flat" cmpd="sng" algn="ctr">
+                      <a:solidFill>
+                        <a:srgbClr val="D5DDE7"/>
+                      </a:solidFill>
+                      <a:prstDash val="solid"/>
+                      <a:round/>
+                      <a:headEnd type="none" w="med" len="med"/>
+                      <a:tailEnd type="none" w="med" len="med"/>
+                    </a:lnL>
+                    <a:lnR w="6350" cap="flat" cmpd="sng" algn="ctr">
+                      <a:solidFill>
+                        <a:srgbClr val="D5DDE7"/>
+                      </a:solidFill>
+                      <a:prstDash val="solid"/>
+                      <a:round/>
+                      <a:headEnd type="none" w="med" len="med"/>
+                      <a:tailEnd type="none" w="med" len="med"/>
+                    </a:lnR>
+                    <a:lnT w="6350" cap="flat" cmpd="sng" algn="ctr">
+                      <a:solidFill>
+                        <a:srgbClr val="D5DDE7"/>
+                      </a:solidFill>
+                      <a:prstDash val="solid"/>
+                      <a:round/>
+                      <a:headEnd type="none" w="med" len="med"/>
+                      <a:tailEnd type="none" w="med" len="med"/>
+                    </a:lnT>
+                    <a:lnB w="6350" cap="flat" cmpd="sng" algn="ctr">
+                      <a:solidFill>
+                        <a:srgbClr val="D5DDE7"/>
+                      </a:solidFill>
+                      <a:prstDash val="solid"/>
+                      <a:round/>
+                      <a:headEnd type="none" w="med" len="med"/>
+                      <a:tailEnd type="none" w="med" len="med"/>
+                    </a:lnB>
+                  </a:tcPr>
+                </a:tc>
+                <a:tc>
+                  <a:txBody>
+                    <a:bodyPr/>
+                    <a:lstStyle/>
+                    <a:p>
+                      <a:pPr algn="r" indent="0" marL="0">
+                        <a:buNone/>
+                      </a:pPr>
+                      <a:r>
+                        <a:rPr lang="en-US" sz="1300" dirty="0">
+                          <a:solidFill>
+                            <a:schemeClr val="tx1"/>
+                          </a:solidFill>
+                        </a:rPr>
+                        <a:t>55</a:t>
+                      </a:r>
+                      <a:endParaRPr lang="en-US" sz="1300" dirty="0"/>
+                    </a:p>
+                  </a:txBody>
+                  <a:tcPr marL="54864" marR="54864" marT="54864" marB="54864" anchor="ctr">
+                    <a:lnL w="6350" cap="flat" cmpd="sng" algn="ctr">
+                      <a:solidFill>
+                        <a:srgbClr val="D5DDE7"/>
+                      </a:solidFill>
+                      <a:prstDash val="solid"/>
+                      <a:round/>
+                      <a:headEnd type="none" w="med" len="med"/>
+                      <a:tailEnd type="none" w="med" len="med"/>
+                    </a:lnL>
+                    <a:lnR w="6350" cap="flat" cmpd="sng" algn="ctr">
+                      <a:solidFill>
+                        <a:srgbClr val="D5DDE7"/>
+                      </a:solidFill>
+                      <a:prstDash val="solid"/>
+                      <a:round/>
+                      <a:headEnd type="none" w="med" len="med"/>
+                      <a:tailEnd type="none" w="med" len="med"/>
+                    </a:lnR>
+                    <a:lnT w="6350" cap="flat" cmpd="sng" algn="ctr">
+                      <a:solidFill>
+                        <a:srgbClr val="D5DDE7"/>
+                      </a:solidFill>
+                      <a:prstDash val="solid"/>
+                      <a:round/>
+                      <a:headEnd type="none" w="med" len="med"/>
+                      <a:tailEnd type="none" w="med" len="med"/>
+                    </a:lnT>
+                    <a:lnB w="6350" cap="flat" cmpd="sng" algn="ctr">
+                      <a:solidFill>
+                        <a:srgbClr val="D5DDE7"/>
+                      </a:solidFill>
+                      <a:prstDash val="solid"/>
+                      <a:round/>
+                      <a:headEnd type="none" w="med" len="med"/>
+                      <a:tailEnd type="none" w="med" len="med"/>
+                    </a:lnB>
+                  </a:tcPr>
+                </a:tc>
+              </a:tr>
+              <a:tr h="411480">
+                <a:tc>
+                  <a:txBody>
+                    <a:bodyPr/>
+                    <a:lstStyle/>
+                    <a:p>
+                      <a:pPr indent="0" marL="0">
+                        <a:buNone/>
+                      </a:pPr>
+                      <a:r>
+                        <a:rPr lang="en-US" sz="1300" dirty="0">
+                          <a:solidFill>
+                            <a:schemeClr val="tx1"/>
+                          </a:solidFill>
+                        </a:rPr>
+                        <a:t>BigQuery</a:t>
+                      </a:r>
+                      <a:endParaRPr lang="en-US" sz="1300" dirty="0"/>
+                    </a:p>
+                  </a:txBody>
+                  <a:tcPr marL="54864" marR="54864" marT="54864" marB="54864" anchor="ctr">
+                    <a:lnL w="6350" cap="flat" cmpd="sng" algn="ctr">
+                      <a:solidFill>
+                        <a:srgbClr val="D5DDE7"/>
+                      </a:solidFill>
+                      <a:prstDash val="solid"/>
+                      <a:round/>
+                      <a:headEnd type="none" w="med" len="med"/>
+                      <a:tailEnd type="none" w="med" len="med"/>
+                    </a:lnL>
+                    <a:lnR w="6350" cap="flat" cmpd="sng" algn="ctr">
+                      <a:solidFill>
+                        <a:srgbClr val="D5DDE7"/>
+                      </a:solidFill>
+                      <a:prstDash val="solid"/>
+                      <a:round/>
+                      <a:headEnd type="none" w="med" len="med"/>
+                      <a:tailEnd type="none" w="med" len="med"/>
+                    </a:lnR>
+                    <a:lnT w="6350" cap="flat" cmpd="sng" algn="ctr">
+                      <a:solidFill>
+                        <a:srgbClr val="D5DDE7"/>
+                      </a:solidFill>
+                      <a:prstDash val="solid"/>
+                      <a:round/>
+                      <a:headEnd type="none" w="med" len="med"/>
+                      <a:tailEnd type="none" w="med" len="med"/>
+                    </a:lnT>
+                    <a:lnB w="6350" cap="flat" cmpd="sng" algn="ctr">
+                      <a:solidFill>
+                        <a:srgbClr val="D5DDE7"/>
+                      </a:solidFill>
+                      <a:prstDash val="solid"/>
+                      <a:round/>
+                      <a:headEnd type="none" w="med" len="med"/>
+                      <a:tailEnd type="none" w="med" len="med"/>
+                    </a:lnB>
+                  </a:tcPr>
+                </a:tc>
+                <a:tc>
+                  <a:txBody>
+                    <a:bodyPr/>
+                    <a:lstStyle/>
+                    <a:p>
+                      <a:pPr algn="r" indent="0" marL="0">
+                        <a:buNone/>
+                      </a:pPr>
+                      <a:r>
+                        <a:rPr lang="en-US" sz="1300" dirty="0">
+                          <a:solidFill>
+                            <a:schemeClr val="tx1"/>
+                          </a:solidFill>
+                        </a:rPr>
+                        <a:t>23</a:t>
+                      </a:r>
+                      <a:endParaRPr lang="en-US" sz="1300" dirty="0"/>
+                    </a:p>
+                  </a:txBody>
+                  <a:tcPr marL="54864" marR="54864" marT="54864" marB="54864" anchor="ctr">
+                    <a:lnL w="6350" cap="flat" cmpd="sng" algn="ctr">
+                      <a:solidFill>
+                        <a:srgbClr val="D5DDE7"/>
+                      </a:solidFill>
+                      <a:prstDash val="solid"/>
+                      <a:round/>
+                      <a:headEnd type="none" w="med" len="med"/>
+                      <a:tailEnd type="none" w="med" len="med"/>
+                    </a:lnL>
+                    <a:lnR w="6350" cap="flat" cmpd="sng" algn="ctr">
+                      <a:solidFill>
+                        <a:srgbClr val="D5DDE7"/>
+                      </a:solidFill>
+                      <a:prstDash val="solid"/>
+                      <a:round/>
+                      <a:headEnd type="none" w="med" len="med"/>
+                      <a:tailEnd type="none" w="med" len="med"/>
+                    </a:lnR>
+                    <a:lnT w="6350" cap="flat" cmpd="sng" algn="ctr">
+                      <a:solidFill>
+                        <a:srgbClr val="D5DDE7"/>
+                      </a:solidFill>
+                      <a:prstDash val="solid"/>
+                      <a:round/>
+                      <a:headEnd type="none" w="med" len="med"/>
+                      <a:tailEnd type="none" w="med" len="med"/>
+                    </a:lnT>
+                    <a:lnB w="6350" cap="flat" cmpd="sng" algn="ctr">
+                      <a:solidFill>
+                        <a:srgbClr val="D5DDE7"/>
+                      </a:solidFill>
+                      <a:prstDash val="solid"/>
+                      <a:round/>
+                      <a:headEnd type="none" w="med" len="med"/>
+                      <a:tailEnd type="none" w="med" len="med"/>
+                    </a:lnB>
+                  </a:tcPr>
+                </a:tc>
+              </a:tr>
+              <a:tr h="411480">
+                <a:tc>
+                  <a:txBody>
+                    <a:bodyPr/>
+                    <a:lstStyle/>
+                    <a:p>
+                      <a:pPr indent="0" marL="0">
+                        <a:buNone/>
+                      </a:pPr>
+                      <a:r>
+                        <a:rPr lang="en-US" sz="1300" dirty="0">
+                          <a:solidFill>
+                            <a:schemeClr val="tx1"/>
+                          </a:solidFill>
+                        </a:rPr>
+                        <a:t>Fiches marchands</a:t>
+                      </a:r>
+                      <a:endParaRPr lang="en-US" sz="1300" dirty="0"/>
+                    </a:p>
+                  </a:txBody>
+                  <a:tcPr marL="54864" marR="54864" marT="54864" marB="54864" anchor="ctr">
+                    <a:lnL w="6350" cap="flat" cmpd="sng" algn="ctr">
+                      <a:solidFill>
+                        <a:srgbClr val="D5DDE7"/>
+                      </a:solidFill>
+                      <a:prstDash val="solid"/>
+                      <a:round/>
+                      <a:headEnd type="none" w="med" len="med"/>
+                      <a:tailEnd type="none" w="med" len="med"/>
+                    </a:lnL>
+                    <a:lnR w="6350" cap="flat" cmpd="sng" algn="ctr">
+                      <a:solidFill>
+                        <a:srgbClr val="D5DDE7"/>
+                      </a:solidFill>
+                      <a:prstDash val="solid"/>
+                      <a:round/>
+                      <a:headEnd type="none" w="med" len="med"/>
+                      <a:tailEnd type="none" w="med" len="med"/>
+                    </a:lnR>
+                    <a:lnT w="6350" cap="flat" cmpd="sng" algn="ctr">
+                      <a:solidFill>
+                        <a:srgbClr val="D5DDE7"/>
+                      </a:solidFill>
+                      <a:prstDash val="solid"/>
+                      <a:round/>
+                      <a:headEnd type="none" w="med" len="med"/>
+                      <a:tailEnd type="none" w="med" len="med"/>
+                    </a:lnT>
+                    <a:lnB w="6350" cap="flat" cmpd="sng" algn="ctr">
+                      <a:solidFill>
+                        <a:srgbClr val="D5DDE7"/>
+                      </a:solidFill>
+                      <a:prstDash val="solid"/>
+                      <a:round/>
+                      <a:headEnd type="none" w="med" len="med"/>
+                      <a:tailEnd type="none" w="med" len="med"/>
+                    </a:lnB>
+                  </a:tcPr>
+                </a:tc>
+                <a:tc>
+                  <a:txBody>
+                    <a:bodyPr/>
+                    <a:lstStyle/>
+                    <a:p>
+                      <a:pPr algn="r" indent="0" marL="0">
+                        <a:buNone/>
+                      </a:pPr>
+                      <a:r>
+                        <a:rPr lang="en-US" sz="1300" dirty="0">
+                          <a:solidFill>
+                            <a:schemeClr val="tx1"/>
+                          </a:solidFill>
+                        </a:rPr>
+                        <a:t>71</a:t>
+                      </a:r>
+                      <a:endParaRPr lang="en-US" sz="1300" dirty="0"/>
+                    </a:p>
+                  </a:txBody>
+                  <a:tcPr marL="54864" marR="54864" marT="54864" marB="54864" anchor="ctr">
+                    <a:lnL w="6350" cap="flat" cmpd="sng" algn="ctr">
+                      <a:solidFill>
+                        <a:srgbClr val="D5DDE7"/>
+                      </a:solidFill>
+                      <a:prstDash val="solid"/>
+                      <a:round/>
+                      <a:headEnd type="none" w="med" len="med"/>
+                      <a:tailEnd type="none" w="med" len="med"/>
+                    </a:lnL>
+                    <a:lnR w="6350" cap="flat" cmpd="sng" algn="ctr">
+                      <a:solidFill>
+                        <a:srgbClr val="D5DDE7"/>
+                      </a:solidFill>
+                      <a:prstDash val="solid"/>
+                      <a:round/>
+                      <a:headEnd type="none" w="med" len="med"/>
+                      <a:tailEnd type="none" w="med" len="med"/>
+                    </a:lnR>
+                    <a:lnT w="6350" cap="flat" cmpd="sng" algn="ctr">
+                      <a:solidFill>
+                        <a:srgbClr val="D5DDE7"/>
+                      </a:solidFill>
+                      <a:prstDash val="solid"/>
+                      <a:round/>
+                      <a:headEnd type="none" w="med" len="med"/>
+                      <a:tailEnd type="none" w="med" len="med"/>
+                    </a:lnT>
+                    <a:lnB w="6350" cap="flat" cmpd="sng" algn="ctr">
+                      <a:solidFill>
+                        <a:srgbClr val="D5DDE7"/>
+                      </a:solidFill>
+                      <a:prstDash val="solid"/>
+                      <a:round/>
+                      <a:headEnd type="none" w="med" len="med"/>
+                      <a:tailEnd type="none" w="med" len="med"/>
+                    </a:lnB>
+                  </a:tcPr>
+                </a:tc>
+              </a:tr>
+              <a:tr h="411480">
+                <a:tc>
+                  <a:txBody>
+                    <a:bodyPr/>
+                    <a:lstStyle/>
+                    <a:p>
+                      <a:pPr indent="0" marL="0">
+                        <a:buNone/>
+                      </a:pPr>
+                      <a:r>
+                        <a:rPr lang="en-US" sz="1300" dirty="0">
+                          <a:solidFill>
+                            <a:schemeClr val="tx1"/>
+                          </a:solidFill>
+                        </a:rPr>
+                        <a:t>Administration</a:t>
+                      </a:r>
+                      <a:endParaRPr lang="en-US" sz="1300" dirty="0"/>
+                    </a:p>
+                  </a:txBody>
+                  <a:tcPr marL="54864" marR="54864" marT="54864" marB="54864" anchor="ctr">
+                    <a:lnL w="6350" cap="flat" cmpd="sng" algn="ctr">
+                      <a:solidFill>
+                        <a:srgbClr val="D5DDE7"/>
+                      </a:solidFill>
+                      <a:prstDash val="solid"/>
+                      <a:round/>
+                      <a:headEnd type="none" w="med" len="med"/>
+                      <a:tailEnd type="none" w="med" len="med"/>
+                    </a:lnL>
+                    <a:lnR w="6350" cap="flat" cmpd="sng" algn="ctr">
+                      <a:solidFill>
+                        <a:srgbClr val="D5DDE7"/>
+                      </a:solidFill>
+                      <a:prstDash val="solid"/>
+                      <a:round/>
+                      <a:headEnd type="none" w="med" len="med"/>
+                      <a:tailEnd type="none" w="med" len="med"/>
+                    </a:lnR>
+                    <a:lnT w="6350" cap="flat" cmpd="sng" algn="ctr">
+                      <a:solidFill>
+                        <a:srgbClr val="D5DDE7"/>
+                      </a:solidFill>
+                      <a:prstDash val="solid"/>
+                      <a:round/>
+                      <a:headEnd type="none" w="med" len="med"/>
+                      <a:tailEnd type="none" w="med" len="med"/>
+                    </a:lnT>
+                    <a:lnB w="6350" cap="flat" cmpd="sng" algn="ctr">
+                      <a:solidFill>
+                        <a:srgbClr val="D5DDE7"/>
+                      </a:solidFill>
+                      <a:prstDash val="solid"/>
+                      <a:round/>
+                      <a:headEnd type="none" w="med" len="med"/>
+                      <a:tailEnd type="none" w="med" len="med"/>
+                    </a:lnB>
+                  </a:tcPr>
+                </a:tc>
+                <a:tc>
+                  <a:txBody>
+                    <a:bodyPr/>
+                    <a:lstStyle/>
+                    <a:p>
+                      <a:pPr algn="r" indent="0" marL="0">
+                        <a:buNone/>
+                      </a:pPr>
+                      <a:r>
+                        <a:rPr lang="en-US" sz="1300" dirty="0">
+                          <a:solidFill>
+                            <a:schemeClr val="tx1"/>
+                          </a:solidFill>
+                        </a:rPr>
+                        <a:t>93</a:t>
+                      </a:r>
+                      <a:endParaRPr lang="en-US" sz="1300" dirty="0"/>
+                    </a:p>
+                  </a:txBody>
+                  <a:tcPr marL="54864" marR="54864" marT="54864" marB="54864" anchor="ctr">
+                    <a:lnL w="6350" cap="flat" cmpd="sng" algn="ctr">
+                      <a:solidFill>
+                        <a:srgbClr val="D5DDE7"/>
+                      </a:solidFill>
+                      <a:prstDash val="solid"/>
+                      <a:round/>
+                      <a:headEnd type="none" w="med" len="med"/>
+                      <a:tailEnd type="none" w="med" len="med"/>
+                    </a:lnL>
+                    <a:lnR w="6350" cap="flat" cmpd="sng" algn="ctr">
+                      <a:solidFill>
+                        <a:srgbClr val="D5DDE7"/>
+                      </a:solidFill>
+                      <a:prstDash val="solid"/>
+                      <a:round/>
+                      <a:headEnd type="none" w="med" len="med"/>
+                      <a:tailEnd type="none" w="med" len="med"/>
+                    </a:lnR>
+                    <a:lnT w="6350" cap="flat" cmpd="sng" algn="ctr">
+                      <a:solidFill>
+                        <a:srgbClr val="D5DDE7"/>
+                      </a:solidFill>
+                      <a:prstDash val="solid"/>
+                      <a:round/>
+                      <a:headEnd type="none" w="med" len="med"/>
+                      <a:tailEnd type="none" w="med" len="med"/>
+                    </a:lnT>
+                    <a:lnB w="6350" cap="flat" cmpd="sng" algn="ctr">
+                      <a:solidFill>
+                        <a:srgbClr val="D5DDE7"/>
+                      </a:solidFill>
+                      <a:prstDash val="solid"/>
+                      <a:round/>
+                      <a:headEnd type="none" w="med" len="med"/>
+                      <a:tailEnd type="none" w="med" len="med"/>
+                    </a:lnB>
+                  </a:tcPr>
+                </a:tc>
+              </a:tr>
+            </a:tbl>
+          </a:graphicData>
+        </a:graphic>
+      </p:graphicFrame>
+      <p:sp>
+        <p:nvSpPr>
+          <p:cNvPr id="4" name="Text 1"/>
+          <p:cNvSpPr txBox="1"/>
+          <p:nvPr/>
+        </p:nvSpPr>
+        <p:spPr>
+          <a:xfrm>
+            <a:off x="457200" y="5074920"/>
+            <a:ext cx="4206240" cy="731520"/>
+          </a:xfrm>
+          <a:prstGeom prst="rect">
+            <a:avLst/>
+          </a:prstGeom>
+          <a:noFill/>
+          <a:ln/>
+        </p:spPr>
+        <p:txBody>
+          <a:bodyPr wrap="square" lIns="0" tIns="0" rIns="0" bIns="0" rtlCol="0" anchor="t"/>
+          <a:lstStyle/>
+          <a:p>
+            <a:pPr algn="l" indent="0" marL="0">
+              <a:buNone/>
+            </a:pPr>
+            <a:r>
+              <a:rPr lang="en-US" sz="1200" i="1" dirty="0">
+                <a:solidFill>
+                  <a:schemeClr val="tx2"/>
+                </a:solidFill>
+              </a:rPr>
+              <a:t>Données fictives, montants attendus calculés à la main. Sept erreurs volontaires dans le code : toutes détectées.</a:t>
+            </a:r>
+            <a:endParaRPr lang="en-US" sz="1200" dirty="0"/>
+          </a:p>
+        </p:txBody>
+      </p:sp>
+      <p:sp>
+        <p:nvSpPr>
+          <p:cNvPr id="5" name="fix-0"/>
           <p:cNvSpPr/>
           <p:nvPr/>
         </p:nvSpPr>
         <p:spPr>
           <a:xfrm>
-            <a:off x="457200" y="1325880"/>
-            <a:ext cx="3566160" cy="1874520"/>
+            <a:off x="5120640" y="1234440"/>
+            <a:ext cx="6583680" cy="1325880"/>
           </a:xfrm>
           <a:prstGeom prst="roundRect">
             <a:avLst>
-              <a:gd name="adj" fmla="val 3902"/>
+              <a:gd name="adj" fmla="val 5517"/>
             </a:avLst>
           </a:prstGeom>
           <a:solidFill>
@@ -11535,14 +13816,14 @@
       </p:sp>
       <p:sp>
         <p:nvSpPr>
-          <p:cNvPr id="4" name="specdot-0"/>
+          <p:cNvPr id="6" name="fixdot-0"/>
           <p:cNvSpPr/>
           <p:nvPr/>
         </p:nvSpPr>
         <p:spPr>
           <a:xfrm>
-            <a:off x="685800" y="1600200"/>
-            <a:ext cx="292608" cy="292608"/>
+            <a:off x="5303520" y="1417320"/>
+            <a:ext cx="274320" cy="274320"/>
           </a:xfrm>
           <a:prstGeom prst="ellipse">
             <a:avLst/>
@@ -11560,59 +13841,59 @@
       </p:sp>
       <p:sp>
         <p:nvSpPr>
-          <p:cNvPr id="5" name="Text 3"/>
+          <p:cNvPr id="7" name="Text 4"/>
           <p:cNvSpPr txBox="1"/>
           <p:nvPr/>
         </p:nvSpPr>
         <p:spPr>
           <a:xfrm>
-            <a:off x="1097280" y="1508760"/>
-            <a:ext cx="2788920" cy="822960"/>
-          </a:xfrm>
-          <a:prstGeom prst="rect">
-            <a:avLst/>
-          </a:prstGeom>
-          <a:noFill/>
-          <a:ln/>
-        </p:spPr>
-        <p:txBody>
-          <a:bodyPr wrap="square" lIns="1016" tIns="1016" rIns="1016" bIns="1016" rtlCol="0" anchor="t"/>
+            <a:off x="5715000" y="1325880"/>
+            <a:ext cx="5852160" cy="411480"/>
+          </a:xfrm>
+          <a:prstGeom prst="rect">
+            <a:avLst/>
+          </a:prstGeom>
+          <a:noFill/>
+          <a:ln/>
+        </p:spPr>
+        <p:txBody>
+          <a:bodyPr wrap="square" lIns="0" tIns="0" rIns="0" bIns="0" rtlCol="0" anchor="ctr"/>
           <a:lstStyle/>
           <a:p>
             <a:pPr algn="l" indent="0" marL="0">
               <a:buNone/>
             </a:pPr>
             <a:r>
-              <a:rPr lang="en-US" sz="1700" b="1" dirty="0">
+              <a:rPr lang="en-US" sz="1600" b="1" dirty="0">
                 <a:solidFill>
                   <a:schemeClr val="tx1"/>
                 </a:solidFill>
               </a:rPr>
-              <a:t>Export Excel du rapport mensuel</a:t>
-            </a:r>
-            <a:endParaRPr lang="en-US" sz="1700" dirty="0"/>
-          </a:p>
-        </p:txBody>
-      </p:sp>
-      <p:sp>
-        <p:nvSpPr>
-          <p:cNvPr id="6" name="Text 4"/>
+              <a:t>Blocage des connexions</a:t>
+            </a:r>
+            <a:endParaRPr lang="en-US" sz="1600" dirty="0"/>
+          </a:p>
+        </p:txBody>
+      </p:sp>
+      <p:sp>
+        <p:nvSpPr>
+          <p:cNvPr id="8" name="Text 5"/>
           <p:cNvSpPr txBox="1"/>
           <p:nvPr/>
         </p:nvSpPr>
         <p:spPr>
           <a:xfrm>
-            <a:off x="1097280" y="2377440"/>
-            <a:ext cx="2788920" cy="685800"/>
-          </a:xfrm>
-          <a:prstGeom prst="rect">
-            <a:avLst/>
-          </a:prstGeom>
-          <a:noFill/>
-          <a:ln/>
-        </p:spPr>
-        <p:txBody>
-          <a:bodyPr wrap="square" lIns="1016" tIns="1016" rIns="1016" bIns="1016" rtlCol="0" anchor="t"/>
+            <a:off x="5715000" y="1764792"/>
+            <a:ext cx="5852160" cy="731520"/>
+          </a:xfrm>
+          <a:prstGeom prst="rect">
+            <a:avLst/>
+          </a:prstGeom>
+          <a:noFill/>
+          <a:ln/>
+        </p:spPr>
+        <p:txBody>
+          <a:bodyPr wrap="square" lIns="0" tIns="0" rIns="0" bIns="0" rtlCol="0" anchor="t"/>
           <a:lstStyle/>
           <a:p>
             <a:pPr algn="l" indent="0" marL="0">
@@ -11624,7 +13905,7 @@
                   <a:schemeClr val="tx2"/>
                 </a:solidFill>
               </a:rPr>
-              <a:t>Code de référence et tests</a:t>
+              <a:t>Cinq échecs depuis une adresse bloquaient tout le bureau. Désormais par compte ; une adresse seulement au-delà de 50 échecs.</a:t>
             </a:r>
             <a:endParaRPr lang="en-US" sz="1300" dirty="0"/>
           </a:p>
@@ -11632,18 +13913,18 @@
       </p:sp>
       <p:sp>
         <p:nvSpPr>
-          <p:cNvPr id="7" name="spec-1"/>
+          <p:cNvPr id="9" name="fix-1"/>
           <p:cNvSpPr/>
           <p:nvPr/>
         </p:nvSpPr>
         <p:spPr>
           <a:xfrm>
-            <a:off x="4251960" y="1325880"/>
-            <a:ext cx="3566160" cy="1874520"/>
+            <a:off x="5120640" y="2743200"/>
+            <a:ext cx="6583680" cy="1325880"/>
           </a:xfrm>
           <a:prstGeom prst="roundRect">
             <a:avLst>
-              <a:gd name="adj" fmla="val 3902"/>
+              <a:gd name="adj" fmla="val 5517"/>
             </a:avLst>
           </a:prstGeom>
           <a:solidFill>
@@ -11659,14 +13940,138 @@
       </p:sp>
       <p:sp>
         <p:nvSpPr>
-          <p:cNvPr id="8" name="specdot-1"/>
+          <p:cNvPr id="10" name="fixdot-1"/>
           <p:cNvSpPr/>
           <p:nvPr/>
         </p:nvSpPr>
         <p:spPr>
           <a:xfrm>
-            <a:off x="4480560" y="1600200"/>
-            <a:ext cx="292608" cy="292608"/>
+            <a:off x="5303520" y="2926080"/>
+            <a:ext cx="274320" cy="274320"/>
+          </a:xfrm>
+          <a:prstGeom prst="ellipse">
+            <a:avLst/>
+          </a:prstGeom>
+          <a:solidFill>
+            <a:schemeClr val="accent4"/>
+          </a:solidFill>
+          <a:ln w="12700">
+            <a:solidFill>
+              <a:schemeClr val="accent4"/>
+            </a:solidFill>
+            <a:prstDash val="solid"/>
+          </a:ln>
+        </p:spPr>
+      </p:sp>
+      <p:sp>
+        <p:nvSpPr>
+          <p:cNvPr id="11" name="Text 8"/>
+          <p:cNvSpPr txBox="1"/>
+          <p:nvPr/>
+        </p:nvSpPr>
+        <p:spPr>
+          <a:xfrm>
+            <a:off x="5715000" y="2834640"/>
+            <a:ext cx="5852160" cy="411480"/>
+          </a:xfrm>
+          <a:prstGeom prst="rect">
+            <a:avLst/>
+          </a:prstGeom>
+          <a:noFill/>
+          <a:ln/>
+        </p:spPr>
+        <p:txBody>
+          <a:bodyPr wrap="square" lIns="0" tIns="0" rIns="0" bIns="0" rtlCol="0" anchor="ctr"/>
+          <a:lstStyle/>
+          <a:p>
+            <a:pPr algn="l" indent="0" marL="0">
+              <a:buNone/>
+            </a:pPr>
+            <a:r>
+              <a:rPr lang="en-US" sz="1600" b="1" dirty="0">
+                <a:solidFill>
+                  <a:schemeClr val="tx1"/>
+                </a:solidFill>
+              </a:rPr>
+              <a:t>Sessions après changement de mot de passe</a:t>
+            </a:r>
+            <a:endParaRPr lang="en-US" sz="1600" dirty="0"/>
+          </a:p>
+        </p:txBody>
+      </p:sp>
+      <p:sp>
+        <p:nvSpPr>
+          <p:cNvPr id="12" name="Text 9"/>
+          <p:cNvSpPr txBox="1"/>
+          <p:nvPr/>
+        </p:nvSpPr>
+        <p:spPr>
+          <a:xfrm>
+            <a:off x="5715000" y="3273552"/>
+            <a:ext cx="5852160" cy="731520"/>
+          </a:xfrm>
+          <a:prstGeom prst="rect">
+            <a:avLst/>
+          </a:prstGeom>
+          <a:noFill/>
+          <a:ln/>
+        </p:spPr>
+        <p:txBody>
+          <a:bodyPr wrap="square" lIns="0" tIns="0" rIns="0" bIns="0" rtlCol="0" anchor="t"/>
+          <a:lstStyle/>
+          <a:p>
+            <a:pPr algn="l" indent="0" marL="0">
+              <a:buNone/>
+            </a:pPr>
+            <a:r>
+              <a:rPr lang="en-US" sz="1300" dirty="0">
+                <a:solidFill>
+                  <a:schemeClr val="tx2"/>
+                </a:solidFill>
+              </a:rPr>
+              <a:t>Deux changements dans la même seconde laissaient une session ouverte. Heure enregistrée à la microseconde.</a:t>
+            </a:r>
+            <a:endParaRPr lang="en-US" sz="1300" dirty="0"/>
+          </a:p>
+        </p:txBody>
+      </p:sp>
+      <p:sp>
+        <p:nvSpPr>
+          <p:cNvPr id="13" name="fix-2"/>
+          <p:cNvSpPr/>
+          <p:nvPr/>
+        </p:nvSpPr>
+        <p:spPr>
+          <a:xfrm>
+            <a:off x="5120640" y="4251960"/>
+            <a:ext cx="6583680" cy="1325880"/>
+          </a:xfrm>
+          <a:prstGeom prst="roundRect">
+            <a:avLst>
+              <a:gd name="adj" fmla="val 5517"/>
+            </a:avLst>
+          </a:prstGeom>
+          <a:solidFill>
+            <a:schemeClr val="bg2"/>
+          </a:solidFill>
+          <a:ln w="9525">
+            <a:solidFill>
+              <a:schemeClr val="bg2"/>
+            </a:solidFill>
+            <a:prstDash val="solid"/>
+          </a:ln>
+        </p:spPr>
+      </p:sp>
+      <p:sp>
+        <p:nvSpPr>
+          <p:cNvPr id="14" name="fixdot-2"/>
+          <p:cNvSpPr/>
+          <p:nvPr/>
+        </p:nvSpPr>
+        <p:spPr>
+          <a:xfrm>
+            <a:off x="5303520" y="4434840"/>
+            <a:ext cx="274320" cy="274320"/>
           </a:xfrm>
           <a:prstGeom prst="ellipse">
             <a:avLst/>
@@ -11684,59 +14089,59 @@
       </p:sp>
       <p:sp>
         <p:nvSpPr>
-          <p:cNvPr id="9" name="Text 7"/>
+          <p:cNvPr id="15" name="Text 12"/>
           <p:cNvSpPr txBox="1"/>
           <p:nvPr/>
         </p:nvSpPr>
         <p:spPr>
           <a:xfrm>
-            <a:off x="4892040" y="1508760"/>
-            <a:ext cx="2788920" cy="822960"/>
-          </a:xfrm>
-          <a:prstGeom prst="rect">
-            <a:avLst/>
-          </a:prstGeom>
-          <a:noFill/>
-          <a:ln/>
-        </p:spPr>
-        <p:txBody>
-          <a:bodyPr wrap="square" lIns="1016" tIns="1016" rIns="1016" bIns="1016" rtlCol="0" anchor="t"/>
+            <a:off x="5715000" y="4343400"/>
+            <a:ext cx="5852160" cy="411480"/>
+          </a:xfrm>
+          <a:prstGeom prst="rect">
+            <a:avLst/>
+          </a:prstGeom>
+          <a:noFill/>
+          <a:ln/>
+        </p:spPr>
+        <p:txBody>
+          <a:bodyPr wrap="square" lIns="0" tIns="0" rIns="0" bIns="0" rtlCol="0" anchor="ctr"/>
           <a:lstStyle/>
           <a:p>
             <a:pPr algn="l" indent="0" marL="0">
               <a:buNone/>
             </a:pPr>
             <a:r>
-              <a:rPr lang="en-US" sz="1700" b="1" dirty="0">
+              <a:rPr lang="en-US" sz="1600" b="1" dirty="0">
                 <a:solidFill>
                   <a:schemeClr val="tx1"/>
                 </a:solidFill>
               </a:rPr>
-              <a:t>Lecture BigQuery</a:t>
-            </a:r>
-            <a:endParaRPr lang="en-US" sz="1700" dirty="0"/>
-          </a:p>
-        </p:txBody>
-      </p:sp>
-      <p:sp>
-        <p:nvSpPr>
-          <p:cNvPr id="10" name="Text 8"/>
+              <a:t>Ne prouve pas</a:t>
+            </a:r>
+            <a:endParaRPr lang="en-US" sz="1600" dirty="0"/>
+          </a:p>
+        </p:txBody>
+      </p:sp>
+      <p:sp>
+        <p:nvSpPr>
+          <p:cNvPr id="16" name="Text 13"/>
           <p:cNvSpPr txBox="1"/>
           <p:nvPr/>
         </p:nvSpPr>
         <p:spPr>
           <a:xfrm>
-            <a:off x="4892040" y="2377440"/>
-            <a:ext cx="2788920" cy="685800"/>
-          </a:xfrm>
-          <a:prstGeom prst="rect">
-            <a:avLst/>
-          </a:prstGeom>
-          <a:noFill/>
-          <a:ln/>
-        </p:spPr>
-        <p:txBody>
-          <a:bodyPr wrap="square" lIns="1016" tIns="1016" rIns="1016" bIns="1016" rtlCol="0" anchor="t"/>
+            <a:off x="5715000" y="4782312"/>
+            <a:ext cx="5852160" cy="731520"/>
+          </a:xfrm>
+          <a:prstGeom prst="rect">
+            <a:avLst/>
+          </a:prstGeom>
+          <a:noFill/>
+          <a:ln/>
+        </p:spPr>
+        <p:txBody>
+          <a:bodyPr wrap="square" lIns="0" tIns="0" rIns="0" bIns="0" rtlCol="0" anchor="t"/>
           <a:lstStyle/>
           <a:p>
             <a:pPr algn="l" indent="0" marL="0">
@@ -11748,539 +14153,7 @@
                   <a:schemeClr val="tx2"/>
                 </a:solidFill>
               </a:rPr>
-              <a:t>Testée sur émulateur, pas sur la vraie table</a:t>
-            </a:r>
-            <a:endParaRPr lang="en-US" sz="1300" dirty="0"/>
-          </a:p>
-        </p:txBody>
-      </p:sp>
-      <p:sp>
-        <p:nvSpPr>
-          <p:cNvPr id="11" name="spec-2"/>
-          <p:cNvSpPr/>
-          <p:nvPr/>
-        </p:nvSpPr>
-        <p:spPr>
-          <a:xfrm>
-            <a:off x="8046720" y="1325880"/>
-            <a:ext cx="3566160" cy="1874520"/>
-          </a:xfrm>
-          <a:prstGeom prst="roundRect">
-            <a:avLst>
-              <a:gd name="adj" fmla="val 3902"/>
-            </a:avLst>
-          </a:prstGeom>
-          <a:solidFill>
-            <a:schemeClr val="bg2"/>
-          </a:solidFill>
-          <a:ln w="9525">
-            <a:solidFill>
-              <a:schemeClr val="bg2"/>
-            </a:solidFill>
-            <a:prstDash val="solid"/>
-          </a:ln>
-        </p:spPr>
-      </p:sp>
-      <p:sp>
-        <p:nvSpPr>
-          <p:cNvPr id="12" name="specdot-2"/>
-          <p:cNvSpPr/>
-          <p:nvPr/>
-        </p:nvSpPr>
-        <p:spPr>
-          <a:xfrm>
-            <a:off x="8275320" y="1600200"/>
-            <a:ext cx="292608" cy="292608"/>
-          </a:xfrm>
-          <a:prstGeom prst="ellipse">
-            <a:avLst/>
-          </a:prstGeom>
-          <a:solidFill>
-            <a:schemeClr val="accent5"/>
-          </a:solidFill>
-          <a:ln w="12700">
-            <a:solidFill>
-              <a:schemeClr val="accent5"/>
-            </a:solidFill>
-            <a:prstDash val="solid"/>
-          </a:ln>
-        </p:spPr>
-      </p:sp>
-      <p:sp>
-        <p:nvSpPr>
-          <p:cNvPr id="13" name="Text 11"/>
-          <p:cNvSpPr txBox="1"/>
-          <p:nvPr/>
-        </p:nvSpPr>
-        <p:spPr>
-          <a:xfrm>
-            <a:off x="8686800" y="1508760"/>
-            <a:ext cx="2788920" cy="822960"/>
-          </a:xfrm>
-          <a:prstGeom prst="rect">
-            <a:avLst/>
-          </a:prstGeom>
-          <a:noFill/>
-          <a:ln/>
-        </p:spPr>
-        <p:txBody>
-          <a:bodyPr wrap="square" lIns="1016" tIns="1016" rIns="1016" bIns="1016" rtlCol="0" anchor="t"/>
-          <a:lstStyle/>
-          <a:p>
-            <a:pPr algn="l" indent="0" marL="0">
-              <a:buNone/>
-            </a:pPr>
-            <a:r>
-              <a:rPr lang="en-US" sz="1700" b="1" dirty="0">
-                <a:solidFill>
-                  <a:schemeClr val="tx1"/>
-                </a:solidFill>
-              </a:rPr>
-              <a:t>Rapprochement MCB</a:t>
-            </a:r>
-            <a:endParaRPr lang="en-US" sz="1700" dirty="0"/>
-          </a:p>
-        </p:txBody>
-      </p:sp>
-      <p:sp>
-        <p:nvSpPr>
-          <p:cNvPr id="14" name="Text 12"/>
-          <p:cNvSpPr txBox="1"/>
-          <p:nvPr/>
-        </p:nvSpPr>
-        <p:spPr>
-          <a:xfrm>
-            <a:off x="8686800" y="2377440"/>
-            <a:ext cx="2788920" cy="685800"/>
-          </a:xfrm>
-          <a:prstGeom prst="rect">
-            <a:avLst/>
-          </a:prstGeom>
-          <a:noFill/>
-          <a:ln/>
-        </p:spPr>
-        <p:txBody>
-          <a:bodyPr wrap="square" lIns="1016" tIns="1016" rIns="1016" bIns="1016" rtlCol="0" anchor="t"/>
-          <a:lstStyle/>
-          <a:p>
-            <a:pPr algn="l" indent="0" marL="0">
-              <a:buNone/>
-            </a:pPr>
-            <a:r>
-              <a:rPr lang="en-US" sz="1300" dirty="0">
-                <a:solidFill>
-                  <a:schemeClr val="tx2"/>
-                </a:solidFill>
-              </a:rPr>
-              <a:t>Testé sur fichiers synthétiques</a:t>
-            </a:r>
-            <a:endParaRPr lang="en-US" sz="1300" dirty="0"/>
-          </a:p>
-        </p:txBody>
-      </p:sp>
-      <p:sp>
-        <p:nvSpPr>
-          <p:cNvPr id="15" name="spec-3"/>
-          <p:cNvSpPr/>
-          <p:nvPr/>
-        </p:nvSpPr>
-        <p:spPr>
-          <a:xfrm>
-            <a:off x="457200" y="3474720"/>
-            <a:ext cx="3566160" cy="1874520"/>
-          </a:xfrm>
-          <a:prstGeom prst="roundRect">
-            <a:avLst>
-              <a:gd name="adj" fmla="val 3902"/>
-            </a:avLst>
-          </a:prstGeom>
-          <a:solidFill>
-            <a:schemeClr val="bg2"/>
-          </a:solidFill>
-          <a:ln w="9525">
-            <a:solidFill>
-              <a:schemeClr val="bg2"/>
-            </a:solidFill>
-            <a:prstDash val="solid"/>
-          </a:ln>
-        </p:spPr>
-      </p:sp>
-      <p:sp>
-        <p:nvSpPr>
-          <p:cNvPr id="16" name="specdot-3"/>
-          <p:cNvSpPr/>
-          <p:nvPr/>
-        </p:nvSpPr>
-        <p:spPr>
-          <a:xfrm>
-            <a:off x="685800" y="3749040"/>
-            <a:ext cx="292608" cy="292608"/>
-          </a:xfrm>
-          <a:prstGeom prst="ellipse">
-            <a:avLst/>
-          </a:prstGeom>
-          <a:solidFill>
-            <a:schemeClr val="accent4"/>
-          </a:solidFill>
-          <a:ln w="12700">
-            <a:solidFill>
-              <a:schemeClr val="accent4"/>
-            </a:solidFill>
-            <a:prstDash val="solid"/>
-          </a:ln>
-        </p:spPr>
-      </p:sp>
-      <p:sp>
-        <p:nvSpPr>
-          <p:cNvPr id="17" name="Text 15"/>
-          <p:cNvSpPr txBox="1"/>
-          <p:nvPr/>
-        </p:nvSpPr>
-        <p:spPr>
-          <a:xfrm>
-            <a:off x="1097280" y="3657600"/>
-            <a:ext cx="2788920" cy="822960"/>
-          </a:xfrm>
-          <a:prstGeom prst="rect">
-            <a:avLst/>
-          </a:prstGeom>
-          <a:noFill/>
-          <a:ln/>
-        </p:spPr>
-        <p:txBody>
-          <a:bodyPr wrap="square" lIns="1016" tIns="1016" rIns="1016" bIns="1016" rtlCol="0" anchor="t"/>
-          <a:lstStyle/>
-          <a:p>
-            <a:pPr algn="l" indent="0" marL="0">
-              <a:buNone/>
-            </a:pPr>
-            <a:r>
-              <a:rPr lang="en-US" sz="1700" b="1" dirty="0">
-                <a:solidFill>
-                  <a:schemeClr val="tx1"/>
-                </a:solidFill>
-              </a:rPr>
-              <a:t>Onboarding KYC</a:t>
-            </a:r>
-            <a:endParaRPr lang="en-US" sz="1700" dirty="0"/>
-          </a:p>
-        </p:txBody>
-      </p:sp>
-      <p:sp>
-        <p:nvSpPr>
-          <p:cNvPr id="18" name="Text 16"/>
-          <p:cNvSpPr txBox="1"/>
-          <p:nvPr/>
-        </p:nvSpPr>
-        <p:spPr>
-          <a:xfrm>
-            <a:off x="1097280" y="4526280"/>
-            <a:ext cx="2788920" cy="685800"/>
-          </a:xfrm>
-          <a:prstGeom prst="rect">
-            <a:avLst/>
-          </a:prstGeom>
-          <a:noFill/>
-          <a:ln/>
-        </p:spPr>
-        <p:txBody>
-          <a:bodyPr wrap="square" lIns="1016" tIns="1016" rIns="1016" bIns="1016" rtlCol="0" anchor="t"/>
-          <a:lstStyle/>
-          <a:p>
-            <a:pPr algn="l" indent="0" marL="0">
-              <a:buNone/>
-            </a:pPr>
-            <a:r>
-              <a:rPr lang="en-US" sz="1300" dirty="0">
-                <a:solidFill>
-                  <a:schemeClr val="tx2"/>
-                </a:solidFill>
-              </a:rPr>
-              <a:t>18 tests de recette</a:t>
-            </a:r>
-            <a:endParaRPr lang="en-US" sz="1300" dirty="0"/>
-          </a:p>
-        </p:txBody>
-      </p:sp>
-      <p:sp>
-        <p:nvSpPr>
-          <p:cNvPr id="19" name="spec-4"/>
-          <p:cNvSpPr/>
-          <p:nvPr/>
-        </p:nvSpPr>
-        <p:spPr>
-          <a:xfrm>
-            <a:off x="4251960" y="3474720"/>
-            <a:ext cx="3566160" cy="1874520"/>
-          </a:xfrm>
-          <a:prstGeom prst="roundRect">
-            <a:avLst>
-              <a:gd name="adj" fmla="val 3902"/>
-            </a:avLst>
-          </a:prstGeom>
-          <a:solidFill>
-            <a:schemeClr val="bg2"/>
-          </a:solidFill>
-          <a:ln w="9525">
-            <a:solidFill>
-              <a:schemeClr val="bg2"/>
-            </a:solidFill>
-            <a:prstDash val="solid"/>
-          </a:ln>
-        </p:spPr>
-      </p:sp>
-      <p:sp>
-        <p:nvSpPr>
-          <p:cNvPr id="20" name="specdot-4"/>
-          <p:cNvSpPr/>
-          <p:nvPr/>
-        </p:nvSpPr>
-        <p:spPr>
-          <a:xfrm>
-            <a:off x="4480560" y="3749040"/>
-            <a:ext cx="292608" cy="292608"/>
-          </a:xfrm>
-          <a:prstGeom prst="ellipse">
-            <a:avLst/>
-          </a:prstGeom>
-          <a:solidFill>
-            <a:schemeClr val="accent4"/>
-          </a:solidFill>
-          <a:ln w="12700">
-            <a:solidFill>
-              <a:schemeClr val="accent4"/>
-            </a:solidFill>
-            <a:prstDash val="solid"/>
-          </a:ln>
-        </p:spPr>
-      </p:sp>
-      <p:sp>
-        <p:nvSpPr>
-          <p:cNvPr id="21" name="Text 19"/>
-          <p:cNvSpPr txBox="1"/>
-          <p:nvPr/>
-        </p:nvSpPr>
-        <p:spPr>
-          <a:xfrm>
-            <a:off x="4892040" y="3657600"/>
-            <a:ext cx="2788920" cy="822960"/>
-          </a:xfrm>
-          <a:prstGeom prst="rect">
-            <a:avLst/>
-          </a:prstGeom>
-          <a:noFill/>
-          <a:ln/>
-        </p:spPr>
-        <p:txBody>
-          <a:bodyPr wrap="square" lIns="1016" tIns="1016" rIns="1016" bIns="1016" rtlCol="0" anchor="t"/>
-          <a:lstStyle/>
-          <a:p>
-            <a:pPr algn="l" indent="0" marL="0">
-              <a:buNone/>
-            </a:pPr>
-            <a:r>
-              <a:rPr lang="en-US" sz="1700" b="1" dirty="0">
-                <a:solidFill>
-                  <a:schemeClr val="tx1"/>
-                </a:solidFill>
-              </a:rPr>
-              <a:t>Portail marchand</a:t>
-            </a:r>
-            <a:endParaRPr lang="en-US" sz="1700" dirty="0"/>
-          </a:p>
-        </p:txBody>
-      </p:sp>
-      <p:sp>
-        <p:nvSpPr>
-          <p:cNvPr id="22" name="Text 20"/>
-          <p:cNvSpPr txBox="1"/>
-          <p:nvPr/>
-        </p:nvSpPr>
-        <p:spPr>
-          <a:xfrm>
-            <a:off x="4892040" y="4526280"/>
-            <a:ext cx="2788920" cy="685800"/>
-          </a:xfrm>
-          <a:prstGeom prst="rect">
-            <a:avLst/>
-          </a:prstGeom>
-          <a:noFill/>
-          <a:ln/>
-        </p:spPr>
-        <p:txBody>
-          <a:bodyPr wrap="square" lIns="1016" tIns="1016" rIns="1016" bIns="1016" rtlCol="0" anchor="t"/>
-          <a:lstStyle/>
-          <a:p>
-            <a:pPr algn="l" indent="0" marL="0">
-              <a:buNone/>
-            </a:pPr>
-            <a:r>
-              <a:rPr lang="en-US" sz="1300" dirty="0">
-                <a:solidFill>
-                  <a:schemeClr val="tx2"/>
-                </a:solidFill>
-              </a:rPr>
-              <a:t>29 tests de recette, 113 vérifications</a:t>
-            </a:r>
-            <a:endParaRPr lang="en-US" sz="1300" dirty="0"/>
-          </a:p>
-        </p:txBody>
-      </p:sp>
-      <p:sp>
-        <p:nvSpPr>
-          <p:cNvPr id="23" name="spec-5"/>
-          <p:cNvSpPr/>
-          <p:nvPr/>
-        </p:nvSpPr>
-        <p:spPr>
-          <a:xfrm>
-            <a:off x="8046720" y="3474720"/>
-            <a:ext cx="3566160" cy="1874520"/>
-          </a:xfrm>
-          <a:prstGeom prst="roundRect">
-            <a:avLst>
-              <a:gd name="adj" fmla="val 3902"/>
-            </a:avLst>
-          </a:prstGeom>
-          <a:solidFill>
-            <a:schemeClr val="bg2"/>
-          </a:solidFill>
-          <a:ln w="9525">
-            <a:solidFill>
-              <a:schemeClr val="bg2"/>
-            </a:solidFill>
-            <a:prstDash val="solid"/>
-          </a:ln>
-        </p:spPr>
-      </p:sp>
-      <p:sp>
-        <p:nvSpPr>
-          <p:cNvPr id="24" name="specdot-5"/>
-          <p:cNvSpPr/>
-          <p:nvPr/>
-        </p:nvSpPr>
-        <p:spPr>
-          <a:xfrm>
-            <a:off x="8275320" y="3749040"/>
-            <a:ext cx="292608" cy="292608"/>
-          </a:xfrm>
-          <a:prstGeom prst="ellipse">
-            <a:avLst/>
-          </a:prstGeom>
-          <a:solidFill>
-            <a:schemeClr val="accent6"/>
-          </a:solidFill>
-          <a:ln w="12700">
-            <a:solidFill>
-              <a:schemeClr val="accent6"/>
-            </a:solidFill>
-            <a:prstDash val="solid"/>
-          </a:ln>
-        </p:spPr>
-      </p:sp>
-      <p:sp>
-        <p:nvSpPr>
-          <p:cNvPr id="25" name="Text 23"/>
-          <p:cNvSpPr txBox="1"/>
-          <p:nvPr/>
-        </p:nvSpPr>
-        <p:spPr>
-          <a:xfrm>
-            <a:off x="8686800" y="3657600"/>
-            <a:ext cx="2788920" cy="822960"/>
-          </a:xfrm>
-          <a:prstGeom prst="rect">
-            <a:avLst/>
-          </a:prstGeom>
-          <a:noFill/>
-          <a:ln/>
-        </p:spPr>
-        <p:txBody>
-          <a:bodyPr wrap="square" lIns="1016" tIns="1016" rIns="1016" bIns="1016" rtlCol="0" anchor="t"/>
-          <a:lstStyle/>
-          <a:p>
-            <a:pPr algn="l" indent="0" marL="0">
-              <a:buNone/>
-            </a:pPr>
-            <a:r>
-              <a:rPr lang="en-US" sz="1700" b="1" dirty="0">
-                <a:solidFill>
-                  <a:schemeClr val="tx1"/>
-                </a:solidFill>
-              </a:rPr>
-              <a:t>Réconciliation trust</a:t>
-            </a:r>
-            <a:endParaRPr lang="en-US" sz="1700" dirty="0"/>
-          </a:p>
-        </p:txBody>
-      </p:sp>
-      <p:sp>
-        <p:nvSpPr>
-          <p:cNvPr id="26" name="Text 24"/>
-          <p:cNvSpPr txBox="1"/>
-          <p:nvPr/>
-        </p:nvSpPr>
-        <p:spPr>
-          <a:xfrm>
-            <a:off x="8686800" y="4526280"/>
-            <a:ext cx="2788920" cy="685800"/>
-          </a:xfrm>
-          <a:prstGeom prst="rect">
-            <a:avLst/>
-          </a:prstGeom>
-          <a:noFill/>
-          <a:ln/>
-        </p:spPr>
-        <p:txBody>
-          <a:bodyPr wrap="square" lIns="1016" tIns="1016" rIns="1016" bIns="1016" rtlCol="0" anchor="t"/>
-          <a:lstStyle/>
-          <a:p>
-            <a:pPr algn="l" indent="0" marL="0">
-              <a:buNone/>
-            </a:pPr>
-            <a:r>
-              <a:rPr lang="en-US" sz="1300" dirty="0">
-                <a:solidFill>
-                  <a:schemeClr val="tx2"/>
-                </a:solidFill>
-              </a:rPr>
-              <a:t>Sans code : seulement en modèle B</a:t>
-            </a:r>
-            <a:endParaRPr lang="en-US" sz="1300" dirty="0"/>
-          </a:p>
-        </p:txBody>
-      </p:sp>
-      <p:sp>
-        <p:nvSpPr>
-          <p:cNvPr id="27" name="Text 25"/>
-          <p:cNvSpPr txBox="1"/>
-          <p:nvPr/>
-        </p:nvSpPr>
-        <p:spPr>
-          <a:xfrm>
-            <a:off x="457200" y="5760720"/>
-            <a:ext cx="11247120" cy="365760"/>
-          </a:xfrm>
-          <a:prstGeom prst="rect">
-            <a:avLst/>
-          </a:prstGeom>
-          <a:noFill/>
-          <a:ln/>
-        </p:spPr>
-        <p:txBody>
-          <a:bodyPr wrap="square" lIns="0" tIns="0" rIns="0" bIns="0" rtlCol="0" anchor="t"/>
-          <a:lstStyle/>
-          <a:p>
-            <a:pPr algn="l" indent="0" marL="0">
-              <a:buNone/>
-            </a:pPr>
-            <a:r>
-              <a:rPr lang="en-US" sz="1300" i="1" dirty="0">
-                <a:solidFill>
-                  <a:schemeClr val="tx2"/>
-                </a:solidFill>
-              </a:rPr>
-              <a:t>Dans outputs/dev-handover/ du dépôt. Vert : prête · ambre : à valider sur données réelles · rouge : en attente d'une décision.</a:t>
+              <a:t>Les règles métier (unité, remboursements, TVA), le vrai BigQuery, un vrai mois MCB, la 2FA obligatoire, les écrans.</a:t>
             </a:r>
             <a:endParaRPr lang="en-US" sz="1300" dirty="0"/>
           </a:p>
@@ -12388,7 +14261,7 @@
                   <a:schemeClr val="tx1"/>
                 </a:solidFill>
               </a:rPr>
-              <a:t>Neuf décisions et vérifications en attente</a:t>
+              <a:t>Six specs prêtes pour le développeur de my.mips.mu</a:t>
             </a:r>
             <a:endParaRPr lang="en-US" sz="3000" dirty="0"/>
           </a:p>
@@ -12396,226 +14269,22 @@
       </p:sp>
       <p:sp>
         <p:nvSpPr>
-          <p:cNvPr id="3" name="dec-0"/>
+          <p:cNvPr id="3" name="spec-0"/>
           <p:cNvSpPr/>
           <p:nvPr/>
         </p:nvSpPr>
         <p:spPr>
           <a:xfrm>
             <a:off x="457200" y="1325880"/>
-            <a:ext cx="3566160" cy="1234440"/>
+            <a:ext cx="3566160" cy="1874520"/>
           </a:xfrm>
           <a:prstGeom prst="roundRect">
             <a:avLst>
-              <a:gd name="adj" fmla="val 5926"/>
+              <a:gd name="adj" fmla="val 3902"/>
             </a:avLst>
           </a:prstGeom>
           <a:solidFill>
-            <a:schemeClr val="accent6">
-              <a:alpha val="12000"/>
-            </a:schemeClr>
-          </a:solidFill>
-          <a:ln w="19050">
-            <a:solidFill>
-              <a:schemeClr val="accent6"/>
-            </a:solidFill>
-            <a:prstDash val="solid"/>
-          </a:ln>
-        </p:spPr>
-      </p:sp>
-      <p:sp>
-        <p:nvSpPr>
-          <p:cNvPr id="4" name="Text 2"/>
-          <p:cNvSpPr txBox="1"/>
-          <p:nvPr/>
-        </p:nvSpPr>
-        <p:spPr>
-          <a:xfrm>
-            <a:off x="594360" y="1435608"/>
-            <a:ext cx="3291840" cy="320040"/>
-          </a:xfrm>
-          <a:prstGeom prst="rect">
-            <a:avLst/>
-          </a:prstGeom>
-          <a:noFill/>
-          <a:ln/>
-        </p:spPr>
-        <p:txBody>
-          <a:bodyPr wrap="square" lIns="0" tIns="0" rIns="0" bIns="0" rtlCol="0" anchor="t"/>
-          <a:lstStyle/>
-          <a:p>
-            <a:pPr algn="l" indent="0" marL="0">
-              <a:buNone/>
-            </a:pPr>
-            <a:r>
-              <a:rPr lang="en-US" sz="1100" b="1" dirty="0">
-                <a:solidFill>
-                  <a:schemeClr val="accent6"/>
-                </a:solidFill>
-              </a:rPr>
-              <a:t>CEO · BLOQUANT</a:t>
-            </a:r>
-            <a:endParaRPr lang="en-US" sz="1100" dirty="0"/>
-          </a:p>
-        </p:txBody>
-      </p:sp>
-      <p:sp>
-        <p:nvSpPr>
-          <p:cNvPr id="5" name="Text 3"/>
-          <p:cNvSpPr txBox="1"/>
-          <p:nvPr/>
-        </p:nvSpPr>
-        <p:spPr>
-          <a:xfrm>
-            <a:off x="594360" y="1783080"/>
-            <a:ext cx="3291840" cy="685800"/>
-          </a:xfrm>
-          <a:prstGeom prst="rect">
-            <a:avLst/>
-          </a:prstGeom>
-          <a:noFill/>
-          <a:ln/>
-        </p:spPr>
-        <p:txBody>
-          <a:bodyPr wrap="square" lIns="0" tIns="0" rIns="0" bIns="0" rtlCol="0" anchor="t"/>
-          <a:lstStyle/>
-          <a:p>
-            <a:pPr algn="l" indent="0" marL="0">
-              <a:buNone/>
-            </a:pPr>
-            <a:r>
-              <a:rPr lang="en-US" sz="1600" b="1" dirty="0">
-                <a:solidFill>
-                  <a:schemeClr val="tx1"/>
-                </a:solidFill>
-              </a:rPr>
-              <a:t>Modèle A ou B pour SPIN</a:t>
-            </a:r>
-            <a:endParaRPr lang="en-US" sz="1600" dirty="0"/>
-          </a:p>
-        </p:txBody>
-      </p:sp>
-      <p:sp>
-        <p:nvSpPr>
-          <p:cNvPr id="6" name="dec-1"/>
-          <p:cNvSpPr/>
-          <p:nvPr/>
-        </p:nvSpPr>
-        <p:spPr>
-          <a:xfrm>
-            <a:off x="4251960" y="1325880"/>
-            <a:ext cx="3566160" cy="1234440"/>
-          </a:xfrm>
-          <a:prstGeom prst="roundRect">
-            <a:avLst>
-              <a:gd name="adj" fmla="val 5926"/>
-            </a:avLst>
-          </a:prstGeom>
-          <a:solidFill>
-            <a:schemeClr val="accent6">
-              <a:alpha val="12000"/>
-            </a:schemeClr>
-          </a:solidFill>
-          <a:ln w="19050">
-            <a:solidFill>
-              <a:schemeClr val="accent6"/>
-            </a:solidFill>
-            <a:prstDash val="solid"/>
-          </a:ln>
-        </p:spPr>
-      </p:sp>
-      <p:sp>
-        <p:nvSpPr>
-          <p:cNvPr id="7" name="Text 5"/>
-          <p:cNvSpPr txBox="1"/>
-          <p:nvPr/>
-        </p:nvSpPr>
-        <p:spPr>
-          <a:xfrm>
-            <a:off x="4389120" y="1435608"/>
-            <a:ext cx="3291840" cy="320040"/>
-          </a:xfrm>
-          <a:prstGeom prst="rect">
-            <a:avLst/>
-          </a:prstGeom>
-          <a:noFill/>
-          <a:ln/>
-        </p:spPr>
-        <p:txBody>
-          <a:bodyPr wrap="square" lIns="0" tIns="0" rIns="0" bIns="0" rtlCol="0" anchor="t"/>
-          <a:lstStyle/>
-          <a:p>
-            <a:pPr algn="l" indent="0" marL="0">
-              <a:buNone/>
-            </a:pPr>
-            <a:r>
-              <a:rPr lang="en-US" sz="1100" b="1" dirty="0">
-                <a:solidFill>
-                  <a:schemeClr val="accent6"/>
-                </a:solidFill>
-              </a:rPr>
-              <a:t>CONFORMITÉ · BLOQUANT</a:t>
-            </a:r>
-            <a:endParaRPr lang="en-US" sz="1100" dirty="0"/>
-          </a:p>
-        </p:txBody>
-      </p:sp>
-      <p:sp>
-        <p:nvSpPr>
-          <p:cNvPr id="8" name="Text 6"/>
-          <p:cNvSpPr txBox="1"/>
-          <p:nvPr/>
-        </p:nvSpPr>
-        <p:spPr>
-          <a:xfrm>
-            <a:off x="4389120" y="1783080"/>
-            <a:ext cx="3291840" cy="685800"/>
-          </a:xfrm>
-          <a:prstGeom prst="rect">
-            <a:avLst/>
-          </a:prstGeom>
-          <a:noFill/>
-          <a:ln/>
-        </p:spPr>
-        <p:txBody>
-          <a:bodyPr wrap="square" lIns="0" tIns="0" rIns="0" bIns="0" rtlCol="0" anchor="t"/>
-          <a:lstStyle/>
-          <a:p>
-            <a:pPr algn="l" indent="0" marL="0">
-              <a:buNone/>
-            </a:pPr>
-            <a:r>
-              <a:rPr lang="en-US" sz="1600" b="1" dirty="0">
-                <a:solidFill>
-                  <a:schemeClr val="tx1"/>
-                </a:solidFill>
-              </a:rPr>
-              <a:t>Textes BoM sur le cantonnement</a:t>
-            </a:r>
-            <a:endParaRPr lang="en-US" sz="1600" dirty="0"/>
-          </a:p>
-        </p:txBody>
-      </p:sp>
-      <p:sp>
-        <p:nvSpPr>
-          <p:cNvPr id="9" name="dec-2"/>
-          <p:cNvSpPr/>
-          <p:nvPr/>
-        </p:nvSpPr>
-        <p:spPr>
-          <a:xfrm>
-            <a:off x="8046720" y="1325880"/>
-            <a:ext cx="3566160" cy="1234440"/>
-          </a:xfrm>
-          <a:prstGeom prst="roundRect">
-            <a:avLst>
-              <a:gd name="adj" fmla="val 5926"/>
-            </a:avLst>
-          </a:prstGeom>
-          <a:solidFill>
-            <a:schemeClr val="accent1">
-              <a:alpha val="8000"/>
-            </a:schemeClr>
+            <a:schemeClr val="bg2"/>
           </a:solidFill>
           <a:ln w="9525">
             <a:solidFill>
@@ -12627,96 +14296,119 @@
       </p:sp>
       <p:sp>
         <p:nvSpPr>
-          <p:cNvPr id="10" name="Text 8"/>
+          <p:cNvPr id="4" name="specdot-0"/>
+          <p:cNvSpPr/>
+          <p:nvPr/>
+        </p:nvSpPr>
+        <p:spPr>
+          <a:xfrm>
+            <a:off x="685800" y="1600200"/>
+            <a:ext cx="292608" cy="292608"/>
+          </a:xfrm>
+          <a:prstGeom prst="ellipse">
+            <a:avLst/>
+          </a:prstGeom>
+          <a:solidFill>
+            <a:schemeClr val="accent4"/>
+          </a:solidFill>
+          <a:ln w="12700">
+            <a:solidFill>
+              <a:schemeClr val="accent4"/>
+            </a:solidFill>
+            <a:prstDash val="solid"/>
+          </a:ln>
+        </p:spPr>
+      </p:sp>
+      <p:sp>
+        <p:nvSpPr>
+          <p:cNvPr id="5" name="Text 3"/>
           <p:cNvSpPr txBox="1"/>
           <p:nvPr/>
         </p:nvSpPr>
         <p:spPr>
           <a:xfrm>
-            <a:off x="8183880" y="1435608"/>
-            <a:ext cx="3291840" cy="320040"/>
-          </a:xfrm>
-          <a:prstGeom prst="rect">
-            <a:avLst/>
-          </a:prstGeom>
-          <a:noFill/>
-          <a:ln/>
-        </p:spPr>
-        <p:txBody>
-          <a:bodyPr wrap="square" lIns="0" tIns="0" rIns="0" bIns="0" rtlCol="0" anchor="t"/>
+            <a:off x="1097280" y="1508760"/>
+            <a:ext cx="2788920" cy="822960"/>
+          </a:xfrm>
+          <a:prstGeom prst="rect">
+            <a:avLst/>
+          </a:prstGeom>
+          <a:noFill/>
+          <a:ln/>
+        </p:spPr>
+        <p:txBody>
+          <a:bodyPr wrap="square" lIns="1016" tIns="1016" rIns="1016" bIns="1016" rtlCol="0" anchor="t"/>
           <a:lstStyle/>
           <a:p>
             <a:pPr algn="l" indent="0" marL="0">
               <a:buNone/>
             </a:pPr>
             <a:r>
-              <a:rPr lang="en-US" sz="1100" b="1" dirty="0">
-                <a:solidFill>
-                  <a:schemeClr val="accent1"/>
-                </a:solidFill>
-              </a:rPr>
-              <a:t>CONFORMITÉ</a:t>
-            </a:r>
-            <a:endParaRPr lang="en-US" sz="1100" dirty="0"/>
-          </a:p>
-        </p:txBody>
-      </p:sp>
-      <p:sp>
-        <p:nvSpPr>
-          <p:cNvPr id="11" name="Text 9"/>
+              <a:rPr lang="en-US" sz="1700" b="1" dirty="0">
+                <a:solidFill>
+                  <a:schemeClr val="tx1"/>
+                </a:solidFill>
+              </a:rPr>
+              <a:t>Export Excel du rapport mensuel</a:t>
+            </a:r>
+            <a:endParaRPr lang="en-US" sz="1700" dirty="0"/>
+          </a:p>
+        </p:txBody>
+      </p:sp>
+      <p:sp>
+        <p:nvSpPr>
+          <p:cNvPr id="6" name="Text 4"/>
           <p:cNvSpPr txBox="1"/>
           <p:nvPr/>
         </p:nvSpPr>
         <p:spPr>
           <a:xfrm>
-            <a:off x="8183880" y="1783080"/>
-            <a:ext cx="3291840" cy="685800"/>
-          </a:xfrm>
-          <a:prstGeom prst="rect">
-            <a:avLst/>
-          </a:prstGeom>
-          <a:noFill/>
-          <a:ln/>
-        </p:spPr>
-        <p:txBody>
-          <a:bodyPr wrap="square" lIns="0" tIns="0" rIns="0" bIns="0" rtlCol="0" anchor="t"/>
+            <a:off x="1097280" y="2377440"/>
+            <a:ext cx="2788920" cy="685800"/>
+          </a:xfrm>
+          <a:prstGeom prst="rect">
+            <a:avLst/>
+          </a:prstGeom>
+          <a:noFill/>
+          <a:ln/>
+        </p:spPr>
+        <p:txBody>
+          <a:bodyPr wrap="square" lIns="1016" tIns="1016" rIns="1016" bIns="1016" rtlCol="0" anchor="t"/>
           <a:lstStyle/>
           <a:p>
             <a:pPr algn="l" indent="0" marL="0">
               <a:buNone/>
             </a:pPr>
             <a:r>
-              <a:rPr lang="en-US" sz="1600" b="1" dirty="0">
-                <a:solidFill>
-                  <a:schemeClr val="tx1"/>
-                </a:solidFill>
-              </a:rPr>
-              <a:t>Checklist KYC et seuils</a:t>
-            </a:r>
-            <a:endParaRPr lang="en-US" sz="1600" dirty="0"/>
-          </a:p>
-        </p:txBody>
-      </p:sp>
-      <p:sp>
-        <p:nvSpPr>
-          <p:cNvPr id="12" name="dec-3"/>
+              <a:rPr lang="en-US" sz="1300" dirty="0">
+                <a:solidFill>
+                  <a:schemeClr val="tx2"/>
+                </a:solidFill>
+              </a:rPr>
+              <a:t>Code de référence et tests</a:t>
+            </a:r>
+            <a:endParaRPr lang="en-US" sz="1300" dirty="0"/>
+          </a:p>
+        </p:txBody>
+      </p:sp>
+      <p:sp>
+        <p:nvSpPr>
+          <p:cNvPr id="7" name="spec-1"/>
           <p:cNvSpPr/>
           <p:nvPr/>
         </p:nvSpPr>
         <p:spPr>
           <a:xfrm>
-            <a:off x="457200" y="2788920"/>
-            <a:ext cx="3566160" cy="1234440"/>
+            <a:off x="4251960" y="1325880"/>
+            <a:ext cx="3566160" cy="1874520"/>
           </a:xfrm>
           <a:prstGeom prst="roundRect">
             <a:avLst>
-              <a:gd name="adj" fmla="val 5926"/>
+              <a:gd name="adj" fmla="val 3902"/>
             </a:avLst>
           </a:prstGeom>
           <a:solidFill>
-            <a:schemeClr val="accent1">
-              <a:alpha val="8000"/>
-            </a:schemeClr>
+            <a:schemeClr val="bg2"/>
           </a:solidFill>
           <a:ln w="9525">
             <a:solidFill>
@@ -12728,96 +14420,119 @@
       </p:sp>
       <p:sp>
         <p:nvSpPr>
-          <p:cNvPr id="13" name="Text 11"/>
+          <p:cNvPr id="8" name="specdot-1"/>
+          <p:cNvSpPr/>
+          <p:nvPr/>
+        </p:nvSpPr>
+        <p:spPr>
+          <a:xfrm>
+            <a:off x="4480560" y="1600200"/>
+            <a:ext cx="292608" cy="292608"/>
+          </a:xfrm>
+          <a:prstGeom prst="ellipse">
+            <a:avLst/>
+          </a:prstGeom>
+          <a:solidFill>
+            <a:schemeClr val="accent5"/>
+          </a:solidFill>
+          <a:ln w="12700">
+            <a:solidFill>
+              <a:schemeClr val="accent5"/>
+            </a:solidFill>
+            <a:prstDash val="solid"/>
+          </a:ln>
+        </p:spPr>
+      </p:sp>
+      <p:sp>
+        <p:nvSpPr>
+          <p:cNvPr id="9" name="Text 7"/>
           <p:cNvSpPr txBox="1"/>
           <p:nvPr/>
         </p:nvSpPr>
         <p:spPr>
           <a:xfrm>
-            <a:off x="594360" y="2898648"/>
-            <a:ext cx="3291840" cy="320040"/>
-          </a:xfrm>
-          <a:prstGeom prst="rect">
-            <a:avLst/>
-          </a:prstGeom>
-          <a:noFill/>
-          <a:ln/>
-        </p:spPr>
-        <p:txBody>
-          <a:bodyPr wrap="square" lIns="0" tIns="0" rIns="0" bIns="0" rtlCol="0" anchor="t"/>
+            <a:off x="4892040" y="1508760"/>
+            <a:ext cx="2788920" cy="822960"/>
+          </a:xfrm>
+          <a:prstGeom prst="rect">
+            <a:avLst/>
+          </a:prstGeom>
+          <a:noFill/>
+          <a:ln/>
+        </p:spPr>
+        <p:txBody>
+          <a:bodyPr wrap="square" lIns="1016" tIns="1016" rIns="1016" bIns="1016" rtlCol="0" anchor="t"/>
           <a:lstStyle/>
           <a:p>
             <a:pPr algn="l" indent="0" marL="0">
               <a:buNone/>
             </a:pPr>
             <a:r>
-              <a:rPr lang="en-US" sz="1100" b="1" dirty="0">
-                <a:solidFill>
-                  <a:schemeClr val="accent1"/>
-                </a:solidFill>
-              </a:rPr>
-              <a:t>JURIDIQUE</a:t>
-            </a:r>
-            <a:endParaRPr lang="en-US" sz="1100" dirty="0"/>
-          </a:p>
-        </p:txBody>
-      </p:sp>
-      <p:sp>
-        <p:nvSpPr>
-          <p:cNvPr id="14" name="Text 12"/>
+              <a:rPr lang="en-US" sz="1700" b="1" dirty="0">
+                <a:solidFill>
+                  <a:schemeClr val="tx1"/>
+                </a:solidFill>
+              </a:rPr>
+              <a:t>Lecture BigQuery</a:t>
+            </a:r>
+            <a:endParaRPr lang="en-US" sz="1700" dirty="0"/>
+          </a:p>
+        </p:txBody>
+      </p:sp>
+      <p:sp>
+        <p:nvSpPr>
+          <p:cNvPr id="10" name="Text 8"/>
           <p:cNvSpPr txBox="1"/>
           <p:nvPr/>
         </p:nvSpPr>
         <p:spPr>
           <a:xfrm>
-            <a:off x="594360" y="3246120"/>
-            <a:ext cx="3291840" cy="685800"/>
-          </a:xfrm>
-          <a:prstGeom prst="rect">
-            <a:avLst/>
-          </a:prstGeom>
-          <a:noFill/>
-          <a:ln/>
-        </p:spPr>
-        <p:txBody>
-          <a:bodyPr wrap="square" lIns="0" tIns="0" rIns="0" bIns="0" rtlCol="0" anchor="t"/>
+            <a:off x="4892040" y="2377440"/>
+            <a:ext cx="2788920" cy="685800"/>
+          </a:xfrm>
+          <a:prstGeom prst="rect">
+            <a:avLst/>
+          </a:prstGeom>
+          <a:noFill/>
+          <a:ln/>
+        </p:spPr>
+        <p:txBody>
+          <a:bodyPr wrap="square" lIns="1016" tIns="1016" rIns="1016" bIns="1016" rtlCol="0" anchor="t"/>
           <a:lstStyle/>
           <a:p>
             <a:pPr algn="l" indent="0" marL="0">
               <a:buNone/>
             </a:pPr>
             <a:r>
-              <a:rPr lang="en-US" sz="1600" b="1" dirty="0">
-                <a:solidFill>
-                  <a:schemeClr val="tx1"/>
-                </a:solidFill>
-              </a:rPr>
-              <a:t>Texte des conditions du portail</a:t>
-            </a:r>
-            <a:endParaRPr lang="en-US" sz="1600" dirty="0"/>
-          </a:p>
-        </p:txBody>
-      </p:sp>
-      <p:sp>
-        <p:nvSpPr>
-          <p:cNvPr id="15" name="dec-4"/>
+              <a:rPr lang="en-US" sz="1300" dirty="0">
+                <a:solidFill>
+                  <a:schemeClr val="tx2"/>
+                </a:solidFill>
+              </a:rPr>
+              <a:t>Testée sur émulateur, pas sur la vraie table</a:t>
+            </a:r>
+            <a:endParaRPr lang="en-US" sz="1300" dirty="0"/>
+          </a:p>
+        </p:txBody>
+      </p:sp>
+      <p:sp>
+        <p:nvSpPr>
+          <p:cNvPr id="11" name="spec-2"/>
           <p:cNvSpPr/>
           <p:nvPr/>
         </p:nvSpPr>
         <p:spPr>
           <a:xfrm>
-            <a:off x="4251960" y="2788920"/>
-            <a:ext cx="3566160" cy="1234440"/>
+            <a:off x="8046720" y="1325880"/>
+            <a:ext cx="3566160" cy="1874520"/>
           </a:xfrm>
           <a:prstGeom prst="roundRect">
             <a:avLst>
-              <a:gd name="adj" fmla="val 5926"/>
+              <a:gd name="adj" fmla="val 3902"/>
             </a:avLst>
           </a:prstGeom>
           <a:solidFill>
-            <a:schemeClr val="accent1">
-              <a:alpha val="8000"/>
-            </a:schemeClr>
+            <a:schemeClr val="bg2"/>
           </a:solidFill>
           <a:ln w="9525">
             <a:solidFill>
@@ -12829,96 +14544,119 @@
       </p:sp>
       <p:sp>
         <p:nvSpPr>
-          <p:cNvPr id="16" name="Text 14"/>
+          <p:cNvPr id="12" name="specdot-2"/>
+          <p:cNvSpPr/>
+          <p:nvPr/>
+        </p:nvSpPr>
+        <p:spPr>
+          <a:xfrm>
+            <a:off x="8275320" y="1600200"/>
+            <a:ext cx="292608" cy="292608"/>
+          </a:xfrm>
+          <a:prstGeom prst="ellipse">
+            <a:avLst/>
+          </a:prstGeom>
+          <a:solidFill>
+            <a:schemeClr val="accent5"/>
+          </a:solidFill>
+          <a:ln w="12700">
+            <a:solidFill>
+              <a:schemeClr val="accent5"/>
+            </a:solidFill>
+            <a:prstDash val="solid"/>
+          </a:ln>
+        </p:spPr>
+      </p:sp>
+      <p:sp>
+        <p:nvSpPr>
+          <p:cNvPr id="13" name="Text 11"/>
           <p:cNvSpPr txBox="1"/>
           <p:nvPr/>
         </p:nvSpPr>
         <p:spPr>
           <a:xfrm>
-            <a:off x="4389120" y="2898648"/>
-            <a:ext cx="3291840" cy="320040"/>
-          </a:xfrm>
-          <a:prstGeom prst="rect">
-            <a:avLst/>
-          </a:prstGeom>
-          <a:noFill/>
-          <a:ln/>
-        </p:spPr>
-        <p:txBody>
-          <a:bodyPr wrap="square" lIns="0" tIns="0" rIns="0" bIns="0" rtlCol="0" anchor="t"/>
+            <a:off x="8686800" y="1508760"/>
+            <a:ext cx="2788920" cy="822960"/>
+          </a:xfrm>
+          <a:prstGeom prst="rect">
+            <a:avLst/>
+          </a:prstGeom>
+          <a:noFill/>
+          <a:ln/>
+        </p:spPr>
+        <p:txBody>
+          <a:bodyPr wrap="square" lIns="1016" tIns="1016" rIns="1016" bIns="1016" rtlCol="0" anchor="t"/>
           <a:lstStyle/>
           <a:p>
             <a:pPr algn="l" indent="0" marL="0">
               <a:buNone/>
             </a:pPr>
             <a:r>
-              <a:rPr lang="en-US" sz="1100" b="1" dirty="0">
-                <a:solidFill>
-                  <a:schemeClr val="accent1"/>
-                </a:solidFill>
-              </a:rPr>
-              <a:t>FINANCE</a:t>
-            </a:r>
-            <a:endParaRPr lang="en-US" sz="1100" dirty="0"/>
-          </a:p>
-        </p:txBody>
-      </p:sp>
-      <p:sp>
-        <p:nvSpPr>
-          <p:cNvPr id="17" name="Text 15"/>
+              <a:rPr lang="en-US" sz="1700" b="1" dirty="0">
+                <a:solidFill>
+                  <a:schemeClr val="tx1"/>
+                </a:solidFill>
+              </a:rPr>
+              <a:t>Rapprochement MCB</a:t>
+            </a:r>
+            <a:endParaRPr lang="en-US" sz="1700" dirty="0"/>
+          </a:p>
+        </p:txBody>
+      </p:sp>
+      <p:sp>
+        <p:nvSpPr>
+          <p:cNvPr id="14" name="Text 12"/>
           <p:cNvSpPr txBox="1"/>
           <p:nvPr/>
         </p:nvSpPr>
         <p:spPr>
           <a:xfrm>
-            <a:off x="4389120" y="3246120"/>
-            <a:ext cx="3291840" cy="685800"/>
-          </a:xfrm>
-          <a:prstGeom prst="rect">
-            <a:avLst/>
-          </a:prstGeom>
-          <a:noFill/>
-          <a:ln/>
-        </p:spPr>
-        <p:txBody>
-          <a:bodyPr wrap="square" lIns="0" tIns="0" rIns="0" bIns="0" rtlCol="0" anchor="t"/>
+            <a:off x="8686800" y="2377440"/>
+            <a:ext cx="2788920" cy="685800"/>
+          </a:xfrm>
+          <a:prstGeom prst="rect">
+            <a:avLst/>
+          </a:prstGeom>
+          <a:noFill/>
+          <a:ln/>
+        </p:spPr>
+        <p:txBody>
+          <a:bodyPr wrap="square" lIns="1016" tIns="1016" rIns="1016" bIns="1016" rtlCol="0" anchor="t"/>
           <a:lstStyle/>
           <a:p>
             <a:pPr algn="l" indent="0" marL="0">
               <a:buNone/>
             </a:pPr>
             <a:r>
-              <a:rPr lang="en-US" sz="1600" b="1" dirty="0">
-                <a:solidFill>
-                  <a:schemeClr val="tx1"/>
-                </a:solidFill>
-              </a:rPr>
-              <a:t>Points ouverts du reporting</a:t>
-            </a:r>
-            <a:endParaRPr lang="en-US" sz="1600" dirty="0"/>
-          </a:p>
-        </p:txBody>
-      </p:sp>
-      <p:sp>
-        <p:nvSpPr>
-          <p:cNvPr id="18" name="dec-5"/>
+              <a:rPr lang="en-US" sz="1300" dirty="0">
+                <a:solidFill>
+                  <a:schemeClr val="tx2"/>
+                </a:solidFill>
+              </a:rPr>
+              <a:t>Testé sur fichiers synthétiques</a:t>
+            </a:r>
+            <a:endParaRPr lang="en-US" sz="1300" dirty="0"/>
+          </a:p>
+        </p:txBody>
+      </p:sp>
+      <p:sp>
+        <p:nvSpPr>
+          <p:cNvPr id="15" name="spec-3"/>
           <p:cNvSpPr/>
           <p:nvPr/>
         </p:nvSpPr>
         <p:spPr>
           <a:xfrm>
-            <a:off x="8046720" y="2788920"/>
-            <a:ext cx="3566160" cy="1234440"/>
+            <a:off x="457200" y="3474720"/>
+            <a:ext cx="3566160" cy="1874520"/>
           </a:xfrm>
           <a:prstGeom prst="roundRect">
             <a:avLst>
-              <a:gd name="adj" fmla="val 5926"/>
+              <a:gd name="adj" fmla="val 3902"/>
             </a:avLst>
           </a:prstGeom>
           <a:solidFill>
-            <a:schemeClr val="accent1">
-              <a:alpha val="8000"/>
-            </a:schemeClr>
+            <a:schemeClr val="bg2"/>
           </a:solidFill>
           <a:ln w="9525">
             <a:solidFill>
@@ -12930,96 +14668,119 @@
       </p:sp>
       <p:sp>
         <p:nvSpPr>
-          <p:cNvPr id="19" name="Text 17"/>
+          <p:cNvPr id="16" name="specdot-3"/>
+          <p:cNvSpPr/>
+          <p:nvPr/>
+        </p:nvSpPr>
+        <p:spPr>
+          <a:xfrm>
+            <a:off x="685800" y="3749040"/>
+            <a:ext cx="292608" cy="292608"/>
+          </a:xfrm>
+          <a:prstGeom prst="ellipse">
+            <a:avLst/>
+          </a:prstGeom>
+          <a:solidFill>
+            <a:schemeClr val="accent4"/>
+          </a:solidFill>
+          <a:ln w="12700">
+            <a:solidFill>
+              <a:schemeClr val="accent4"/>
+            </a:solidFill>
+            <a:prstDash val="solid"/>
+          </a:ln>
+        </p:spPr>
+      </p:sp>
+      <p:sp>
+        <p:nvSpPr>
+          <p:cNvPr id="17" name="Text 15"/>
           <p:cNvSpPr txBox="1"/>
           <p:nvPr/>
         </p:nvSpPr>
         <p:spPr>
           <a:xfrm>
-            <a:off x="8183880" y="2898648"/>
-            <a:ext cx="3291840" cy="320040"/>
-          </a:xfrm>
-          <a:prstGeom prst="rect">
-            <a:avLst/>
-          </a:prstGeom>
-          <a:noFill/>
-          <a:ln/>
-        </p:spPr>
-        <p:txBody>
-          <a:bodyPr wrap="square" lIns="0" tIns="0" rIns="0" bIns="0" rtlCol="0" anchor="t"/>
+            <a:off x="1097280" y="3657600"/>
+            <a:ext cx="2788920" cy="822960"/>
+          </a:xfrm>
+          <a:prstGeom prst="rect">
+            <a:avLst/>
+          </a:prstGeom>
+          <a:noFill/>
+          <a:ln/>
+        </p:spPr>
+        <p:txBody>
+          <a:bodyPr wrap="square" lIns="1016" tIns="1016" rIns="1016" bIns="1016" rtlCol="0" anchor="t"/>
           <a:lstStyle/>
           <a:p>
             <a:pPr algn="l" indent="0" marL="0">
               <a:buNone/>
             </a:pPr>
             <a:r>
-              <a:rPr lang="en-US" sz="1100" b="1" dirty="0">
-                <a:solidFill>
-                  <a:schemeClr val="accent1"/>
-                </a:solidFill>
-              </a:rPr>
-              <a:t>FINANCE</a:t>
-            </a:r>
-            <a:endParaRPr lang="en-US" sz="1100" dirty="0"/>
-          </a:p>
-        </p:txBody>
-      </p:sp>
-      <p:sp>
-        <p:nvSpPr>
-          <p:cNvPr id="20" name="Text 18"/>
+              <a:rPr lang="en-US" sz="1700" b="1" dirty="0">
+                <a:solidFill>
+                  <a:schemeClr val="tx1"/>
+                </a:solidFill>
+              </a:rPr>
+              <a:t>Onboarding KYC</a:t>
+            </a:r>
+            <a:endParaRPr lang="en-US" sz="1700" dirty="0"/>
+          </a:p>
+        </p:txBody>
+      </p:sp>
+      <p:sp>
+        <p:nvSpPr>
+          <p:cNvPr id="18" name="Text 16"/>
           <p:cNvSpPr txBox="1"/>
           <p:nvPr/>
         </p:nvSpPr>
         <p:spPr>
           <a:xfrm>
-            <a:off x="8183880" y="3246120"/>
-            <a:ext cx="3291840" cy="685800"/>
-          </a:xfrm>
-          <a:prstGeom prst="rect">
-            <a:avLst/>
-          </a:prstGeom>
-          <a:noFill/>
-          <a:ln/>
-        </p:spPr>
-        <p:txBody>
-          <a:bodyPr wrap="square" lIns="0" tIns="0" rIns="0" bIns="0" rtlCol="0" anchor="t"/>
+            <a:off x="1097280" y="4526280"/>
+            <a:ext cx="2788920" cy="685800"/>
+          </a:xfrm>
+          <a:prstGeom prst="rect">
+            <a:avLst/>
+          </a:prstGeom>
+          <a:noFill/>
+          <a:ln/>
+        </p:spPr>
+        <p:txBody>
+          <a:bodyPr wrap="square" lIns="1016" tIns="1016" rIns="1016" bIns="1016" rtlCol="0" anchor="t"/>
           <a:lstStyle/>
           <a:p>
             <a:pPr algn="l" indent="0" marL="0">
               <a:buNone/>
             </a:pPr>
             <a:r>
-              <a:rPr lang="en-US" sz="1600" b="1" dirty="0">
-                <a:solidFill>
-                  <a:schemeClr val="tx1"/>
-                </a:solidFill>
-              </a:rPr>
-              <a:t>Flux des wallets et virements</a:t>
-            </a:r>
-            <a:endParaRPr lang="en-US" sz="1600" dirty="0"/>
-          </a:p>
-        </p:txBody>
-      </p:sp>
-      <p:sp>
-        <p:nvSpPr>
-          <p:cNvPr id="21" name="dec-6"/>
+              <a:rPr lang="en-US" sz="1300" dirty="0">
+                <a:solidFill>
+                  <a:schemeClr val="tx2"/>
+                </a:solidFill>
+              </a:rPr>
+              <a:t>18 tests de recette</a:t>
+            </a:r>
+            <a:endParaRPr lang="en-US" sz="1300" dirty="0"/>
+          </a:p>
+        </p:txBody>
+      </p:sp>
+      <p:sp>
+        <p:nvSpPr>
+          <p:cNvPr id="19" name="spec-4"/>
           <p:cNvSpPr/>
           <p:nvPr/>
         </p:nvSpPr>
         <p:spPr>
           <a:xfrm>
-            <a:off x="457200" y="4251960"/>
-            <a:ext cx="3566160" cy="1234440"/>
+            <a:off x="4251960" y="3474720"/>
+            <a:ext cx="3566160" cy="1874520"/>
           </a:xfrm>
           <a:prstGeom prst="roundRect">
             <a:avLst>
-              <a:gd name="adj" fmla="val 5926"/>
+              <a:gd name="adj" fmla="val 3902"/>
             </a:avLst>
           </a:prstGeom>
           <a:solidFill>
-            <a:schemeClr val="accent1">
-              <a:alpha val="8000"/>
-            </a:schemeClr>
+            <a:schemeClr val="bg2"/>
           </a:solidFill>
           <a:ln w="9525">
             <a:solidFill>
@@ -13031,96 +14792,119 @@
       </p:sp>
       <p:sp>
         <p:nvSpPr>
+          <p:cNvPr id="20" name="specdot-4"/>
+          <p:cNvSpPr/>
+          <p:nvPr/>
+        </p:nvSpPr>
+        <p:spPr>
+          <a:xfrm>
+            <a:off x="4480560" y="3749040"/>
+            <a:ext cx="292608" cy="292608"/>
+          </a:xfrm>
+          <a:prstGeom prst="ellipse">
+            <a:avLst/>
+          </a:prstGeom>
+          <a:solidFill>
+            <a:schemeClr val="accent4"/>
+          </a:solidFill>
+          <a:ln w="12700">
+            <a:solidFill>
+              <a:schemeClr val="accent4"/>
+            </a:solidFill>
+            <a:prstDash val="solid"/>
+          </a:ln>
+        </p:spPr>
+      </p:sp>
+      <p:sp>
+        <p:nvSpPr>
+          <p:cNvPr id="21" name="Text 19"/>
+          <p:cNvSpPr txBox="1"/>
+          <p:nvPr/>
+        </p:nvSpPr>
+        <p:spPr>
+          <a:xfrm>
+            <a:off x="4892040" y="3657600"/>
+            <a:ext cx="2788920" cy="822960"/>
+          </a:xfrm>
+          <a:prstGeom prst="rect">
+            <a:avLst/>
+          </a:prstGeom>
+          <a:noFill/>
+          <a:ln/>
+        </p:spPr>
+        <p:txBody>
+          <a:bodyPr wrap="square" lIns="1016" tIns="1016" rIns="1016" bIns="1016" rtlCol="0" anchor="t"/>
+          <a:lstStyle/>
+          <a:p>
+            <a:pPr algn="l" indent="0" marL="0">
+              <a:buNone/>
+            </a:pPr>
+            <a:r>
+              <a:rPr lang="en-US" sz="1700" b="1" dirty="0">
+                <a:solidFill>
+                  <a:schemeClr val="tx1"/>
+                </a:solidFill>
+              </a:rPr>
+              <a:t>Portail marchand</a:t>
+            </a:r>
+            <a:endParaRPr lang="en-US" sz="1700" dirty="0"/>
+          </a:p>
+        </p:txBody>
+      </p:sp>
+      <p:sp>
+        <p:nvSpPr>
           <p:cNvPr id="22" name="Text 20"/>
           <p:cNvSpPr txBox="1"/>
           <p:nvPr/>
         </p:nvSpPr>
         <p:spPr>
           <a:xfrm>
-            <a:off x="594360" y="4361688"/>
-            <a:ext cx="3291840" cy="320040"/>
-          </a:xfrm>
-          <a:prstGeom prst="rect">
-            <a:avLst/>
-          </a:prstGeom>
-          <a:noFill/>
-          <a:ln/>
-        </p:spPr>
-        <p:txBody>
-          <a:bodyPr wrap="square" lIns="0" tIns="0" rIns="0" bIns="0" rtlCol="0" anchor="t"/>
+            <a:off x="4892040" y="4526280"/>
+            <a:ext cx="2788920" cy="685800"/>
+          </a:xfrm>
+          <a:prstGeom prst="rect">
+            <a:avLst/>
+          </a:prstGeom>
+          <a:noFill/>
+          <a:ln/>
+        </p:spPr>
+        <p:txBody>
+          <a:bodyPr wrap="square" lIns="1016" tIns="1016" rIns="1016" bIns="1016" rtlCol="0" anchor="t"/>
           <a:lstStyle/>
           <a:p>
             <a:pPr algn="l" indent="0" marL="0">
               <a:buNone/>
             </a:pPr>
             <a:r>
-              <a:rPr lang="en-US" sz="1100" b="1" dirty="0">
-                <a:solidFill>
-                  <a:schemeClr val="accent1"/>
-                </a:solidFill>
-              </a:rPr>
-              <a:t>IT</a:t>
-            </a:r>
-            <a:endParaRPr lang="en-US" sz="1100" dirty="0"/>
-          </a:p>
-        </p:txBody>
-      </p:sp>
-      <p:sp>
-        <p:nvSpPr>
-          <p:cNvPr id="23" name="Text 21"/>
-          <p:cNvSpPr txBox="1"/>
-          <p:nvPr/>
-        </p:nvSpPr>
-        <p:spPr>
-          <a:xfrm>
-            <a:off x="594360" y="4709160"/>
-            <a:ext cx="3291840" cy="685800"/>
-          </a:xfrm>
-          <a:prstGeom prst="rect">
-            <a:avLst/>
-          </a:prstGeom>
-          <a:noFill/>
-          <a:ln/>
-        </p:spPr>
-        <p:txBody>
-          <a:bodyPr wrap="square" lIns="0" tIns="0" rIns="0" bIns="0" rtlCol="0" anchor="t"/>
-          <a:lstStyle/>
-          <a:p>
-            <a:pPr algn="l" indent="0" marL="0">
-              <a:buNone/>
-            </a:pPr>
-            <a:r>
-              <a:rPr lang="en-US" sz="1600" b="1" dirty="0">
-                <a:solidFill>
-                  <a:schemeClr val="tx1"/>
-                </a:solidFill>
-              </a:rPr>
-              <a:t>Antivirus des pièces</a:t>
-            </a:r>
-            <a:endParaRPr lang="en-US" sz="1600" dirty="0"/>
-          </a:p>
-        </p:txBody>
-      </p:sp>
-      <p:sp>
-        <p:nvSpPr>
-          <p:cNvPr id="24" name="dec-7"/>
+              <a:rPr lang="en-US" sz="1300" dirty="0">
+                <a:solidFill>
+                  <a:schemeClr val="tx2"/>
+                </a:solidFill>
+              </a:rPr>
+              <a:t>29 tests de recette, 113 vérifications</a:t>
+            </a:r>
+            <a:endParaRPr lang="en-US" sz="1300" dirty="0"/>
+          </a:p>
+        </p:txBody>
+      </p:sp>
+      <p:sp>
+        <p:nvSpPr>
+          <p:cNvPr id="23" name="spec-5"/>
           <p:cNvSpPr/>
           <p:nvPr/>
         </p:nvSpPr>
         <p:spPr>
           <a:xfrm>
-            <a:off x="4251960" y="4251960"/>
-            <a:ext cx="3566160" cy="1234440"/>
+            <a:off x="8046720" y="3474720"/>
+            <a:ext cx="3566160" cy="1874520"/>
           </a:xfrm>
           <a:prstGeom prst="roundRect">
             <a:avLst>
-              <a:gd name="adj" fmla="val 5926"/>
+              <a:gd name="adj" fmla="val 3902"/>
             </a:avLst>
           </a:prstGeom>
           <a:solidFill>
-            <a:schemeClr val="accent1">
-              <a:alpha val="8000"/>
-            </a:schemeClr>
+            <a:schemeClr val="bg2"/>
           </a:solidFill>
           <a:ln w="9525">
             <a:solidFill>
@@ -13132,100 +14916,24 @@
       </p:sp>
       <p:sp>
         <p:nvSpPr>
-          <p:cNvPr id="25" name="Text 23"/>
-          <p:cNvSpPr txBox="1"/>
-          <p:nvPr/>
-        </p:nvSpPr>
-        <p:spPr>
-          <a:xfrm>
-            <a:off x="4389120" y="4361688"/>
-            <a:ext cx="3291840" cy="320040"/>
-          </a:xfrm>
-          <a:prstGeom prst="rect">
-            <a:avLst/>
-          </a:prstGeom>
-          <a:noFill/>
-          <a:ln/>
-        </p:spPr>
-        <p:txBody>
-          <a:bodyPr wrap="square" lIns="0" tIns="0" rIns="0" bIns="0" rtlCol="0" anchor="t"/>
-          <a:lstStyle/>
-          <a:p>
-            <a:pPr algn="l" indent="0" marL="0">
-              <a:buNone/>
-            </a:pPr>
-            <a:r>
-              <a:rPr lang="en-US" sz="1100" b="1" dirty="0">
-                <a:solidFill>
-                  <a:schemeClr val="accent1"/>
-                </a:solidFill>
-              </a:rPr>
-              <a:t>CEO</a:t>
-            </a:r>
-            <a:endParaRPr lang="en-US" sz="1100" dirty="0"/>
-          </a:p>
-        </p:txBody>
-      </p:sp>
-      <p:sp>
-        <p:nvSpPr>
-          <p:cNvPr id="26" name="Text 24"/>
-          <p:cNvSpPr txBox="1"/>
-          <p:nvPr/>
-        </p:nvSpPr>
-        <p:spPr>
-          <a:xfrm>
-            <a:off x="4389120" y="4709160"/>
-            <a:ext cx="3291840" cy="685800"/>
-          </a:xfrm>
-          <a:prstGeom prst="rect">
-            <a:avLst/>
-          </a:prstGeom>
-          <a:noFill/>
-          <a:ln/>
-        </p:spPr>
-        <p:txBody>
-          <a:bodyPr wrap="square" lIns="0" tIns="0" rIns="0" bIns="0" rtlCol="0" anchor="t"/>
-          <a:lstStyle/>
-          <a:p>
-            <a:pPr algn="l" indent="0" marL="0">
-              <a:buNone/>
-            </a:pPr>
-            <a:r>
-              <a:rPr lang="en-US" sz="1600" b="1" dirty="0">
-                <a:solidFill>
-                  <a:schemeClr val="tx1"/>
-                </a:solidFill>
-              </a:rPr>
-              <a:t>Références MIPS INTERNATIONAL / FSC</a:t>
-            </a:r>
-            <a:endParaRPr lang="en-US" sz="1600" dirty="0"/>
-          </a:p>
-        </p:txBody>
-      </p:sp>
-      <p:sp>
-        <p:nvSpPr>
-          <p:cNvPr id="27" name="dec-8"/>
+          <p:cNvPr id="24" name="specdot-5"/>
           <p:cNvSpPr/>
           <p:nvPr/>
         </p:nvSpPr>
         <p:spPr>
           <a:xfrm>
-            <a:off x="8046720" y="4251960"/>
-            <a:ext cx="3566160" cy="1234440"/>
-          </a:xfrm>
-          <a:prstGeom prst="roundRect">
-            <a:avLst>
-              <a:gd name="adj" fmla="val 5926"/>
-            </a:avLst>
+            <a:off x="8275320" y="3749040"/>
+            <a:ext cx="292608" cy="292608"/>
+          </a:xfrm>
+          <a:prstGeom prst="ellipse">
+            <a:avLst/>
           </a:prstGeom>
           <a:solidFill>
-            <a:schemeClr val="accent1">
-              <a:alpha val="8000"/>
-            </a:schemeClr>
+            <a:schemeClr val="accent6"/>
           </a:solidFill>
-          <a:ln w="9525">
+          <a:ln w="12700">
             <a:solidFill>
-              <a:schemeClr val="bg2"/>
+              <a:schemeClr val="accent6"/>
             </a:solidFill>
             <a:prstDash val="solid"/>
           </a:ln>
@@ -13233,14 +14941,86 @@
       </p:sp>
       <p:sp>
         <p:nvSpPr>
-          <p:cNvPr id="28" name="Text 26"/>
+          <p:cNvPr id="25" name="Text 23"/>
           <p:cNvSpPr txBox="1"/>
           <p:nvPr/>
         </p:nvSpPr>
         <p:spPr>
           <a:xfrm>
-            <a:off x="8183880" y="4361688"/>
-            <a:ext cx="3291840" cy="320040"/>
+            <a:off x="8686800" y="3657600"/>
+            <a:ext cx="2788920" cy="822960"/>
+          </a:xfrm>
+          <a:prstGeom prst="rect">
+            <a:avLst/>
+          </a:prstGeom>
+          <a:noFill/>
+          <a:ln/>
+        </p:spPr>
+        <p:txBody>
+          <a:bodyPr wrap="square" lIns="1016" tIns="1016" rIns="1016" bIns="1016" rtlCol="0" anchor="t"/>
+          <a:lstStyle/>
+          <a:p>
+            <a:pPr algn="l" indent="0" marL="0">
+              <a:buNone/>
+            </a:pPr>
+            <a:r>
+              <a:rPr lang="en-US" sz="1700" b="1" dirty="0">
+                <a:solidFill>
+                  <a:schemeClr val="tx1"/>
+                </a:solidFill>
+              </a:rPr>
+              <a:t>Réconciliation trust</a:t>
+            </a:r>
+            <a:endParaRPr lang="en-US" sz="1700" dirty="0"/>
+          </a:p>
+        </p:txBody>
+      </p:sp>
+      <p:sp>
+        <p:nvSpPr>
+          <p:cNvPr id="26" name="Text 24"/>
+          <p:cNvSpPr txBox="1"/>
+          <p:nvPr/>
+        </p:nvSpPr>
+        <p:spPr>
+          <a:xfrm>
+            <a:off x="8686800" y="4526280"/>
+            <a:ext cx="2788920" cy="685800"/>
+          </a:xfrm>
+          <a:prstGeom prst="rect">
+            <a:avLst/>
+          </a:prstGeom>
+          <a:noFill/>
+          <a:ln/>
+        </p:spPr>
+        <p:txBody>
+          <a:bodyPr wrap="square" lIns="1016" tIns="1016" rIns="1016" bIns="1016" rtlCol="0" anchor="t"/>
+          <a:lstStyle/>
+          <a:p>
+            <a:pPr algn="l" indent="0" marL="0">
+              <a:buNone/>
+            </a:pPr>
+            <a:r>
+              <a:rPr lang="en-US" sz="1300" dirty="0">
+                <a:solidFill>
+                  <a:schemeClr val="tx2"/>
+                </a:solidFill>
+              </a:rPr>
+              <a:t>Sans code : seulement en modèle B</a:t>
+            </a:r>
+            <a:endParaRPr lang="en-US" sz="1300" dirty="0"/>
+          </a:p>
+        </p:txBody>
+      </p:sp>
+      <p:sp>
+        <p:nvSpPr>
+          <p:cNvPr id="27" name="Text 25"/>
+          <p:cNvSpPr txBox="1"/>
+          <p:nvPr/>
+        </p:nvSpPr>
+        <p:spPr>
+          <a:xfrm>
+            <a:off x="457200" y="5760720"/>
+            <a:ext cx="11247120" cy="365760"/>
           </a:xfrm>
           <a:prstGeom prst="rect">
             <a:avLst/>
@@ -13256,84 +15036,12 @@
               <a:buNone/>
             </a:pPr>
             <a:r>
-              <a:rPr lang="en-US" sz="1100" b="1" dirty="0">
-                <a:solidFill>
-                  <a:schemeClr val="accent1"/>
-                </a:solidFill>
-              </a:rPr>
-              <a:t>IT</a:t>
-            </a:r>
-            <a:endParaRPr lang="en-US" sz="1100" dirty="0"/>
-          </a:p>
-        </p:txBody>
-      </p:sp>
-      <p:sp>
-        <p:nvSpPr>
-          <p:cNvPr id="29" name="Text 27"/>
-          <p:cNvSpPr txBox="1"/>
-          <p:nvPr/>
-        </p:nvSpPr>
-        <p:spPr>
-          <a:xfrm>
-            <a:off x="8183880" y="4709160"/>
-            <a:ext cx="3291840" cy="685800"/>
-          </a:xfrm>
-          <a:prstGeom prst="rect">
-            <a:avLst/>
-          </a:prstGeom>
-          <a:noFill/>
-          <a:ln/>
-        </p:spPr>
-        <p:txBody>
-          <a:bodyPr wrap="square" lIns="0" tIns="0" rIns="0" bIns="0" rtlCol="0" anchor="t"/>
-          <a:lstStyle/>
-          <a:p>
-            <a:pPr algn="l" indent="0" marL="0">
-              <a:buNone/>
-            </a:pPr>
-            <a:r>
-              <a:rPr lang="en-US" sz="1600" b="1" dirty="0">
-                <a:solidFill>
-                  <a:schemeClr val="tx1"/>
-                </a:solidFill>
-              </a:rPr>
-              <a:t>Validation sur données réelles</a:t>
-            </a:r>
-            <a:endParaRPr lang="en-US" sz="1600" dirty="0"/>
-          </a:p>
-        </p:txBody>
-      </p:sp>
-      <p:sp>
-        <p:nvSpPr>
-          <p:cNvPr id="30" name="Text 28"/>
-          <p:cNvSpPr txBox="1"/>
-          <p:nvPr/>
-        </p:nvSpPr>
-        <p:spPr>
-          <a:xfrm>
-            <a:off x="457200" y="5806440"/>
-            <a:ext cx="11247120" cy="365760"/>
-          </a:xfrm>
-          <a:prstGeom prst="rect">
-            <a:avLst/>
-          </a:prstGeom>
-          <a:noFill/>
-          <a:ln/>
-        </p:spPr>
-        <p:txBody>
-          <a:bodyPr wrap="square" lIns="0" tIns="0" rIns="0" bIns="0" rtlCol="0" anchor="t"/>
-          <a:lstStyle/>
-          <a:p>
-            <a:pPr algn="l" indent="0" marL="0">
-              <a:buNone/>
-            </a:pPr>
-            <a:r>
               <a:rPr lang="en-US" sz="1300" i="1" dirty="0">
                 <a:solidFill>
                   <a:schemeClr val="tx2"/>
                 </a:solidFill>
               </a:rPr>
-              <a:t>Les deux décisions en rouge conditionnent le module trust et ce qui est promis à la Banque de Maurice.</a:t>
+              <a:t>Dans outputs/dev-handover/ du dépôt. Vert : prête · ambre : à valider sur données réelles · rouge : en attente d'une décision.</a:t>
             </a:r>
             <a:endParaRPr lang="en-US" sz="1300" dirty="0"/>
           </a:p>

--- a/outputs/recap/MIPS-recapitulatif.pptx
+++ b/outputs/recap/MIPS-recapitulatif.pptx
@@ -117,31 +117,31 @@
   <p:extLst>
     <p:ext uri="{521415D9-36F7-43E2-AB2F-B90AF26B5E84}">
       <p14:sectionLst xmlns:p14="http://schemas.microsoft.com/office/powerpoint/2010/main">
-        <p14:section name="Introduction" id="{ece87b05-b02d-5ae1-b8af-44a67482a9ee}">
+        <p14:section name="Introduction" id="{3d84282c-dd2e-e9be-fce3-e9d442f89700}">
           <p14:sldIdLst>
             <p14:sldId id="256"/>
             <p14:sldId id="257"/>
           </p14:sldIdLst>
         </p14:section>
-        <p14:section name="La plateforme" id="{985fdb88-eae9-439e-f75a-0816f97f723b}">
+        <p14:section name="La plateforme" id="{efb57f8e-6cc1-8ff7-3425-58634588c188}">
           <p14:sldIdLst>
             <p14:sldId id="258"/>
             <p14:sldId id="259"/>
             <p14:sldId id="260"/>
           </p14:sldIdLst>
         </p14:section>
-        <p14:section name="Fonds et BoM" id="{952aecd4-db84-2a36-9935-68b0dd1ffdd8}">
+        <p14:section name="Fonds et BoM" id="{c1743b85-26b9-d5be-33fa-3179219594b7}">
           <p14:sldIdLst>
             <p14:sldId id="261"/>
             <p14:sldId id="262"/>
           </p14:sldIdLst>
         </p14:section>
-        <p14:section name="Qualité" id="{7e17528f-4448-9893-0aca-bacb74271b9e}">
+        <p14:section name="Qualité" id="{1e843aba-b6d4-83a7-4911-0cb724480f3c}">
           <p14:sldIdLst>
             <p14:sldId id="263"/>
           </p14:sldIdLst>
         </p14:section>
-        <p14:section name="Suite" id="{94b78ed5-7f83-e59d-1ddc-cfd43b642064}">
+        <p14:section name="Suite" id="{4c63805f-e60b-f9da-d56f-b0b9b6b880cf}">
           <p14:sldIdLst>
             <p14:sldId id="264"/>
             <p14:sldId id="265"/>
@@ -816,7 +816,7 @@
           <a:p>
             <a:r>
               <a:rPr lang="en-US" dirty="0"/>
-              <a:t>Trois messages : ce qui est construit, ce que ça prouve pour la BoM, et les deux décisions qui bloquent. Les 478 vérifications couvrent les neuf modules, sur des données fictives uniquement.</a:t>
+              <a:t>Trois messages : ce qui est construit, ce que ça prouve pour la BoM, et les deux décisions qui bloquent. Les 579 vérifications couvrent les neuf modules, sur des données fictives uniquement.</a:t>
             </a:r>
             <a:endParaRPr lang="en-US" dirty="0"/>
           </a:p>
@@ -1344,7 +1344,7 @@
           <a:p>
             <a:r>
               <a:rPr lang="en-US" dirty="0"/>
-              <a:t>Les tests tournent avec une seule commande : tests/run_tests.sh. Ils prouvent que le code applique les règles figées, pas que ces règles sont les bonnes pour MIPS. Les deux failles corrigées sont dans la PR #10.</a:t>
+              <a:t>Les tests tournent avec une seule commande : tests/run_tests.sh. Ils prouvent que le code applique les règles figées, pas que ces règles sont les bonnes pour MIPS. Les trois failles corrigées sont dans la PR #10.</a:t>
             </a:r>
             <a:endParaRPr lang="en-US" dirty="0"/>
           </a:p>
@@ -3836,7 +3836,7 @@
                 <a:ea typeface="Cambria" pitchFamily="34" charset="-122"/>
                 <a:cs typeface="Cambria" pitchFamily="34" charset="-120"/>
               </a:rPr>
-              <a:t>478</a:t>
+              <a:t>579</a:t>
             </a:r>
             <a:endParaRPr lang="en-US" sz="5400" dirty="0"/>
           </a:p>
@@ -3886,7 +3886,7 @@
                   <a:schemeClr val="tx2"/>
                 </a:solidFill>
               </a:rPr>
-              <a:t>sur 8 suites</a:t>
+              <a:t>sur 10 suites</a:t>
             </a:r>
             <a:endParaRPr lang="en-US" sz="1400" dirty="0"/>
           </a:p>
@@ -12647,7 +12647,7 @@
                   <a:schemeClr val="tx1"/>
                 </a:solidFill>
               </a:rPr>
-              <a:t>478 vérifications automatiques ont déjà corrigé deux failles</a:t>
+              <a:t>579 vérifications automatiques ont déjà corrigé trois failles</a:t>
             </a:r>
             <a:endParaRPr lang="en-US" sz="3000" dirty="0"/>
           </a:p>
@@ -12679,7 +12679,7 @@
                 <a:gridCol w="2834640"/>
                 <a:gridCol w="1371600"/>
               </a:tblGrid>
-              <a:tr h="411480">
+              <a:tr h="365760">
                 <a:tc>
                   <a:txBody>
                     <a:bodyPr/>
@@ -12803,7 +12803,7 @@
                   </a:tcPr>
                 </a:tc>
               </a:tr>
-              <a:tr h="411480">
+              <a:tr h="365760">
                 <a:tc>
                   <a:txBody>
                     <a:bodyPr/>
@@ -12921,7 +12921,7 @@
                   </a:tcPr>
                 </a:tc>
               </a:tr>
-              <a:tr h="411480">
+              <a:tr h="365760">
                 <a:tc>
                   <a:txBody>
                     <a:bodyPr/>
@@ -13039,7 +13039,125 @@
                   </a:tcPr>
                 </a:tc>
               </a:tr>
-              <a:tr h="411480">
+              <a:tr h="365760">
+                <a:tc>
+                  <a:txBody>
+                    <a:bodyPr/>
+                    <a:lstStyle/>
+                    <a:p>
+                      <a:pPr indent="0" marL="0">
+                        <a:buNone/>
+                      </a:pPr>
+                      <a:r>
+                        <a:rPr lang="en-US" sz="1300" dirty="0">
+                          <a:solidFill>
+                            <a:schemeClr val="tx1"/>
+                          </a:solidFill>
+                        </a:rPr>
+                        <a:t>Approbation KYC</a:t>
+                      </a:r>
+                      <a:endParaRPr lang="en-US" sz="1300" dirty="0"/>
+                    </a:p>
+                  </a:txBody>
+                  <a:tcPr marL="54864" marR="54864" marT="54864" marB="54864" anchor="ctr">
+                    <a:lnL w="6350" cap="flat" cmpd="sng" algn="ctr">
+                      <a:solidFill>
+                        <a:srgbClr val="D5DDE7"/>
+                      </a:solidFill>
+                      <a:prstDash val="solid"/>
+                      <a:round/>
+                      <a:headEnd type="none" w="med" len="med"/>
+                      <a:tailEnd type="none" w="med" len="med"/>
+                    </a:lnL>
+                    <a:lnR w="6350" cap="flat" cmpd="sng" algn="ctr">
+                      <a:solidFill>
+                        <a:srgbClr val="D5DDE7"/>
+                      </a:solidFill>
+                      <a:prstDash val="solid"/>
+                      <a:round/>
+                      <a:headEnd type="none" w="med" len="med"/>
+                      <a:tailEnd type="none" w="med" len="med"/>
+                    </a:lnR>
+                    <a:lnT w="6350" cap="flat" cmpd="sng" algn="ctr">
+                      <a:solidFill>
+                        <a:srgbClr val="D5DDE7"/>
+                      </a:solidFill>
+                      <a:prstDash val="solid"/>
+                      <a:round/>
+                      <a:headEnd type="none" w="med" len="med"/>
+                      <a:tailEnd type="none" w="med" len="med"/>
+                    </a:lnT>
+                    <a:lnB w="6350" cap="flat" cmpd="sng" algn="ctr">
+                      <a:solidFill>
+                        <a:srgbClr val="D5DDE7"/>
+                      </a:solidFill>
+                      <a:prstDash val="solid"/>
+                      <a:round/>
+                      <a:headEnd type="none" w="med" len="med"/>
+                      <a:tailEnd type="none" w="med" len="med"/>
+                    </a:lnB>
+                  </a:tcPr>
+                </a:tc>
+                <a:tc>
+                  <a:txBody>
+                    <a:bodyPr/>
+                    <a:lstStyle/>
+                    <a:p>
+                      <a:pPr algn="r" indent="0" marL="0">
+                        <a:buNone/>
+                      </a:pPr>
+                      <a:r>
+                        <a:rPr lang="en-US" sz="1300" dirty="0">
+                          <a:solidFill>
+                            <a:schemeClr val="tx1"/>
+                          </a:solidFill>
+                        </a:rPr>
+                        <a:t>78</a:t>
+                      </a:r>
+                      <a:endParaRPr lang="en-US" sz="1300" dirty="0"/>
+                    </a:p>
+                  </a:txBody>
+                  <a:tcPr marL="54864" marR="54864" marT="54864" marB="54864" anchor="ctr">
+                    <a:lnL w="6350" cap="flat" cmpd="sng" algn="ctr">
+                      <a:solidFill>
+                        <a:srgbClr val="D5DDE7"/>
+                      </a:solidFill>
+                      <a:prstDash val="solid"/>
+                      <a:round/>
+                      <a:headEnd type="none" w="med" len="med"/>
+                      <a:tailEnd type="none" w="med" len="med"/>
+                    </a:lnL>
+                    <a:lnR w="6350" cap="flat" cmpd="sng" algn="ctr">
+                      <a:solidFill>
+                        <a:srgbClr val="D5DDE7"/>
+                      </a:solidFill>
+                      <a:prstDash val="solid"/>
+                      <a:round/>
+                      <a:headEnd type="none" w="med" len="med"/>
+                      <a:tailEnd type="none" w="med" len="med"/>
+                    </a:lnR>
+                    <a:lnT w="6350" cap="flat" cmpd="sng" algn="ctr">
+                      <a:solidFill>
+                        <a:srgbClr val="D5DDE7"/>
+                      </a:solidFill>
+                      <a:prstDash val="solid"/>
+                      <a:round/>
+                      <a:headEnd type="none" w="med" len="med"/>
+                      <a:tailEnd type="none" w="med" len="med"/>
+                    </a:lnT>
+                    <a:lnB w="6350" cap="flat" cmpd="sng" algn="ctr">
+                      <a:solidFill>
+                        <a:srgbClr val="D5DDE7"/>
+                      </a:solidFill>
+                      <a:prstDash val="solid"/>
+                      <a:round/>
+                      <a:headEnd type="none" w="med" len="med"/>
+                      <a:tailEnd type="none" w="med" len="med"/>
+                    </a:lnB>
+                  </a:tcPr>
+                </a:tc>
+              </a:tr>
+              <a:tr h="365760">
                 <a:tc>
                   <a:txBody>
                     <a:bodyPr/>
@@ -13157,7 +13275,7 @@
                   </a:tcPr>
                 </a:tc>
               </a:tr>
-              <a:tr h="411480">
+              <a:tr h="365760">
                 <a:tc>
                   <a:txBody>
                     <a:bodyPr/>
@@ -13275,7 +13393,7 @@
                   </a:tcPr>
                 </a:tc>
               </a:tr>
-              <a:tr h="411480">
+              <a:tr h="365760">
                 <a:tc>
                   <a:txBody>
                     <a:bodyPr/>
@@ -13393,7 +13511,7 @@
                   </a:tcPr>
                 </a:tc>
               </a:tr>
-              <a:tr h="411480">
+              <a:tr h="365760">
                 <a:tc>
                   <a:txBody>
                     <a:bodyPr/>
@@ -13511,7 +13629,7 @@
                   </a:tcPr>
                 </a:tc>
               </a:tr>
-              <a:tr h="411480">
+              <a:tr h="365760">
                 <a:tc>
                   <a:txBody>
                     <a:bodyPr/>
@@ -13629,7 +13747,125 @@
                   </a:tcPr>
                 </a:tc>
               </a:tr>
-              <a:tr h="411480">
+              <a:tr h="365760">
+                <a:tc>
+                  <a:txBody>
+                    <a:bodyPr/>
+                    <a:lstStyle/>
+                    <a:p>
+                      <a:pPr indent="0" marL="0">
+                        <a:buNone/>
+                      </a:pPr>
+                      <a:r>
+                        <a:rPr lang="en-US" sz="1300" dirty="0">
+                          <a:solidFill>
+                            <a:schemeClr val="tx1"/>
+                          </a:solidFill>
+                        </a:rPr>
+                        <a:t>2FA obligatoire</a:t>
+                      </a:r>
+                      <a:endParaRPr lang="en-US" sz="1300" dirty="0"/>
+                    </a:p>
+                  </a:txBody>
+                  <a:tcPr marL="54864" marR="54864" marT="54864" marB="54864" anchor="ctr">
+                    <a:lnL w="6350" cap="flat" cmpd="sng" algn="ctr">
+                      <a:solidFill>
+                        <a:srgbClr val="D5DDE7"/>
+                      </a:solidFill>
+                      <a:prstDash val="solid"/>
+                      <a:round/>
+                      <a:headEnd type="none" w="med" len="med"/>
+                      <a:tailEnd type="none" w="med" len="med"/>
+                    </a:lnL>
+                    <a:lnR w="6350" cap="flat" cmpd="sng" algn="ctr">
+                      <a:solidFill>
+                        <a:srgbClr val="D5DDE7"/>
+                      </a:solidFill>
+                      <a:prstDash val="solid"/>
+                      <a:round/>
+                      <a:headEnd type="none" w="med" len="med"/>
+                      <a:tailEnd type="none" w="med" len="med"/>
+                    </a:lnR>
+                    <a:lnT w="6350" cap="flat" cmpd="sng" algn="ctr">
+                      <a:solidFill>
+                        <a:srgbClr val="D5DDE7"/>
+                      </a:solidFill>
+                      <a:prstDash val="solid"/>
+                      <a:round/>
+                      <a:headEnd type="none" w="med" len="med"/>
+                      <a:tailEnd type="none" w="med" len="med"/>
+                    </a:lnT>
+                    <a:lnB w="6350" cap="flat" cmpd="sng" algn="ctr">
+                      <a:solidFill>
+                        <a:srgbClr val="D5DDE7"/>
+                      </a:solidFill>
+                      <a:prstDash val="solid"/>
+                      <a:round/>
+                      <a:headEnd type="none" w="med" len="med"/>
+                      <a:tailEnd type="none" w="med" len="med"/>
+                    </a:lnB>
+                  </a:tcPr>
+                </a:tc>
+                <a:tc>
+                  <a:txBody>
+                    <a:bodyPr/>
+                    <a:lstStyle/>
+                    <a:p>
+                      <a:pPr algn="r" indent="0" marL="0">
+                        <a:buNone/>
+                      </a:pPr>
+                      <a:r>
+                        <a:rPr lang="en-US" sz="1300" dirty="0">
+                          <a:solidFill>
+                            <a:schemeClr val="tx1"/>
+                          </a:solidFill>
+                        </a:rPr>
+                        <a:t>23</a:t>
+                      </a:r>
+                      <a:endParaRPr lang="en-US" sz="1300" dirty="0"/>
+                    </a:p>
+                  </a:txBody>
+                  <a:tcPr marL="54864" marR="54864" marT="54864" marB="54864" anchor="ctr">
+                    <a:lnL w="6350" cap="flat" cmpd="sng" algn="ctr">
+                      <a:solidFill>
+                        <a:srgbClr val="D5DDE7"/>
+                      </a:solidFill>
+                      <a:prstDash val="solid"/>
+                      <a:round/>
+                      <a:headEnd type="none" w="med" len="med"/>
+                      <a:tailEnd type="none" w="med" len="med"/>
+                    </a:lnL>
+                    <a:lnR w="6350" cap="flat" cmpd="sng" algn="ctr">
+                      <a:solidFill>
+                        <a:srgbClr val="D5DDE7"/>
+                      </a:solidFill>
+                      <a:prstDash val="solid"/>
+                      <a:round/>
+                      <a:headEnd type="none" w="med" len="med"/>
+                      <a:tailEnd type="none" w="med" len="med"/>
+                    </a:lnR>
+                    <a:lnT w="6350" cap="flat" cmpd="sng" algn="ctr">
+                      <a:solidFill>
+                        <a:srgbClr val="D5DDE7"/>
+                      </a:solidFill>
+                      <a:prstDash val="solid"/>
+                      <a:round/>
+                      <a:headEnd type="none" w="med" len="med"/>
+                      <a:tailEnd type="none" w="med" len="med"/>
+                    </a:lnT>
+                    <a:lnB w="6350" cap="flat" cmpd="sng" algn="ctr">
+                      <a:solidFill>
+                        <a:srgbClr val="D5DDE7"/>
+                      </a:solidFill>
+                      <a:prstDash val="solid"/>
+                      <a:round/>
+                      <a:headEnd type="none" w="med" len="med"/>
+                      <a:tailEnd type="none" w="med" len="med"/>
+                    </a:lnB>
+                  </a:tcPr>
+                </a:tc>
+              </a:tr>
+              <a:tr h="365760">
                 <a:tc>
                   <a:txBody>
                     <a:bodyPr/>
@@ -13759,8 +13995,8 @@
         </p:nvSpPr>
         <p:spPr>
           <a:xfrm>
-            <a:off x="457200" y="5074920"/>
-            <a:ext cx="4206240" cy="731520"/>
+            <a:off x="457200" y="5440680"/>
+            <a:ext cx="4206240" cy="640080"/>
           </a:xfrm>
           <a:prstGeom prst="rect">
             <a:avLst/>
@@ -13781,7 +14017,7 @@
                   <a:schemeClr val="tx2"/>
                 </a:solidFill>
               </a:rPr>
-              <a:t>Données fictives, montants attendus calculés à la main. Sept erreurs volontaires dans le code : toutes détectées.</a:t>
+              <a:t>Données fictives, montants attendus calculés à la main. Treize erreurs volontaires dans le code : toutes détectées.</a:t>
             </a:r>
             <a:endParaRPr lang="en-US" sz="1200" dirty="0"/>
           </a:p>
@@ -13796,11 +14032,11 @@
         <p:spPr>
           <a:xfrm>
             <a:off x="5120640" y="1234440"/>
-            <a:ext cx="6583680" cy="1325880"/>
+            <a:ext cx="6583680" cy="1078992"/>
           </a:xfrm>
           <a:prstGeom prst="roundRect">
             <a:avLst>
-              <a:gd name="adj" fmla="val 5517"/>
+              <a:gd name="adj" fmla="val 6780"/>
             </a:avLst>
           </a:prstGeom>
           <a:solidFill>
@@ -13883,8 +14119,8 @@
         </p:nvSpPr>
         <p:spPr>
           <a:xfrm>
-            <a:off x="5715000" y="1764792"/>
-            <a:ext cx="5852160" cy="731520"/>
+            <a:off x="5715000" y="1709928"/>
+            <a:ext cx="5852160" cy="566928"/>
           </a:xfrm>
           <a:prstGeom prst="rect">
             <a:avLst/>
@@ -13900,14 +14136,14 @@
               <a:buNone/>
             </a:pPr>
             <a:r>
-              <a:rPr lang="en-US" sz="1300" dirty="0">
+              <a:rPr lang="en-US" sz="1200" dirty="0">
                 <a:solidFill>
                   <a:schemeClr val="tx2"/>
                 </a:solidFill>
               </a:rPr>
               <a:t>Cinq échecs depuis une adresse bloquaient tout le bureau. Désormais par compte ; une adresse seulement au-delà de 50 échecs.</a:t>
             </a:r>
-            <a:endParaRPr lang="en-US" sz="1300" dirty="0"/>
+            <a:endParaRPr lang="en-US" sz="1200" dirty="0"/>
           </a:p>
         </p:txBody>
       </p:sp>
@@ -13919,12 +14155,12 @@
         </p:nvSpPr>
         <p:spPr>
           <a:xfrm>
-            <a:off x="5120640" y="2743200"/>
-            <a:ext cx="6583680" cy="1325880"/>
+            <a:off x="5120640" y="2423160"/>
+            <a:ext cx="6583680" cy="1078992"/>
           </a:xfrm>
           <a:prstGeom prst="roundRect">
             <a:avLst>
-              <a:gd name="adj" fmla="val 5517"/>
+              <a:gd name="adj" fmla="val 6780"/>
             </a:avLst>
           </a:prstGeom>
           <a:solidFill>
@@ -13946,7 +14182,7 @@
         </p:nvSpPr>
         <p:spPr>
           <a:xfrm>
-            <a:off x="5303520" y="2926080"/>
+            <a:off x="5303520" y="2606040"/>
             <a:ext cx="274320" cy="274320"/>
           </a:xfrm>
           <a:prstGeom prst="ellipse">
@@ -13971,7 +14207,7 @@
         </p:nvSpPr>
         <p:spPr>
           <a:xfrm>
-            <a:off x="5715000" y="2834640"/>
+            <a:off x="5715000" y="2514600"/>
             <a:ext cx="5852160" cy="411480"/>
           </a:xfrm>
           <a:prstGeom prst="rect">
@@ -14007,8 +14243,8 @@
         </p:nvSpPr>
         <p:spPr>
           <a:xfrm>
-            <a:off x="5715000" y="3273552"/>
-            <a:ext cx="5852160" cy="731520"/>
+            <a:off x="5715000" y="2898648"/>
+            <a:ext cx="5852160" cy="566928"/>
           </a:xfrm>
           <a:prstGeom prst="rect">
             <a:avLst/>
@@ -14024,14 +14260,14 @@
               <a:buNone/>
             </a:pPr>
             <a:r>
-              <a:rPr lang="en-US" sz="1300" dirty="0">
+              <a:rPr lang="en-US" sz="1200" dirty="0">
                 <a:solidFill>
                   <a:schemeClr val="tx2"/>
                 </a:solidFill>
               </a:rPr>
               <a:t>Deux changements dans la même seconde laissaient une session ouverte. Heure enregistrée à la microseconde.</a:t>
             </a:r>
-            <a:endParaRPr lang="en-US" sz="1300" dirty="0"/>
+            <a:endParaRPr lang="en-US" sz="1200" dirty="0"/>
           </a:p>
         </p:txBody>
       </p:sp>
@@ -14043,12 +14279,12 @@
         </p:nvSpPr>
         <p:spPr>
           <a:xfrm>
-            <a:off x="5120640" y="4251960"/>
-            <a:ext cx="6583680" cy="1325880"/>
+            <a:off x="5120640" y="3611880"/>
+            <a:ext cx="6583680" cy="1078992"/>
           </a:xfrm>
           <a:prstGeom prst="roundRect">
             <a:avLst>
-              <a:gd name="adj" fmla="val 5517"/>
+              <a:gd name="adj" fmla="val 6780"/>
             </a:avLst>
           </a:prstGeom>
           <a:solidFill>
@@ -14070,7 +14306,131 @@
         </p:nvSpPr>
         <p:spPr>
           <a:xfrm>
-            <a:off x="5303520" y="4434840"/>
+            <a:off x="5303520" y="3794760"/>
+            <a:ext cx="274320" cy="274320"/>
+          </a:xfrm>
+          <a:prstGeom prst="ellipse">
+            <a:avLst/>
+          </a:prstGeom>
+          <a:solidFill>
+            <a:schemeClr val="accent4"/>
+          </a:solidFill>
+          <a:ln w="12700">
+            <a:solidFill>
+              <a:schemeClr val="accent4"/>
+            </a:solidFill>
+            <a:prstDash val="solid"/>
+          </a:ln>
+        </p:spPr>
+      </p:sp>
+      <p:sp>
+        <p:nvSpPr>
+          <p:cNvPr id="15" name="Text 12"/>
+          <p:cNvSpPr txBox="1"/>
+          <p:nvPr/>
+        </p:nvSpPr>
+        <p:spPr>
+          <a:xfrm>
+            <a:off x="5715000" y="3703320"/>
+            <a:ext cx="5852160" cy="411480"/>
+          </a:xfrm>
+          <a:prstGeom prst="rect">
+            <a:avLst/>
+          </a:prstGeom>
+          <a:noFill/>
+          <a:ln/>
+        </p:spPr>
+        <p:txBody>
+          <a:bodyPr wrap="square" lIns="0" tIns="0" rIns="0" bIns="0" rtlCol="0" anchor="ctr"/>
+          <a:lstStyle/>
+          <a:p>
+            <a:pPr algn="l" indent="0" marL="0">
+              <a:buNone/>
+            </a:pPr>
+            <a:r>
+              <a:rPr lang="en-US" sz="1600" b="1" dirty="0">
+                <a:solidFill>
+                  <a:schemeClr val="tx1"/>
+                </a:solidFill>
+              </a:rPr>
+              <a:t>Double regard sur l'approbation KYC</a:t>
+            </a:r>
+            <a:endParaRPr lang="en-US" sz="1600" dirty="0"/>
+          </a:p>
+        </p:txBody>
+      </p:sp>
+      <p:sp>
+        <p:nvSpPr>
+          <p:cNvPr id="16" name="Text 13"/>
+          <p:cNvSpPr txBox="1"/>
+          <p:nvPr/>
+        </p:nvSpPr>
+        <p:spPr>
+          <a:xfrm>
+            <a:off x="5715000" y="4087368"/>
+            <a:ext cx="5852160" cy="566928"/>
+          </a:xfrm>
+          <a:prstGeom prst="rect">
+            <a:avLst/>
+          </a:prstGeom>
+          <a:noFill/>
+          <a:ln/>
+        </p:spPr>
+        <p:txBody>
+          <a:bodyPr wrap="square" lIns="0" tIns="0" rIns="0" bIns="0" rtlCol="0" anchor="t"/>
+          <a:lstStyle/>
+          <a:p>
+            <a:pPr algn="l" indent="0" marL="0">
+              <a:buNone/>
+            </a:pPr>
+            <a:r>
+              <a:rPr lang="en-US" sz="1200" dirty="0">
+                <a:solidFill>
+                  <a:schemeClr val="tx2"/>
+                </a:solidFill>
+              </a:rPr>
+              <a:t>Un analyste approbateur pouvait réassigner le dossier puis le trancher. Désormais exclu, comme tout ce qui a eu la main sur le dossier.</a:t>
+            </a:r>
+            <a:endParaRPr lang="en-US" sz="1200" dirty="0"/>
+          </a:p>
+        </p:txBody>
+      </p:sp>
+      <p:sp>
+        <p:nvSpPr>
+          <p:cNvPr id="17" name="fix-3"/>
+          <p:cNvSpPr/>
+          <p:nvPr/>
+        </p:nvSpPr>
+        <p:spPr>
+          <a:xfrm>
+            <a:off x="5120640" y="4800600"/>
+            <a:ext cx="6583680" cy="1078992"/>
+          </a:xfrm>
+          <a:prstGeom prst="roundRect">
+            <a:avLst>
+              <a:gd name="adj" fmla="val 6780"/>
+            </a:avLst>
+          </a:prstGeom>
+          <a:solidFill>
+            <a:schemeClr val="bg2"/>
+          </a:solidFill>
+          <a:ln w="9525">
+            <a:solidFill>
+              <a:schemeClr val="bg2"/>
+            </a:solidFill>
+            <a:prstDash val="solid"/>
+          </a:ln>
+        </p:spPr>
+      </p:sp>
+      <p:sp>
+        <p:nvSpPr>
+          <p:cNvPr id="18" name="fixdot-3"/>
+          <p:cNvSpPr/>
+          <p:nvPr/>
+        </p:nvSpPr>
+        <p:spPr>
+          <a:xfrm>
+            <a:off x="5303520" y="4983480"/>
             <a:ext cx="274320" cy="274320"/>
           </a:xfrm>
           <a:prstGeom prst="ellipse">
@@ -14089,13 +14449,13 @@
       </p:sp>
       <p:sp>
         <p:nvSpPr>
-          <p:cNvPr id="15" name="Text 12"/>
+          <p:cNvPr id="19" name="Text 16"/>
           <p:cNvSpPr txBox="1"/>
           <p:nvPr/>
         </p:nvSpPr>
         <p:spPr>
           <a:xfrm>
-            <a:off x="5715000" y="4343400"/>
+            <a:off x="5715000" y="4892040"/>
             <a:ext cx="5852160" cy="411480"/>
           </a:xfrm>
           <a:prstGeom prst="rect">
@@ -14125,14 +14485,14 @@
       </p:sp>
       <p:sp>
         <p:nvSpPr>
-          <p:cNvPr id="16" name="Text 13"/>
+          <p:cNvPr id="20" name="Text 17"/>
           <p:cNvSpPr txBox="1"/>
           <p:nvPr/>
         </p:nvSpPr>
         <p:spPr>
           <a:xfrm>
-            <a:off x="5715000" y="4782312"/>
-            <a:ext cx="5852160" cy="731520"/>
+            <a:off x="5715000" y="5276088"/>
+            <a:ext cx="5852160" cy="566928"/>
           </a:xfrm>
           <a:prstGeom prst="rect">
             <a:avLst/>
@@ -14148,14 +14508,14 @@
               <a:buNone/>
             </a:pPr>
             <a:r>
-              <a:rPr lang="en-US" sz="1300" dirty="0">
+              <a:rPr lang="en-US" sz="1200" dirty="0">
                 <a:solidFill>
                   <a:schemeClr val="tx2"/>
                 </a:solidFill>
               </a:rPr>
-              <a:t>Les règles métier (unité, remboursements, TVA), le vrai BigQuery, un vrai mois MCB, la 2FA obligatoire, les écrans.</a:t>
-            </a:r>
-            <a:endParaRPr lang="en-US" sz="1300" dirty="0"/>
+              <a:t>Les règles métier (unité, remboursements, TVA), le vrai BigQuery, un vrai mois MCB, les écrans.</a:t>
+            </a:r>
+            <a:endParaRPr lang="en-US" sz="1200" dirty="0"/>
           </a:p>
         </p:txBody>
       </p:sp>

--- a/outputs/recap/MIPS-recapitulatif.pptx
+++ b/outputs/recap/MIPS-recapitulatif.pptx
@@ -117,31 +117,31 @@
   <p:extLst>
     <p:ext uri="{521415D9-36F7-43E2-AB2F-B90AF26B5E84}">
       <p14:sectionLst xmlns:p14="http://schemas.microsoft.com/office/powerpoint/2010/main">
-        <p14:section name="Introduction" id="{3d84282c-dd2e-e9be-fce3-e9d442f89700}">
+        <p14:section name="Introduction" id="{ea42540a-c17e-cc72-c85c-39a4905a33fe}">
           <p14:sldIdLst>
             <p14:sldId id="256"/>
             <p14:sldId id="257"/>
           </p14:sldIdLst>
         </p14:section>
-        <p14:section name="La plateforme" id="{efb57f8e-6cc1-8ff7-3425-58634588c188}">
+        <p14:section name="La plateforme" id="{47b96006-777e-941f-e4db-681f27bb3edf}">
           <p14:sldIdLst>
             <p14:sldId id="258"/>
             <p14:sldId id="259"/>
             <p14:sldId id="260"/>
           </p14:sldIdLst>
         </p14:section>
-        <p14:section name="Fonds et BoM" id="{c1743b85-26b9-d5be-33fa-3179219594b7}">
+        <p14:section name="Fonds et BoM" id="{6092009d-8b0a-963c-8e26-9deb64fabcc8}">
           <p14:sldIdLst>
             <p14:sldId id="261"/>
             <p14:sldId id="262"/>
           </p14:sldIdLst>
         </p14:section>
-        <p14:section name="Qualité" id="{1e843aba-b6d4-83a7-4911-0cb724480f3c}">
+        <p14:section name="Qualité" id="{3f87fbf7-500d-969d-da01-abc5edbb9b7f}">
           <p14:sldIdLst>
             <p14:sldId id="263"/>
           </p14:sldIdLst>
         </p14:section>
-        <p14:section name="Suite" id="{4c63805f-e60b-f9da-d56f-b0b9b6b880cf}">
+        <p14:section name="Suite" id="{10476a33-35f4-e651-31f3-d1355738cd51}">
           <p14:sldIdLst>
             <p14:sldId id="264"/>
             <p14:sldId id="265"/>
@@ -992,7 +992,7 @@
           <a:p>
             <a:r>
               <a:rPr lang="en-US" dirty="0"/>
-              <a:t>Les gardes : sans double authentification, puis sans conditions acceptées, le marchand ne peut rien faire. L'approbation finale exige un approbateur différent de l'analyste et zéro blocage.</a:t>
+              <a:t>Les gardes : sans double authentification, puis sans conditions acceptées, le marchand ne peut rien faire. L'approbation finale exige zéro blocage et un approbateur qui n'a jamais eu la main sur le dossier : ni créateur, ni analyste, ni auteur d'une réassignation.</a:t>
             </a:r>
             <a:endParaRPr lang="en-US" dirty="0"/>
           </a:p>
@@ -7489,7 +7489,7 @@
                   <a:schemeClr val="tx2"/>
                 </a:solidFill>
               </a:rPr>
-              <a:t>approbateur ≠ analyste</a:t>
+              <a:t>approbateur jamais intervenu</a:t>
             </a:r>
             <a:endParaRPr lang="en-US" sz="1200" dirty="0"/>
           </a:p>
@@ -14389,7 +14389,7 @@
                   <a:schemeClr val="tx2"/>
                 </a:solidFill>
               </a:rPr>
-              <a:t>Un analyste approbateur pouvait réassigner le dossier puis le trancher. Désormais exclu, comme tout ce qui a eu la main sur le dossier.</a:t>
+              <a:t>Un analyste approbateur pouvait réassigner le dossier puis le trancher. Désormais exclu, comme toute personne qui a eu la main sur le dossier.</a:t>
             </a:r>
             <a:endParaRPr lang="en-US" sz="1200" dirty="0"/>
           </a:p>

--- a/outputs/recap/MIPS-recapitulatif.pptx
+++ b/outputs/recap/MIPS-recapitulatif.pptx
@@ -117,31 +117,31 @@
   <p:extLst>
     <p:ext uri="{521415D9-36F7-43E2-AB2F-B90AF26B5E84}">
       <p14:sectionLst xmlns:p14="http://schemas.microsoft.com/office/powerpoint/2010/main">
-        <p14:section name="Introduction" id="{ea42540a-c17e-cc72-c85c-39a4905a33fe}">
+        <p14:section name="Introduction" id="{f406b6dc-029e-7d15-b28b-05e2d28c40b6}">
           <p14:sldIdLst>
             <p14:sldId id="256"/>
             <p14:sldId id="257"/>
           </p14:sldIdLst>
         </p14:section>
-        <p14:section name="La plateforme" id="{47b96006-777e-941f-e4db-681f27bb3edf}">
+        <p14:section name="La plateforme" id="{b60a7fe0-6543-5ab1-662f-13e62c995edd}">
           <p14:sldIdLst>
             <p14:sldId id="258"/>
             <p14:sldId id="259"/>
             <p14:sldId id="260"/>
           </p14:sldIdLst>
         </p14:section>
-        <p14:section name="Fonds et BoM" id="{6092009d-8b0a-963c-8e26-9deb64fabcc8}">
+        <p14:section name="Fonds et BoM" id="{8d519305-f7ae-2b13-5808-9da5bacf0675}">
           <p14:sldIdLst>
             <p14:sldId id="261"/>
             <p14:sldId id="262"/>
           </p14:sldIdLst>
         </p14:section>
-        <p14:section name="Qualité" id="{3f87fbf7-500d-969d-da01-abc5edbb9b7f}">
+        <p14:section name="Qualité" id="{4bf0b732-b88b-a775-2d30-e0d975572fce}">
           <p14:sldIdLst>
             <p14:sldId id="263"/>
           </p14:sldIdLst>
         </p14:section>
-        <p14:section name="Suite" id="{10476a33-35f4-e651-31f3-d1355738cd51}">
+        <p14:section name="Suite" id="{9810867f-eb63-77f8-3068-c691a6357b74}">
           <p14:sldIdLst>
             <p14:sldId id="264"/>
             <p14:sldId id="265"/>
@@ -816,7 +816,7 @@
           <a:p>
             <a:r>
               <a:rPr lang="en-US" dirty="0"/>
-              <a:t>Trois messages : ce qui est construit, ce que ça prouve pour la BoM, et les deux décisions qui bloquent. Les 579 vérifications couvrent les neuf modules, sur des données fictives uniquement.</a:t>
+              <a:t>Trois messages : ce qui est construit, ce que ça prouve pour la BoM, et les deux décisions qui bloquent. Les 590 vérifications couvrent les neuf modules, sur des données fictives uniquement.</a:t>
             </a:r>
             <a:endParaRPr lang="en-US" dirty="0"/>
           </a:p>
@@ -3836,7 +3836,7 @@
                 <a:ea typeface="Cambria" pitchFamily="34" charset="-122"/>
                 <a:cs typeface="Cambria" pitchFamily="34" charset="-120"/>
               </a:rPr>
-              <a:t>579</a:t>
+              <a:t>590</a:t>
             </a:r>
             <a:endParaRPr lang="en-US" sz="5400" dirty="0"/>
           </a:p>
@@ -3886,7 +3886,7 @@
                   <a:schemeClr val="tx2"/>
                 </a:solidFill>
               </a:rPr>
-              <a:t>sur 10 suites</a:t>
+              <a:t>sur 11 suites</a:t>
             </a:r>
             <a:endParaRPr lang="en-US" sz="1400" dirty="0"/>
           </a:p>
@@ -12647,7 +12647,7 @@
                   <a:schemeClr val="tx1"/>
                 </a:solidFill>
               </a:rPr>
-              <a:t>579 vérifications automatiques ont déjà corrigé trois failles</a:t>
+              <a:t>590 vérifications automatiques ont déjà corrigé trois failles</a:t>
             </a:r>
             <a:endParaRPr lang="en-US" sz="3000" dirty="0"/>
           </a:p>
@@ -12679,7 +12679,7 @@
                 <a:gridCol w="2834640"/>
                 <a:gridCol w="1371600"/>
               </a:tblGrid>
-              <a:tr h="365760">
+              <a:tr h="338328">
                 <a:tc>
                   <a:txBody>
                     <a:bodyPr/>
@@ -12803,7 +12803,7 @@
                   </a:tcPr>
                 </a:tc>
               </a:tr>
-              <a:tr h="365760">
+              <a:tr h="338328">
                 <a:tc>
                   <a:txBody>
                     <a:bodyPr/>
@@ -12921,7 +12921,7 @@
                   </a:tcPr>
                 </a:tc>
               </a:tr>
-              <a:tr h="365760">
+              <a:tr h="338328">
                 <a:tc>
                   <a:txBody>
                     <a:bodyPr/>
@@ -13039,7 +13039,7 @@
                   </a:tcPr>
                 </a:tc>
               </a:tr>
-              <a:tr h="365760">
+              <a:tr h="338328">
                 <a:tc>
                   <a:txBody>
                     <a:bodyPr/>
@@ -13157,7 +13157,7 @@
                   </a:tcPr>
                 </a:tc>
               </a:tr>
-              <a:tr h="365760">
+              <a:tr h="338328">
                 <a:tc>
                   <a:txBody>
                     <a:bodyPr/>
@@ -13275,7 +13275,7 @@
                   </a:tcPr>
                 </a:tc>
               </a:tr>
-              <a:tr h="365760">
+              <a:tr h="338328">
                 <a:tc>
                   <a:txBody>
                     <a:bodyPr/>
@@ -13393,7 +13393,7 @@
                   </a:tcPr>
                 </a:tc>
               </a:tr>
-              <a:tr h="365760">
+              <a:tr h="338328">
                 <a:tc>
                   <a:txBody>
                     <a:bodyPr/>
@@ -13511,7 +13511,7 @@
                   </a:tcPr>
                 </a:tc>
               </a:tr>
-              <a:tr h="365760">
+              <a:tr h="338328">
                 <a:tc>
                   <a:txBody>
                     <a:bodyPr/>
@@ -13629,7 +13629,7 @@
                   </a:tcPr>
                 </a:tc>
               </a:tr>
-              <a:tr h="365760">
+              <a:tr h="338328">
                 <a:tc>
                   <a:txBody>
                     <a:bodyPr/>
@@ -13747,7 +13747,125 @@
                   </a:tcPr>
                 </a:tc>
               </a:tr>
-              <a:tr h="365760">
+              <a:tr h="338328">
+                <a:tc>
+                  <a:txBody>
+                    <a:bodyPr/>
+                    <a:lstStyle/>
+                    <a:p>
+                      <a:pPr indent="0" marL="0">
+                        <a:buNone/>
+                      </a:pPr>
+                      <a:r>
+                        <a:rPr lang="en-US" sz="1300" dirty="0">
+                          <a:solidFill>
+                            <a:schemeClr val="tx1"/>
+                          </a:solidFill>
+                        </a:rPr>
+                        <a:t>Antivirus (ClamAV)</a:t>
+                      </a:r>
+                      <a:endParaRPr lang="en-US" sz="1300" dirty="0"/>
+                    </a:p>
+                  </a:txBody>
+                  <a:tcPr marL="54864" marR="54864" marT="54864" marB="54864" anchor="ctr">
+                    <a:lnL w="6350" cap="flat" cmpd="sng" algn="ctr">
+                      <a:solidFill>
+                        <a:srgbClr val="D5DDE7"/>
+                      </a:solidFill>
+                      <a:prstDash val="solid"/>
+                      <a:round/>
+                      <a:headEnd type="none" w="med" len="med"/>
+                      <a:tailEnd type="none" w="med" len="med"/>
+                    </a:lnL>
+                    <a:lnR w="6350" cap="flat" cmpd="sng" algn="ctr">
+                      <a:solidFill>
+                        <a:srgbClr val="D5DDE7"/>
+                      </a:solidFill>
+                      <a:prstDash val="solid"/>
+                      <a:round/>
+                      <a:headEnd type="none" w="med" len="med"/>
+                      <a:tailEnd type="none" w="med" len="med"/>
+                    </a:lnR>
+                    <a:lnT w="6350" cap="flat" cmpd="sng" algn="ctr">
+                      <a:solidFill>
+                        <a:srgbClr val="D5DDE7"/>
+                      </a:solidFill>
+                      <a:prstDash val="solid"/>
+                      <a:round/>
+                      <a:headEnd type="none" w="med" len="med"/>
+                      <a:tailEnd type="none" w="med" len="med"/>
+                    </a:lnT>
+                    <a:lnB w="6350" cap="flat" cmpd="sng" algn="ctr">
+                      <a:solidFill>
+                        <a:srgbClr val="D5DDE7"/>
+                      </a:solidFill>
+                      <a:prstDash val="solid"/>
+                      <a:round/>
+                      <a:headEnd type="none" w="med" len="med"/>
+                      <a:tailEnd type="none" w="med" len="med"/>
+                    </a:lnB>
+                  </a:tcPr>
+                </a:tc>
+                <a:tc>
+                  <a:txBody>
+                    <a:bodyPr/>
+                    <a:lstStyle/>
+                    <a:p>
+                      <a:pPr algn="r" indent="0" marL="0">
+                        <a:buNone/>
+                      </a:pPr>
+                      <a:r>
+                        <a:rPr lang="en-US" sz="1300" dirty="0">
+                          <a:solidFill>
+                            <a:schemeClr val="tx1"/>
+                          </a:solidFill>
+                        </a:rPr>
+                        <a:t>11</a:t>
+                      </a:r>
+                      <a:endParaRPr lang="en-US" sz="1300" dirty="0"/>
+                    </a:p>
+                  </a:txBody>
+                  <a:tcPr marL="54864" marR="54864" marT="54864" marB="54864" anchor="ctr">
+                    <a:lnL w="6350" cap="flat" cmpd="sng" algn="ctr">
+                      <a:solidFill>
+                        <a:srgbClr val="D5DDE7"/>
+                      </a:solidFill>
+                      <a:prstDash val="solid"/>
+                      <a:round/>
+                      <a:headEnd type="none" w="med" len="med"/>
+                      <a:tailEnd type="none" w="med" len="med"/>
+                    </a:lnL>
+                    <a:lnR w="6350" cap="flat" cmpd="sng" algn="ctr">
+                      <a:solidFill>
+                        <a:srgbClr val="D5DDE7"/>
+                      </a:solidFill>
+                      <a:prstDash val="solid"/>
+                      <a:round/>
+                      <a:headEnd type="none" w="med" len="med"/>
+                      <a:tailEnd type="none" w="med" len="med"/>
+                    </a:lnR>
+                    <a:lnT w="6350" cap="flat" cmpd="sng" algn="ctr">
+                      <a:solidFill>
+                        <a:srgbClr val="D5DDE7"/>
+                      </a:solidFill>
+                      <a:prstDash val="solid"/>
+                      <a:round/>
+                      <a:headEnd type="none" w="med" len="med"/>
+                      <a:tailEnd type="none" w="med" len="med"/>
+                    </a:lnT>
+                    <a:lnB w="6350" cap="flat" cmpd="sng" algn="ctr">
+                      <a:solidFill>
+                        <a:srgbClr val="D5DDE7"/>
+                      </a:solidFill>
+                      <a:prstDash val="solid"/>
+                      <a:round/>
+                      <a:headEnd type="none" w="med" len="med"/>
+                      <a:tailEnd type="none" w="med" len="med"/>
+                    </a:lnB>
+                  </a:tcPr>
+                </a:tc>
+              </a:tr>
+              <a:tr h="338328">
                 <a:tc>
                   <a:txBody>
                     <a:bodyPr/>
@@ -13865,7 +13983,7 @@
                   </a:tcPr>
                 </a:tc>
               </a:tr>
-              <a:tr h="365760">
+              <a:tr h="338328">
                 <a:tc>
                   <a:txBody>
                     <a:bodyPr/>
@@ -14017,7 +14135,7 @@
                   <a:schemeClr val="tx2"/>
                 </a:solidFill>
               </a:rPr>
-              <a:t>Données fictives, montants attendus calculés à la main. Treize erreurs volontaires dans le code : toutes détectées.</a:t>
+              <a:t>Données fictives, montants attendus calculés à la main. Quatorze erreurs volontaires dans le code : toutes détectées.</a:t>
             </a:r>
             <a:endParaRPr lang="en-US" sz="1200" dirty="0"/>
           </a:p>
@@ -14513,7 +14631,7 @@
                   <a:schemeClr val="tx2"/>
                 </a:solidFill>
               </a:rPr>
-              <a:t>Les règles métier (unité, remboursements, TVA), le vrai BigQuery, un vrai mois MCB, les écrans.</a:t>
+              <a:t>Les règles métier (unité, remboursements, TVA), le vrai BigQuery, un vrai mois MCB, le taux de détection de l'antivirus (signature de test), les écrans.</a:t>
             </a:r>
             <a:endParaRPr lang="en-US" sz="1200" dirty="0"/>
           </a:p>

--- a/outputs/recap/MIPS-recapitulatif.pptx
+++ b/outputs/recap/MIPS-recapitulatif.pptx
@@ -117,31 +117,31 @@
   <p:extLst>
     <p:ext uri="{521415D9-36F7-43E2-AB2F-B90AF26B5E84}">
       <p14:sectionLst xmlns:p14="http://schemas.microsoft.com/office/powerpoint/2010/main">
-        <p14:section name="Introduction" id="{f406b6dc-029e-7d15-b28b-05e2d28c40b6}">
+        <p14:section name="Introduction" id="{68695024-1b3a-f354-d3cc-40bc48821380}">
           <p14:sldIdLst>
             <p14:sldId id="256"/>
             <p14:sldId id="257"/>
           </p14:sldIdLst>
         </p14:section>
-        <p14:section name="La plateforme" id="{b60a7fe0-6543-5ab1-662f-13e62c995edd}">
+        <p14:section name="La plateforme" id="{f7340988-bdd8-8008-aebf-8928e0f8609f}">
           <p14:sldIdLst>
             <p14:sldId id="258"/>
             <p14:sldId id="259"/>
             <p14:sldId id="260"/>
           </p14:sldIdLst>
         </p14:section>
-        <p14:section name="Fonds et BoM" id="{8d519305-f7ae-2b13-5808-9da5bacf0675}">
+        <p14:section name="Fonds et BoM" id="{b46bf6d5-ac0c-9d8d-cd5b-17b0f8ab4b22}">
           <p14:sldIdLst>
             <p14:sldId id="261"/>
             <p14:sldId id="262"/>
           </p14:sldIdLst>
         </p14:section>
-        <p14:section name="Qualité" id="{4bf0b732-b88b-a775-2d30-e0d975572fce}">
+        <p14:section name="Qualité" id="{f65b3982-0bbb-2b0d-a1ae-12b8aaaec13e}">
           <p14:sldIdLst>
             <p14:sldId id="263"/>
           </p14:sldIdLst>
         </p14:section>
-        <p14:section name="Suite" id="{9810867f-eb63-77f8-3068-c691a6357b74}">
+        <p14:section name="Suite" id="{a16613b4-8639-5eab-6340-947f0353945c}">
           <p14:sldIdLst>
             <p14:sldId id="264"/>
             <p14:sldId id="265"/>
@@ -1256,7 +1256,7 @@
           <a:p>
             <a:r>
               <a:rPr lang="en-US" dirty="0"/>
-              <a:t>Les captures prouvent que les fonctions sont construites, pas qu'elles sont en service. S01f et C05 montrent un texte de conditions de remplissage.</a:t>
+              <a:t>S04d a été recapturée le 30 octobre avec ClamAV et les signatures officielles : chaque pièce affiche « antivirus OK », ce qui veut dire « aucune signature connue détectée ». Les captures prouvent que les fonctions sont construites, pas qu'elles sont en service. S01f et C05 montrent un texte de conditions de remplissage.</a:t>
             </a:r>
             <a:endParaRPr lang="en-US" dirty="0"/>
           </a:p>
@@ -11290,7 +11290,7 @@
                             <a:schemeClr val="tx1"/>
                           </a:solidFill>
                         </a:rPr>
-                        <a:t>Pas d'antivirus : pièces « not scanned »</a:t>
+                        <a:t>Antivirus actif sur la démo seulement (S04d)</a:t>
                       </a:r>
                       <a:endParaRPr lang="en-US" sz="1300" dirty="0"/>
                     </a:p>

--- a/outputs/recap/MIPS-recapitulatif.pptx
+++ b/outputs/recap/MIPS-recapitulatif.pptx
@@ -117,31 +117,31 @@
   <p:extLst>
     <p:ext uri="{521415D9-36F7-43E2-AB2F-B90AF26B5E84}">
       <p14:sectionLst xmlns:p14="http://schemas.microsoft.com/office/powerpoint/2010/main">
-        <p14:section name="Introduction" id="{68695024-1b3a-f354-d3cc-40bc48821380}">
+        <p14:section name="Introduction" id="{8ca1a958-2a30-71af-e8af-f1cf0a3460de}">
           <p14:sldIdLst>
             <p14:sldId id="256"/>
             <p14:sldId id="257"/>
           </p14:sldIdLst>
         </p14:section>
-        <p14:section name="La plateforme" id="{f7340988-bdd8-8008-aebf-8928e0f8609f}">
+        <p14:section name="La plateforme" id="{b58ac09c-fd87-80d7-17fd-ab9c546c57d5}">
           <p14:sldIdLst>
             <p14:sldId id="258"/>
             <p14:sldId id="259"/>
             <p14:sldId id="260"/>
           </p14:sldIdLst>
         </p14:section>
-        <p14:section name="Fonds et BoM" id="{b46bf6d5-ac0c-9d8d-cd5b-17b0f8ab4b22}">
+        <p14:section name="Fonds et BoM" id="{fee9734f-04f3-3393-5a7e-b9836a10be29}">
           <p14:sldIdLst>
             <p14:sldId id="261"/>
             <p14:sldId id="262"/>
           </p14:sldIdLst>
         </p14:section>
-        <p14:section name="Qualité" id="{f65b3982-0bbb-2b0d-a1ae-12b8aaaec13e}">
+        <p14:section name="Qualité" id="{beeeb231-bb91-252d-282a-74014514e358}">
           <p14:sldIdLst>
             <p14:sldId id="263"/>
           </p14:sldIdLst>
         </p14:section>
-        <p14:section name="Suite" id="{a16613b4-8639-5eab-6340-947f0353945c}">
+        <p14:section name="Suite" id="{36d3e346-e237-6a5b-b5d9-cf03372eb8d8}">
           <p14:sldIdLst>
             <p14:sldId id="264"/>
             <p14:sldId id="265"/>
@@ -728,7 +728,7 @@
           <a:p>
             <a:r>
               <a:rPr lang="en-US" dirty="0"/>
-              <a:t>Tant que le modèle n'est pas choisi, ne pas développer la réconciliation trust et ne pas la promettre au régulateur.</a:t>
+              <a:t>Modèle A retenu le 31 octobre : ne pas développer la réconciliation trust et ne pas la promettre au régulateur. Le modèle B ne sera envisagé que pour une raison commerciale claire, après accord des acquéreurs.</a:t>
             </a:r>
             <a:endParaRPr lang="en-US" dirty="0"/>
           </a:p>
@@ -2341,7 +2341,7 @@
                   <a:schemeClr val="accent6"/>
                 </a:solidFill>
               </a:rPr>
-              <a:t>CEO · BLOQUANT</a:t>
+              <a:t>CONFORMITÉ · BLOQUANT</a:t>
             </a:r>
             <a:endParaRPr lang="en-US" sz="1100" dirty="0"/>
           </a:p>
@@ -2377,7 +2377,7 @@
                   <a:schemeClr val="tx1"/>
                 </a:solidFill>
               </a:rPr>
-              <a:t>Modèle A ou B pour SPIN</a:t>
+              <a:t>Licence compatible avec le modèle A</a:t>
             </a:r>
             <a:endParaRPr lang="en-US" sz="1600" dirty="0"/>
           </a:p>
@@ -2804,13 +2804,13 @@
             </a:avLst>
           </a:prstGeom>
           <a:solidFill>
-            <a:schemeClr val="accent1">
-              <a:alpha val="8000"/>
+            <a:schemeClr val="accent6">
+              <a:alpha val="12000"/>
             </a:schemeClr>
           </a:solidFill>
-          <a:ln w="9525">
+          <a:ln w="19050">
             <a:solidFill>
-              <a:schemeClr val="bg2"/>
+              <a:schemeClr val="accent6"/>
             </a:solidFill>
             <a:prstDash val="solid"/>
           </a:ln>
@@ -2843,10 +2843,10 @@
             <a:r>
               <a:rPr lang="en-US" sz="1100" b="1" dirty="0">
                 <a:solidFill>
-                  <a:schemeClr val="accent1"/>
-                </a:solidFill>
-              </a:rPr>
-              <a:t>FINANCE</a:t>
+                  <a:schemeClr val="accent6"/>
+                </a:solidFill>
+              </a:rPr>
+              <a:t>FINANCE · BLOQUANT</a:t>
             </a:r>
             <a:endParaRPr lang="en-US" sz="1100" dirty="0"/>
           </a:p>
@@ -3221,7 +3221,7 @@
                   <a:schemeClr val="tx2"/>
                 </a:solidFill>
               </a:rPr>
-              <a:t>Les deux décisions en rouge conditionnent le module trust et ce qui est promis à la Banque de Maurice.</a:t>
+              <a:t>En rouge : les vérifications dont dépendent le modèle A retenu et ce qui est promis à la Banque de Maurice.</a:t>
             </a:r>
             <a:endParaRPr lang="en-US" sz="1300" dirty="0"/>
           </a:p>
@@ -3370,7 +3370,7 @@
                   <a:schemeClr val="bg1"/>
                 </a:solidFill>
               </a:rPr>
-              <a:t>1. Choisir le modèle de flux de fonds de SPIN (A ou B)</a:t>
+              <a:t>1. Vérifier que la licence n'exige pas de détenir les fonds (modèle A retenu)</a:t>
             </a:r>
             <a:endParaRPr lang="en-US" sz="2000" dirty="0"/>
           </a:p>
@@ -3464,7 +3464,7 @@
                   <a:schemeClr val="tx1"/>
                 </a:solidFill>
               </a:rPr>
-              <a:t>L'essentiel : prototype testé, deux décisions bloquent</a:t>
+              <a:t>L'essentiel : modèle A retenu, deux vérifications bloquent</a:t>
             </a:r>
             <a:endParaRPr lang="en-US" sz="3000" dirty="0"/>
           </a:p>
@@ -4141,7 +4141,7 @@
                   <a:schemeClr val="tx1"/>
                 </a:solidFill>
               </a:rPr>
-              <a:t>À décider</a:t>
+              <a:t>À vérifier</a:t>
             </a:r>
             <a:endParaRPr lang="en-US" sz="1800" dirty="0"/>
           </a:p>
@@ -4177,7 +4177,7 @@
                   <a:schemeClr val="tx1"/>
                 </a:solidFill>
               </a:rPr>
-              <a:t>Le modèle de flux de fonds de SPIN (passerelle ou encaissement pour compte) et la lecture des textes de la Banque de Maurice.</a:t>
+              <a:t>Modèle A (passerelle) retenu le 31 octobre. Bloquant : la licence ne doit pas exiger de détenir les fonds, et aucun flux (wallets, virement) ne doit passer par un compte MIPS.</a:t>
             </a:r>
             <a:endParaRPr lang="en-US" sz="1500" dirty="0"/>
           </a:p>
@@ -8750,7 +8750,7 @@
                   <a:schemeClr val="tx1"/>
                 </a:solidFill>
               </a:rPr>
-              <a:t>Où va l'argent : passerelle ou encaissement pour compte</a:t>
+              <a:t>Où va l'argent : modèle A retenu, B écarté pour l'instant</a:t>
             </a:r>
             <a:endParaRPr lang="en-US" sz="3000" dirty="0"/>
           </a:p>
@@ -8786,7 +8786,7 @@
                   <a:schemeClr val="accent4"/>
                 </a:solidFill>
               </a:rPr>
-              <a:t>A · Passerelle — modèle actuel probable</a:t>
+              <a:t>A · Passerelle — retenu le 31 octobre</a:t>
             </a:r>
             <a:endParaRPr lang="en-US" sz="1600" dirty="0"/>
           </a:p>
@@ -9368,7 +9368,7 @@
                   <a:schemeClr val="accent5"/>
                 </a:solidFill>
               </a:rPr>
-              <a:t>B · Encaissement pour compte — option SPIN</a:t>
+              <a:t>B · Encaissement pour compte — non retenu</a:t>
             </a:r>
             <a:endParaRPr lang="en-US" sz="1600" dirty="0"/>
           </a:p>
@@ -12460,7 +12460,7 @@
                             <a:schemeClr val="tx1"/>
                           </a:solidFill>
                         </a:rPr>
-                        <a:t>Non construit ; dépend du modèle A / B</a:t>
+                        <a:t>Trust sans objet (modèle A) ; le reste non construit</a:t>
                       </a:r>
                       <a:endParaRPr lang="en-US" sz="1300" dirty="0"/>
                     </a:p>
@@ -15483,7 +15483,7 @@
                   <a:schemeClr val="tx2"/>
                 </a:solidFill>
               </a:rPr>
-              <a:t>Sans code : seulement en modèle B</a:t>
+              <a:t>Ne pas développer : modèle A retenu</a:t>
             </a:r>
             <a:endParaRPr lang="en-US" sz="1300" dirty="0"/>
           </a:p>
